--- a/Earth_in_Action_Aerosols.pptx
+++ b/Earth_in_Action_Aerosols.pptx
@@ -14,9 +14,11 @@
     <p:sldId id="262" r:id="rId8"/>
     <p:sldId id="263" r:id="rId9"/>
     <p:sldId id="264" r:id="rId10"/>
+    <p:sldId id="265" r:id="rId11"/>
+    <p:sldId id="266" r:id="rId12"/>
   </p:sldIdLst>
   <p:notesMasterIdLst>
-    <p:notesMasterId r:id="rId11"/>
+    <p:notesMasterId r:id="rId13"/>
   </p:notesMasterIdLst>
   <p:sldSz cx="9144000" cy="5143500"/>
   <p:notesSz cx="5143500" cy="9144000"/>
@@ -534,6 +536,182 @@
             <a:fld id="{F7021451-1387-4CA6-816F-3879F97B5CBC}" type="slidenum">
               <a:rPr lang="en-US"/>
               <a:t>1</a:t>
+            </a:fld>
+            <a:endParaRPr lang="en-US"/>
+          </a:p>
+        </p:txBody>
+      </p:sp>
+    </p:spTree>
+    <p:extLst>
+      <p:ext uri="{BB962C8B-B14F-4D97-AF65-F5344CB8AC3E}">
+        <p14:creationId xmlns:p14="http://schemas.microsoft.com/office/powerpoint/2010/main" val="1024086991"/>
+      </p:ext>
+    </p:extLst>
+  </p:cSld>
+  <p:clrMapOvr>
+    <a:masterClrMapping/>
+  </p:clrMapOvr>
+</p:notes>
+</file>
+
+<file path=ppt/notesSlides/notesSlide10.xml><?xml version="1.0" encoding="utf-8"?>
+<p:notes xmlns:a="http://schemas.openxmlformats.org/drawingml/2006/main" xmlns:r="http://schemas.openxmlformats.org/officeDocument/2006/relationships" xmlns:p="http://schemas.openxmlformats.org/presentationml/2006/main">
+  <p:cSld>
+    <p:spTree>
+      <p:nvGrpSpPr>
+        <p:cNvPr id="1" name=""/>
+        <p:cNvGrpSpPr/>
+        <p:nvPr/>
+      </p:nvGrpSpPr>
+      <p:grpSpPr>
+        <a:xfrm>
+          <a:off x="0" y="0"/>
+          <a:ext cx="0" cy="0"/>
+          <a:chOff x="0" y="0"/>
+          <a:chExt cx="0" cy="0"/>
+        </a:xfrm>
+      </p:grpSpPr>
+      <p:sp>
+        <p:nvSpPr>
+          <p:cNvPr id="2" name="Slide Image Placeholder 1"/>
+          <p:cNvSpPr>
+            <a:spLocks noGrp="1" noRot="1" noChangeAspect="1"/>
+          </p:cNvSpPr>
+          <p:nvPr>
+            <p:ph type="sldImg"/>
+          </p:nvPr>
+        </p:nvSpPr>
+        <p:spPr/>
+      </p:sp>
+      <p:sp>
+        <p:nvSpPr>
+          <p:cNvPr id="3" name="Notes Placeholder 2"/>
+          <p:cNvSpPr>
+            <a:spLocks noGrp="1"/>
+          </p:cNvSpPr>
+          <p:nvPr>
+            <p:ph type="body" idx="1"/>
+          </p:nvPr>
+        </p:nvSpPr>
+        <p:spPr/>
+        <p:txBody>
+          <a:bodyPr/>
+          <a:lstStyle/>
+          <a:p>
+            <a:r>
+              <a:rPr lang="en-US" dirty="0"/>
+              <a:t/>
+            </a:r>
+            <a:endParaRPr lang="en-US" dirty="0"/>
+          </a:p>
+        </p:txBody>
+      </p:sp>
+      <p:sp>
+        <p:nvSpPr>
+          <p:cNvPr id="4" name="Slide Number Placeholder 3"/>
+          <p:cNvSpPr>
+            <a:spLocks noGrp="1"/>
+          </p:cNvSpPr>
+          <p:nvPr>
+            <p:ph type="sldNum" sz="quarter" idx="10"/>
+          </p:nvPr>
+        </p:nvSpPr>
+        <p:spPr/>
+        <p:txBody>
+          <a:bodyPr/>
+          <a:lstStyle/>
+          <a:p>
+            <a:fld id="{F7021451-1387-4CA6-816F-3879F97B5CBC}" type="slidenum">
+              <a:rPr lang="en-US"/>
+              <a:t>10</a:t>
+            </a:fld>
+            <a:endParaRPr lang="en-US"/>
+          </a:p>
+        </p:txBody>
+      </p:sp>
+    </p:spTree>
+    <p:extLst>
+      <p:ext uri="{BB962C8B-B14F-4D97-AF65-F5344CB8AC3E}">
+        <p14:creationId xmlns:p14="http://schemas.microsoft.com/office/powerpoint/2010/main" val="1024086991"/>
+      </p:ext>
+    </p:extLst>
+  </p:cSld>
+  <p:clrMapOvr>
+    <a:masterClrMapping/>
+  </p:clrMapOvr>
+</p:notes>
+</file>
+
+<file path=ppt/notesSlides/notesSlide11.xml><?xml version="1.0" encoding="utf-8"?>
+<p:notes xmlns:a="http://schemas.openxmlformats.org/drawingml/2006/main" xmlns:r="http://schemas.openxmlformats.org/officeDocument/2006/relationships" xmlns:p="http://schemas.openxmlformats.org/presentationml/2006/main">
+  <p:cSld>
+    <p:spTree>
+      <p:nvGrpSpPr>
+        <p:cNvPr id="1" name=""/>
+        <p:cNvGrpSpPr/>
+        <p:nvPr/>
+      </p:nvGrpSpPr>
+      <p:grpSpPr>
+        <a:xfrm>
+          <a:off x="0" y="0"/>
+          <a:ext cx="0" cy="0"/>
+          <a:chOff x="0" y="0"/>
+          <a:chExt cx="0" cy="0"/>
+        </a:xfrm>
+      </p:grpSpPr>
+      <p:sp>
+        <p:nvSpPr>
+          <p:cNvPr id="2" name="Slide Image Placeholder 1"/>
+          <p:cNvSpPr>
+            <a:spLocks noGrp="1" noRot="1" noChangeAspect="1"/>
+          </p:cNvSpPr>
+          <p:nvPr>
+            <p:ph type="sldImg"/>
+          </p:nvPr>
+        </p:nvSpPr>
+        <p:spPr/>
+      </p:sp>
+      <p:sp>
+        <p:nvSpPr>
+          <p:cNvPr id="3" name="Notes Placeholder 2"/>
+          <p:cNvSpPr>
+            <a:spLocks noGrp="1"/>
+          </p:cNvSpPr>
+          <p:nvPr>
+            <p:ph type="body" idx="1"/>
+          </p:nvPr>
+        </p:nvSpPr>
+        <p:spPr/>
+        <p:txBody>
+          <a:bodyPr/>
+          <a:lstStyle/>
+          <a:p>
+            <a:r>
+              <a:rPr lang="en-US" dirty="0"/>
+              <a:t/>
+            </a:r>
+            <a:endParaRPr lang="en-US" dirty="0"/>
+          </a:p>
+        </p:txBody>
+      </p:sp>
+      <p:sp>
+        <p:nvSpPr>
+          <p:cNvPr id="4" name="Slide Number Placeholder 3"/>
+          <p:cNvSpPr>
+            <a:spLocks noGrp="1"/>
+          </p:cNvSpPr>
+          <p:nvPr>
+            <p:ph type="sldNum" sz="quarter" idx="10"/>
+          </p:nvPr>
+        </p:nvSpPr>
+        <p:spPr/>
+        <p:txBody>
+          <a:bodyPr/>
+          <a:lstStyle/>
+          <a:p>
+            <a:fld id="{F7021451-1387-4CA6-816F-3879F97B5CBC}" type="slidenum">
+              <a:rPr lang="en-US"/>
+              <a:t>11</a:t>
             </a:fld>
             <a:endParaRPr lang="en-US"/>
           </a:p>
@@ -1596,27 +1774,7 @@
         <p:spPr>
           <a:xfrm>
             <a:off x="0" y="0"/>
-            <a:ext cx="9144000" cy="5143500"/>
-          </a:xfrm>
-          <a:prstGeom prst="rect">
-            <a:avLst/>
-          </a:prstGeom>
-          <a:solidFill>
-            <a:srgbClr val="131A2E"/>
-          </a:solidFill>
-          <a:ln/>
-        </p:spPr>
-      </p:sp>
-      <p:sp>
-        <p:nvSpPr>
-          <p:cNvPr id="3" name="Shape 1"/>
-          <p:cNvSpPr/>
-          <p:nvPr/>
-        </p:nvSpPr>
-        <p:spPr>
-          <a:xfrm>
-            <a:off x="0" y="0"/>
-            <a:ext cx="73152" cy="5143500"/>
+            <a:ext cx="64008" cy="5143500"/>
           </a:xfrm>
           <a:prstGeom prst="rect">
             <a:avLst/>
@@ -1629,13 +1787,13 @@
       </p:sp>
       <p:sp>
         <p:nvSpPr>
-          <p:cNvPr id="4" name="Text 2"/>
-          <p:cNvSpPr/>
-          <p:nvPr/>
-        </p:nvSpPr>
-        <p:spPr>
-          <a:xfrm>
-            <a:off x="731520" y="1097280"/>
+          <p:cNvPr id="3" name="Text 1"/>
+          <p:cNvSpPr/>
+          <p:nvPr/>
+        </p:nvSpPr>
+        <p:spPr>
+          <a:xfrm>
+            <a:off x="731520" y="914400"/>
             <a:ext cx="7315200" cy="640080"/>
           </a:xfrm>
           <a:prstGeom prst="rect">
@@ -1652,7 +1810,7 @@
               <a:buNone/>
             </a:pPr>
             <a:r>
-              <a:rPr lang="en-US" sz="4200" b="1" dirty="0">
+              <a:rPr lang="en-US" sz="4400" dirty="0">
                 <a:solidFill>
                   <a:srgbClr val="E2E8F0"/>
                 </a:solidFill>
@@ -1662,19 +1820,19 @@
               </a:rPr>
               <a:t>EARTH IN ACTION</a:t>
             </a:r>
-            <a:endParaRPr lang="en-US" sz="4200" dirty="0"/>
-          </a:p>
-        </p:txBody>
-      </p:sp>
-      <p:sp>
-        <p:nvSpPr>
-          <p:cNvPr id="5" name="Text 3"/>
-          <p:cNvSpPr/>
-          <p:nvPr/>
-        </p:nvSpPr>
-        <p:spPr>
-          <a:xfrm>
-            <a:off x="731520" y="1737360"/>
+            <a:endParaRPr lang="en-US" sz="4400" dirty="0"/>
+          </a:p>
+        </p:txBody>
+      </p:sp>
+      <p:sp>
+        <p:nvSpPr>
+          <p:cNvPr id="4" name="Text 2"/>
+          <p:cNvSpPr/>
+          <p:nvPr/>
+        </p:nvSpPr>
+        <p:spPr>
+          <a:xfrm>
+            <a:off x="731520" y="1554480"/>
             <a:ext cx="7315200" cy="548640"/>
           </a:xfrm>
           <a:prstGeom prst="rect">
@@ -1691,7 +1849,7 @@
               <a:buNone/>
             </a:pPr>
             <a:r>
-              <a:rPr lang="en-US" sz="3800" dirty="0">
+              <a:rPr lang="en-US" sz="4000" dirty="0">
                 <a:solidFill>
                   <a:srgbClr val="00B4D8"/>
                 </a:solidFill>
@@ -1701,52 +1859,75 @@
               </a:rPr>
               <a:t>Aerosols</a:t>
             </a:r>
-            <a:endParaRPr lang="en-US" sz="3800" dirty="0"/>
+            <a:endParaRPr lang="en-US" sz="4000" dirty="0"/>
+          </a:p>
+        </p:txBody>
+      </p:sp>
+      <p:sp>
+        <p:nvSpPr>
+          <p:cNvPr id="5" name="Text 3"/>
+          <p:cNvSpPr/>
+          <p:nvPr/>
+        </p:nvSpPr>
+        <p:spPr>
+          <a:xfrm>
+            <a:off x="731520" y="2377440"/>
+            <a:ext cx="6400800" cy="640080"/>
+          </a:xfrm>
+          <a:prstGeom prst="rect">
+            <a:avLst/>
+          </a:prstGeom>
+          <a:noFill/>
+          <a:ln/>
+        </p:spPr>
+        <p:txBody>
+          <a:bodyPr wrap="square" lIns="0" tIns="0" rIns="0" bIns="0" rtlCol="0" anchor="ctr"/>
+          <a:lstStyle/>
+          <a:p>
+            <a:pPr indent="0" marL="0">
+              <a:lnSpc>
+                <a:spcPct val="150000"/>
+              </a:lnSpc>
+              <a:buNone/>
+            </a:pPr>
+            <a:r>
+              <a:rPr lang="en-US" sz="1400" dirty="0">
+                <a:solidFill>
+                  <a:srgbClr val="94A3B8"/>
+                </a:solidFill>
+                <a:latin typeface="Calibri" pitchFamily="34" charset="0"/>
+                <a:ea typeface="Calibri" pitchFamily="34" charset="-122"/>
+                <a:cs typeface="Calibri" pitchFamily="34" charset="-120"/>
+              </a:rPr>
+              <a:t>GPU-Accelerated Atmospheric Aerosol Transport Visualization</a:t>
+            </a:r>
+            <a:endParaRPr lang="en-US" sz="1400" dirty="0"/>
+          </a:p>
+          <a:p>
+            <a:pPr indent="0" marL="0">
+              <a:lnSpc>
+                <a:spcPct val="150000"/>
+              </a:lnSpc>
+              <a:buNone/>
+            </a:pPr>
+            <a:r>
+              <a:rPr lang="en-US" sz="1400" dirty="0">
+                <a:solidFill>
+                  <a:srgbClr val="94A3B8"/>
+                </a:solidFill>
+                <a:latin typeface="Calibri" pitchFamily="34" charset="0"/>
+                <a:ea typeface="Calibri" pitchFamily="34" charset="-122"/>
+                <a:cs typeface="Calibri" pitchFamily="34" charset="-120"/>
+              </a:rPr>
+              <a:t>Robinson Projection | 6-Pass GPU Pipeline | Real NASA Data</a:t>
+            </a:r>
+            <a:endParaRPr lang="en-US" sz="1400" dirty="0"/>
           </a:p>
         </p:txBody>
       </p:sp>
       <p:sp>
         <p:nvSpPr>
           <p:cNvPr id="6" name="Text 4"/>
-          <p:cNvSpPr/>
-          <p:nvPr/>
-        </p:nvSpPr>
-        <p:spPr>
-          <a:xfrm>
-            <a:off x="731520" y="2560320"/>
-            <a:ext cx="6400800" cy="457200"/>
-          </a:xfrm>
-          <a:prstGeom prst="rect">
-            <a:avLst/>
-          </a:prstGeom>
-          <a:noFill/>
-          <a:ln/>
-        </p:spPr>
-        <p:txBody>
-          <a:bodyPr wrap="square" lIns="0" tIns="0" rIns="0" bIns="0" rtlCol="0" anchor="ctr"/>
-          <a:lstStyle/>
-          <a:p>
-            <a:pPr indent="0" marL="0">
-              <a:buNone/>
-            </a:pPr>
-            <a:r>
-              <a:rPr lang="en-US" sz="1600" dirty="0">
-                <a:solidFill>
-                  <a:srgbClr val="94A3B8"/>
-                </a:solidFill>
-                <a:latin typeface="Calibri" pitchFamily="34" charset="0"/>
-                <a:ea typeface="Calibri" pitchFamily="34" charset="-122"/>
-                <a:cs typeface="Calibri" pitchFamily="34" charset="-120"/>
-              </a:rPr>
-              <a:t>GPU-Accelerated Atmospheric Aerosol Transport Visualization</a:t>
-            </a:r>
-            <a:endParaRPr lang="en-US" sz="1600" dirty="0"/>
-          </a:p>
-        </p:txBody>
-      </p:sp>
-      <p:sp>
-        <p:nvSpPr>
-          <p:cNvPr id="7" name="Text 5"/>
           <p:cNvSpPr/>
           <p:nvPr/>
         </p:nvSpPr>
@@ -1769,7 +1950,7 @@
               <a:buNone/>
             </a:pPr>
             <a:r>
-              <a:rPr lang="en-US" sz="1400" b="1" dirty="0">
+              <a:rPr lang="en-US" sz="1600" b="1" dirty="0">
                 <a:solidFill>
                   <a:srgbClr val="E2E8F0"/>
                 </a:solidFill>
@@ -1779,20 +1960,20 @@
               </a:rPr>
               <a:t>Jhonatan Garrido-Lecca</a:t>
             </a:r>
-            <a:endParaRPr lang="en-US" sz="1400" dirty="0"/>
-          </a:p>
-        </p:txBody>
-      </p:sp>
-      <p:sp>
-        <p:nvSpPr>
-          <p:cNvPr id="8" name="Text 6"/>
+            <a:endParaRPr lang="en-US" sz="1600" dirty="0"/>
+          </a:p>
+        </p:txBody>
+      </p:sp>
+      <p:sp>
+        <p:nvSpPr>
+          <p:cNvPr id="7" name="Text 5"/>
           <p:cNvSpPr/>
           <p:nvPr/>
         </p:nvSpPr>
         <p:spPr>
           <a:xfrm>
             <a:off x="731520" y="3749040"/>
-            <a:ext cx="6400800" cy="274320"/>
+            <a:ext cx="7315200" cy="274320"/>
           </a:xfrm>
           <a:prstGeom prst="rect">
             <a:avLst/>
@@ -1816,7 +1997,7 @@
                 <a:ea typeface="Calibri" pitchFamily="34" charset="-122"/>
                 <a:cs typeface="Calibri" pitchFamily="34" charset="-120"/>
               </a:rPr>
-              <a:t>NASA GEOS-FP  |  NVIDIA WebGPU  |  ArcGIS Maps SDK 5.0</a:t>
+              <a:t>NASA GEOS-FP  |  NVIDIA WebGPU  |  ArcGIS Maps SDK 5.0  |  Robinson Projection</a:t>
             </a:r>
             <a:endParaRPr lang="en-US" sz="1100" dirty="0"/>
           </a:p>
@@ -1824,18 +2005,18 @@
       </p:sp>
       <p:sp>
         <p:nvSpPr>
-          <p:cNvPr id="9" name="Shape 7"/>
-          <p:cNvSpPr/>
-          <p:nvPr/>
-        </p:nvSpPr>
-        <p:spPr>
-          <a:xfrm>
-            <a:off x="5669280" y="4114800"/>
-            <a:ext cx="1051560" cy="777240"/>
+          <p:cNvPr id="8" name="Shape 6"/>
+          <p:cNvSpPr/>
+          <p:nvPr/>
+        </p:nvSpPr>
+        <p:spPr>
+          <a:xfrm>
+            <a:off x="5029200" y="4160520"/>
+            <a:ext cx="960120" cy="777240"/>
           </a:xfrm>
           <a:prstGeom prst="rect">
             <a:avLst>
-              <a:gd name="adj" fmla="val 9412"/>
+              <a:gd name="adj" fmla="val 7059"/>
             </a:avLst>
           </a:prstGeom>
           <a:solidFill>
@@ -1846,14 +2027,14 @@
       </p:sp>
       <p:sp>
         <p:nvSpPr>
-          <p:cNvPr id="10" name="Text 8"/>
-          <p:cNvSpPr/>
-          <p:nvPr/>
-        </p:nvSpPr>
-        <p:spPr>
-          <a:xfrm>
-            <a:off x="5669280" y="4114800"/>
-            <a:ext cx="1051560" cy="475488"/>
+          <p:cNvPr id="9" name="Text 7"/>
+          <p:cNvSpPr/>
+          <p:nvPr/>
+        </p:nvSpPr>
+        <p:spPr>
+          <a:xfrm>
+            <a:off x="5029200" y="4160520"/>
+            <a:ext cx="960120" cy="475488"/>
           </a:xfrm>
           <a:prstGeom prst="rect">
             <a:avLst/>
@@ -1869,7 +2050,7 @@
               <a:buNone/>
             </a:pPr>
             <a:r>
-              <a:rPr lang="en-US" sz="1800" dirty="0">
+              <a:rPr lang="en-US" sz="1500" dirty="0">
                 <a:solidFill>
                   <a:srgbClr val="76B900"/>
                 </a:solidFill>
@@ -1879,20 +2060,20 @@
               </a:rPr>
               <a:t>500K</a:t>
             </a:r>
-            <a:endParaRPr lang="en-US" sz="1800" dirty="0"/>
-          </a:p>
-        </p:txBody>
-      </p:sp>
-      <p:sp>
-        <p:nvSpPr>
-          <p:cNvPr id="11" name="Text 9"/>
-          <p:cNvSpPr/>
-          <p:nvPr/>
-        </p:nvSpPr>
-        <p:spPr>
-          <a:xfrm>
-            <a:off x="5669280" y="4590288"/>
-            <a:ext cx="1051560" cy="274320"/>
+            <a:endParaRPr lang="en-US" sz="1500" dirty="0"/>
+          </a:p>
+        </p:txBody>
+      </p:sp>
+      <p:sp>
+        <p:nvSpPr>
+          <p:cNvPr id="10" name="Text 8"/>
+          <p:cNvSpPr/>
+          <p:nvPr/>
+        </p:nvSpPr>
+        <p:spPr>
+          <a:xfrm>
+            <a:off x="5029200" y="4636008"/>
+            <a:ext cx="960120" cy="274320"/>
           </a:xfrm>
           <a:prstGeom prst="rect">
             <a:avLst/>
@@ -1908,7 +2089,7 @@
               <a:buNone/>
             </a:pPr>
             <a:r>
-              <a:rPr lang="en-US" sz="700" spc="200" kern="0" dirty="0">
+              <a:rPr lang="en-US" sz="600" spc="200" kern="0" dirty="0">
                 <a:solidFill>
                   <a:srgbClr val="94A3B8"/>
                 </a:solidFill>
@@ -1916,26 +2097,26 @@
                 <a:ea typeface="Calibri" pitchFamily="34" charset="-122"/>
                 <a:cs typeface="Calibri" pitchFamily="34" charset="-120"/>
               </a:rPr>
-              <a:t>PARTICLES</a:t>
-            </a:r>
-            <a:endParaRPr lang="en-US" sz="700" dirty="0"/>
-          </a:p>
-        </p:txBody>
-      </p:sp>
-      <p:sp>
-        <p:nvSpPr>
-          <p:cNvPr id="12" name="Shape 10"/>
-          <p:cNvSpPr/>
-          <p:nvPr/>
-        </p:nvSpPr>
-        <p:spPr>
-          <a:xfrm>
-            <a:off x="6812280" y="4114800"/>
-            <a:ext cx="1051560" cy="777240"/>
+              <a:t>GPU PARTICLES</a:t>
+            </a:r>
+            <a:endParaRPr lang="en-US" sz="600" dirty="0"/>
+          </a:p>
+        </p:txBody>
+      </p:sp>
+      <p:sp>
+        <p:nvSpPr>
+          <p:cNvPr id="11" name="Shape 9"/>
+          <p:cNvSpPr/>
+          <p:nvPr/>
+        </p:nvSpPr>
+        <p:spPr>
+          <a:xfrm>
+            <a:off x="6080760" y="4160520"/>
+            <a:ext cx="960120" cy="777240"/>
           </a:xfrm>
           <a:prstGeom prst="rect">
             <a:avLst>
-              <a:gd name="adj" fmla="val 9412"/>
+              <a:gd name="adj" fmla="val 7059"/>
             </a:avLst>
           </a:prstGeom>
           <a:solidFill>
@@ -1946,14 +2127,14 @@
       </p:sp>
       <p:sp>
         <p:nvSpPr>
-          <p:cNvPr id="13" name="Text 11"/>
-          <p:cNvSpPr/>
-          <p:nvPr/>
-        </p:nvSpPr>
-        <p:spPr>
-          <a:xfrm>
-            <a:off x="6812280" y="4114800"/>
-            <a:ext cx="1051560" cy="475488"/>
+          <p:cNvPr id="12" name="Text 10"/>
+          <p:cNvSpPr/>
+          <p:nvPr/>
+        </p:nvSpPr>
+        <p:spPr>
+          <a:xfrm>
+            <a:off x="6080760" y="4160520"/>
+            <a:ext cx="960120" cy="475488"/>
           </a:xfrm>
           <a:prstGeom prst="rect">
             <a:avLst/>
@@ -1969,7 +2150,7 @@
               <a:buNone/>
             </a:pPr>
             <a:r>
-              <a:rPr lang="en-US" sz="1800" dirty="0">
+              <a:rPr lang="en-US" sz="1500" dirty="0">
                 <a:solidFill>
                   <a:srgbClr val="00B4D8"/>
                 </a:solidFill>
@@ -1977,22 +2158,22 @@
                 <a:ea typeface="Arial Black" pitchFamily="34" charset="-122"/>
                 <a:cs typeface="Arial Black" pitchFamily="34" charset="-120"/>
               </a:rPr>
-              <a:t>60 FPS</a:t>
-            </a:r>
-            <a:endParaRPr lang="en-US" sz="1800" dirty="0"/>
-          </a:p>
-        </p:txBody>
-      </p:sp>
-      <p:sp>
-        <p:nvSpPr>
-          <p:cNvPr id="14" name="Text 12"/>
-          <p:cNvSpPr/>
-          <p:nvPr/>
-        </p:nvSpPr>
-        <p:spPr>
-          <a:xfrm>
-            <a:off x="6812280" y="4590288"/>
-            <a:ext cx="1051560" cy="274320"/>
+              <a:t>6-PASS</a:t>
+            </a:r>
+            <a:endParaRPr lang="en-US" sz="1500" dirty="0"/>
+          </a:p>
+        </p:txBody>
+      </p:sp>
+      <p:sp>
+        <p:nvSpPr>
+          <p:cNvPr id="13" name="Text 11"/>
+          <p:cNvSpPr/>
+          <p:nvPr/>
+        </p:nvSpPr>
+        <p:spPr>
+          <a:xfrm>
+            <a:off x="6080760" y="4636008"/>
+            <a:ext cx="960120" cy="274320"/>
           </a:xfrm>
           <a:prstGeom prst="rect">
             <a:avLst/>
@@ -2008,7 +2189,7 @@
               <a:buNone/>
             </a:pPr>
             <a:r>
-              <a:rPr lang="en-US" sz="700" spc="200" kern="0" dirty="0">
+              <a:rPr lang="en-US" sz="600" spc="200" kern="0" dirty="0">
                 <a:solidFill>
                   <a:srgbClr val="94A3B8"/>
                 </a:solidFill>
@@ -2016,26 +2197,26 @@
                 <a:ea typeface="Calibri" pitchFamily="34" charset="-122"/>
                 <a:cs typeface="Calibri" pitchFamily="34" charset="-120"/>
               </a:rPr>
-              <a:t>GPU RENDER</a:t>
-            </a:r>
-            <a:endParaRPr lang="en-US" sz="700" dirty="0"/>
-          </a:p>
-        </p:txBody>
-      </p:sp>
-      <p:sp>
-        <p:nvSpPr>
-          <p:cNvPr id="15" name="Shape 13"/>
-          <p:cNvSpPr/>
-          <p:nvPr/>
-        </p:nvSpPr>
-        <p:spPr>
-          <a:xfrm>
-            <a:off x="7955280" y="4114800"/>
-            <a:ext cx="1051560" cy="777240"/>
+              <a:t>GPU PIPELINE</a:t>
+            </a:r>
+            <a:endParaRPr lang="en-US" sz="600" dirty="0"/>
+          </a:p>
+        </p:txBody>
+      </p:sp>
+      <p:sp>
+        <p:nvSpPr>
+          <p:cNvPr id="14" name="Shape 12"/>
+          <p:cNvSpPr/>
+          <p:nvPr/>
+        </p:nvSpPr>
+        <p:spPr>
+          <a:xfrm>
+            <a:off x="7132320" y="4160520"/>
+            <a:ext cx="960120" cy="777240"/>
           </a:xfrm>
           <a:prstGeom prst="rect">
             <a:avLst>
-              <a:gd name="adj" fmla="val 9412"/>
+              <a:gd name="adj" fmla="val 7059"/>
             </a:avLst>
           </a:prstGeom>
           <a:solidFill>
@@ -2046,14 +2227,14 @@
       </p:sp>
       <p:sp>
         <p:nvSpPr>
-          <p:cNvPr id="16" name="Text 14"/>
-          <p:cNvSpPr/>
-          <p:nvPr/>
-        </p:nvSpPr>
-        <p:spPr>
-          <a:xfrm>
-            <a:off x="7955280" y="4114800"/>
-            <a:ext cx="1051560" cy="475488"/>
+          <p:cNvPr id="15" name="Text 13"/>
+          <p:cNvSpPr/>
+          <p:nvPr/>
+        </p:nvSpPr>
+        <p:spPr>
+          <a:xfrm>
+            <a:off x="7132320" y="4160520"/>
+            <a:ext cx="960120" cy="475488"/>
           </a:xfrm>
           <a:prstGeom prst="rect">
             <a:avLst/>
@@ -2069,7 +2250,7 @@
               <a:buNone/>
             </a:pPr>
             <a:r>
-              <a:rPr lang="en-US" sz="1800" dirty="0">
+              <a:rPr lang="en-US" sz="1500" dirty="0">
                 <a:solidFill>
                   <a:srgbClr val="8B5CF6"/>
                 </a:solidFill>
@@ -2077,9 +2258,650 @@
                 <a:ea typeface="Arial Black" pitchFamily="34" charset="-122"/>
                 <a:cs typeface="Arial Black" pitchFamily="34" charset="-120"/>
               </a:rPr>
+              <a:t>BLOOM</a:t>
+            </a:r>
+            <a:endParaRPr lang="en-US" sz="1500" dirty="0"/>
+          </a:p>
+        </p:txBody>
+      </p:sp>
+      <p:sp>
+        <p:nvSpPr>
+          <p:cNvPr id="16" name="Text 14"/>
+          <p:cNvSpPr/>
+          <p:nvPr/>
+        </p:nvSpPr>
+        <p:spPr>
+          <a:xfrm>
+            <a:off x="7132320" y="4636008"/>
+            <a:ext cx="960120" cy="274320"/>
+          </a:xfrm>
+          <a:prstGeom prst="rect">
+            <a:avLst/>
+          </a:prstGeom>
+          <a:noFill/>
+          <a:ln/>
+        </p:spPr>
+        <p:txBody>
+          <a:bodyPr wrap="square" lIns="0" tIns="0" rIns="0" bIns="0" rtlCol="0" anchor="t"/>
+          <a:lstStyle/>
+          <a:p>
+            <a:pPr algn="ctr" indent="0" marL="0">
+              <a:buNone/>
+            </a:pPr>
+            <a:r>
+              <a:rPr lang="en-US" sz="600" spc="200" kern="0" dirty="0">
+                <a:solidFill>
+                  <a:srgbClr val="94A3B8"/>
+                </a:solidFill>
+                <a:latin typeface="Calibri" pitchFamily="34" charset="0"/>
+                <a:ea typeface="Calibri" pitchFamily="34" charset="-122"/>
+                <a:cs typeface="Calibri" pitchFamily="34" charset="-120"/>
+              </a:rPr>
+              <a:t>POST-PROCESS</a:t>
+            </a:r>
+            <a:endParaRPr lang="en-US" sz="600" dirty="0"/>
+          </a:p>
+        </p:txBody>
+      </p:sp>
+      <p:sp>
+        <p:nvSpPr>
+          <p:cNvPr id="17" name="Shape 15"/>
+          <p:cNvSpPr/>
+          <p:nvPr/>
+        </p:nvSpPr>
+        <p:spPr>
+          <a:xfrm>
+            <a:off x="8183880" y="4160520"/>
+            <a:ext cx="960120" cy="777240"/>
+          </a:xfrm>
+          <a:prstGeom prst="rect">
+            <a:avLst>
+              <a:gd name="adj" fmla="val 7059"/>
+            </a:avLst>
+          </a:prstGeom>
+          <a:solidFill>
+            <a:srgbClr val="1A2236"/>
+          </a:solidFill>
+          <a:ln/>
+        </p:spPr>
+      </p:sp>
+      <p:sp>
+        <p:nvSpPr>
+          <p:cNvPr id="18" name="Text 16"/>
+          <p:cNvSpPr/>
+          <p:nvPr/>
+        </p:nvSpPr>
+        <p:spPr>
+          <a:xfrm>
+            <a:off x="8183880" y="4160520"/>
+            <a:ext cx="960120" cy="475488"/>
+          </a:xfrm>
+          <a:prstGeom prst="rect">
+            <a:avLst/>
+          </a:prstGeom>
+          <a:noFill/>
+          <a:ln/>
+        </p:spPr>
+        <p:txBody>
+          <a:bodyPr wrap="square" lIns="0" tIns="0" rIns="0" bIns="0" rtlCol="0" anchor="b"/>
+          <a:lstStyle/>
+          <a:p>
+            <a:pPr algn="ctr" indent="0" marL="0">
+              <a:buNone/>
+            </a:pPr>
+            <a:r>
+              <a:rPr lang="en-US" sz="1500" dirty="0">
+                <a:solidFill>
+                  <a:srgbClr val="F59E0B"/>
+                </a:solidFill>
+                <a:latin typeface="Arial Black" pitchFamily="34" charset="0"/>
+                <a:ea typeface="Arial Black" pitchFamily="34" charset="-122"/>
+                <a:cs typeface="Arial Black" pitchFamily="34" charset="-120"/>
+              </a:rPr>
               <a:t>WGSL</a:t>
             </a:r>
-            <a:endParaRPr lang="en-US" sz="1800" dirty="0"/>
+            <a:endParaRPr lang="en-US" sz="1500" dirty="0"/>
+          </a:p>
+        </p:txBody>
+      </p:sp>
+      <p:sp>
+        <p:nvSpPr>
+          <p:cNvPr id="19" name="Text 17"/>
+          <p:cNvSpPr/>
+          <p:nvPr/>
+        </p:nvSpPr>
+        <p:spPr>
+          <a:xfrm>
+            <a:off x="8183880" y="4636008"/>
+            <a:ext cx="960120" cy="274320"/>
+          </a:xfrm>
+          <a:prstGeom prst="rect">
+            <a:avLst/>
+          </a:prstGeom>
+          <a:noFill/>
+          <a:ln/>
+        </p:spPr>
+        <p:txBody>
+          <a:bodyPr wrap="square" lIns="0" tIns="0" rIns="0" bIns="0" rtlCol="0" anchor="t"/>
+          <a:lstStyle/>
+          <a:p>
+            <a:pPr algn="ctr" indent="0" marL="0">
+              <a:buNone/>
+            </a:pPr>
+            <a:r>
+              <a:rPr lang="en-US" sz="600" spc="200" kern="0" dirty="0">
+                <a:solidFill>
+                  <a:srgbClr val="94A3B8"/>
+                </a:solidFill>
+                <a:latin typeface="Calibri" pitchFamily="34" charset="0"/>
+                <a:ea typeface="Calibri" pitchFamily="34" charset="-122"/>
+                <a:cs typeface="Calibri" pitchFamily="34" charset="-120"/>
+              </a:rPr>
+              <a:t>SHADERS</a:t>
+            </a:r>
+            <a:endParaRPr lang="en-US" sz="600" dirty="0"/>
+          </a:p>
+        </p:txBody>
+      </p:sp>
+    </p:spTree>
+  </p:cSld>
+  <p:clrMapOvr>
+    <a:masterClrMapping/>
+  </p:clrMapOvr>
+</p:sld>
+</file>
+
+<file path=ppt/slides/slide10.xml><?xml version="1.0" encoding="utf-8"?>
+<p:sld xmlns:a="http://schemas.openxmlformats.org/drawingml/2006/main" xmlns:r="http://schemas.openxmlformats.org/officeDocument/2006/relationships" xmlns:p="http://schemas.openxmlformats.org/presentationml/2006/main">
+  <p:cSld name="Slide 10">
+    <p:bg>
+      <p:bgPr>
+        <a:solidFill>
+          <a:srgbClr val="0A0E17"/>
+        </a:solidFill>
+      </p:bgPr>
+    </p:bg>
+    <p:spTree>
+      <p:nvGrpSpPr>
+        <p:cNvPr id="1" name=""/>
+        <p:cNvGrpSpPr/>
+        <p:nvPr/>
+      </p:nvGrpSpPr>
+      <p:grpSpPr>
+        <a:xfrm>
+          <a:off x="0" y="0"/>
+          <a:ext cx="0" cy="0"/>
+          <a:chOff x="0" y="0"/>
+          <a:chExt cx="0" cy="0"/>
+        </a:xfrm>
+      </p:grpSpPr>
+      <p:sp>
+        <p:nvSpPr>
+          <p:cNvPr id="2" name="Shape 0"/>
+          <p:cNvSpPr/>
+          <p:nvPr/>
+        </p:nvSpPr>
+        <p:spPr>
+          <a:xfrm>
+            <a:off x="0" y="0"/>
+            <a:ext cx="64008" cy="5143500"/>
+          </a:xfrm>
+          <a:prstGeom prst="rect">
+            <a:avLst/>
+          </a:prstGeom>
+          <a:solidFill>
+            <a:srgbClr val="00B4D8"/>
+          </a:solidFill>
+          <a:ln/>
+        </p:spPr>
+      </p:sp>
+      <p:sp>
+        <p:nvSpPr>
+          <p:cNvPr id="3" name="Text 1"/>
+          <p:cNvSpPr/>
+          <p:nvPr/>
+        </p:nvSpPr>
+        <p:spPr>
+          <a:xfrm>
+            <a:off x="731520" y="365760"/>
+            <a:ext cx="7315200" cy="365760"/>
+          </a:xfrm>
+          <a:prstGeom prst="rect">
+            <a:avLst/>
+          </a:prstGeom>
+          <a:noFill/>
+          <a:ln/>
+        </p:spPr>
+        <p:txBody>
+          <a:bodyPr wrap="square" lIns="0" tIns="0" rIns="0" bIns="0" rtlCol="0" anchor="ctr"/>
+          <a:lstStyle/>
+          <a:p>
+            <a:pPr indent="0" marL="0">
+              <a:buNone/>
+            </a:pPr>
+            <a:r>
+              <a:rPr lang="en-US" sz="1100" spc="400" kern="0" dirty="0">
+                <a:solidFill>
+                  <a:srgbClr val="00B4D8"/>
+                </a:solidFill>
+                <a:latin typeface="Calibri" pitchFamily="34" charset="0"/>
+                <a:ea typeface="Calibri" pitchFamily="34" charset="-122"/>
+                <a:cs typeface="Calibri" pitchFamily="34" charset="-120"/>
+              </a:rPr>
+              <a:t>INTERACTIVE FEATURES</a:t>
+            </a:r>
+            <a:endParaRPr lang="en-US" sz="1100" dirty="0"/>
+          </a:p>
+        </p:txBody>
+      </p:sp>
+      <p:sp>
+        <p:nvSpPr>
+          <p:cNvPr id="4" name="Text 2"/>
+          <p:cNvSpPr/>
+          <p:nvPr/>
+        </p:nvSpPr>
+        <p:spPr>
+          <a:xfrm>
+            <a:off x="731520" y="731520"/>
+            <a:ext cx="7315200" cy="457200"/>
+          </a:xfrm>
+          <a:prstGeom prst="rect">
+            <a:avLst/>
+          </a:prstGeom>
+          <a:noFill/>
+          <a:ln/>
+        </p:spPr>
+        <p:txBody>
+          <a:bodyPr wrap="square" lIns="0" tIns="0" rIns="0" bIns="0" rtlCol="0" anchor="ctr"/>
+          <a:lstStyle/>
+          <a:p>
+            <a:pPr indent="0" marL="0">
+              <a:buNone/>
+            </a:pPr>
+            <a:r>
+              <a:rPr lang="en-US" sz="3200" dirty="0">
+                <a:solidFill>
+                  <a:srgbClr val="E2E8F0"/>
+                </a:solidFill>
+                <a:latin typeface="Arial Black" pitchFamily="34" charset="0"/>
+                <a:ea typeface="Arial Black" pitchFamily="34" charset="-122"/>
+                <a:cs typeface="Arial Black" pitchFamily="34" charset="-120"/>
+              </a:rPr>
+              <a:t>Live Demo</a:t>
+            </a:r>
+            <a:endParaRPr lang="en-US" sz="3200" dirty="0"/>
+          </a:p>
+        </p:txBody>
+      </p:sp>
+      <p:sp>
+        <p:nvSpPr>
+          <p:cNvPr id="5" name="Text 3"/>
+          <p:cNvSpPr/>
+          <p:nvPr/>
+        </p:nvSpPr>
+        <p:spPr>
+          <a:xfrm>
+            <a:off x="731520" y="1234440"/>
+            <a:ext cx="7315200" cy="274320"/>
+          </a:xfrm>
+          <a:prstGeom prst="rect">
+            <a:avLst/>
+          </a:prstGeom>
+          <a:noFill/>
+          <a:ln/>
+        </p:spPr>
+        <p:txBody>
+          <a:bodyPr wrap="square" lIns="0" tIns="0" rIns="0" bIns="0" rtlCol="0" anchor="ctr"/>
+          <a:lstStyle/>
+          <a:p>
+            <a:pPr indent="0" marL="0">
+              <a:buNone/>
+            </a:pPr>
+            <a:r>
+              <a:rPr lang="en-US" sz="1400" dirty="0">
+                <a:solidFill>
+                  <a:srgbClr val="00B4D8"/>
+                </a:solidFill>
+                <a:latin typeface="Consolas" pitchFamily="34" charset="0"/>
+                <a:ea typeface="Consolas" pitchFamily="34" charset="-122"/>
+                <a:cs typeface="Consolas" pitchFamily="34" charset="-120"/>
+              </a:rPr>
+              <a:t>garridolecca.github.io/aerosols-globe</a:t>
+            </a:r>
+            <a:endParaRPr lang="en-US" sz="1400" dirty="0"/>
+          </a:p>
+        </p:txBody>
+      </p:sp>
+      <p:sp>
+        <p:nvSpPr>
+          <p:cNvPr id="6" name="Shape 4"/>
+          <p:cNvSpPr/>
+          <p:nvPr/>
+        </p:nvSpPr>
+        <p:spPr>
+          <a:xfrm>
+            <a:off x="731520" y="1783080"/>
+            <a:ext cx="3749040" cy="1188720"/>
+          </a:xfrm>
+          <a:prstGeom prst="rect">
+            <a:avLst>
+              <a:gd name="adj" fmla="val 5385"/>
+            </a:avLst>
+          </a:prstGeom>
+          <a:solidFill>
+            <a:srgbClr val="1A2236"/>
+          </a:solidFill>
+          <a:ln/>
+        </p:spPr>
+      </p:sp>
+      <p:sp>
+        <p:nvSpPr>
+          <p:cNvPr id="7" name="Shape 5"/>
+          <p:cNvSpPr/>
+          <p:nvPr/>
+        </p:nvSpPr>
+        <p:spPr>
+          <a:xfrm>
+            <a:off x="731520" y="1783080"/>
+            <a:ext cx="54864" cy="1188720"/>
+          </a:xfrm>
+          <a:prstGeom prst="rect">
+            <a:avLst>
+              <a:gd name="adj" fmla="val 50000"/>
+            </a:avLst>
+          </a:prstGeom>
+          <a:solidFill>
+            <a:srgbClr val="8B5CF6"/>
+          </a:solidFill>
+          <a:ln/>
+        </p:spPr>
+      </p:sp>
+      <p:sp>
+        <p:nvSpPr>
+          <p:cNvPr id="8" name="Text 6"/>
+          <p:cNvSpPr/>
+          <p:nvPr/>
+        </p:nvSpPr>
+        <p:spPr>
+          <a:xfrm>
+            <a:off x="932688" y="1874520"/>
+            <a:ext cx="3383280" cy="228600"/>
+          </a:xfrm>
+          <a:prstGeom prst="rect">
+            <a:avLst/>
+          </a:prstGeom>
+          <a:noFill/>
+          <a:ln/>
+        </p:spPr>
+        <p:txBody>
+          <a:bodyPr wrap="square" lIns="0" tIns="0" rIns="0" bIns="0" rtlCol="0" anchor="ctr"/>
+          <a:lstStyle/>
+          <a:p>
+            <a:pPr indent="0" marL="0">
+              <a:buNone/>
+            </a:pPr>
+            <a:r>
+              <a:rPr lang="en-US" sz="1400" b="1" dirty="0">
+                <a:solidFill>
+                  <a:srgbClr val="E2E8F0"/>
+                </a:solidFill>
+                <a:latin typeface="Calibri" pitchFamily="34" charset="0"/>
+                <a:ea typeface="Calibri" pitchFamily="34" charset="-122"/>
+                <a:cs typeface="Calibri" pitchFamily="34" charset="-120"/>
+              </a:rPr>
+              <a:t>4 Aerosol Species</a:t>
+            </a:r>
+            <a:endParaRPr lang="en-US" sz="1400" dirty="0"/>
+          </a:p>
+        </p:txBody>
+      </p:sp>
+      <p:sp>
+        <p:nvSpPr>
+          <p:cNvPr id="9" name="Text 7"/>
+          <p:cNvSpPr/>
+          <p:nvPr/>
+        </p:nvSpPr>
+        <p:spPr>
+          <a:xfrm>
+            <a:off x="932688" y="2194560"/>
+            <a:ext cx="3383280" cy="640080"/>
+          </a:xfrm>
+          <a:prstGeom prst="rect">
+            <a:avLst/>
+          </a:prstGeom>
+          <a:noFill/>
+          <a:ln/>
+        </p:spPr>
+        <p:txBody>
+          <a:bodyPr wrap="square" lIns="0" tIns="0" rIns="0" bIns="0" rtlCol="0" anchor="ctr"/>
+          <a:lstStyle/>
+          <a:p>
+            <a:pPr indent="0" marL="0">
+              <a:lnSpc>
+                <a:spcPct val="130000"/>
+              </a:lnSpc>
+              <a:buNone/>
+            </a:pPr>
+            <a:r>
+              <a:rPr lang="en-US" sz="1000" dirty="0">
+                <a:solidFill>
+                  <a:srgbClr val="94A3B8"/>
+                </a:solidFill>
+                <a:latin typeface="Calibri" pitchFamily="34" charset="0"/>
+                <a:ea typeface="Calibri" pitchFamily="34" charset="-122"/>
+                <a:cs typeface="Calibri" pitchFamily="34" charset="-120"/>
+              </a:rPr>
+              <a:t>Toggle between Total, Black Carbon, Dust, and Sea Salt with distinct color ramps and transport patterns</a:t>
+            </a:r>
+            <a:endParaRPr lang="en-US" sz="1000" dirty="0"/>
+          </a:p>
+        </p:txBody>
+      </p:sp>
+      <p:sp>
+        <p:nvSpPr>
+          <p:cNvPr id="10" name="Shape 8"/>
+          <p:cNvSpPr/>
+          <p:nvPr/>
+        </p:nvSpPr>
+        <p:spPr>
+          <a:xfrm>
+            <a:off x="4754880" y="1783080"/>
+            <a:ext cx="3749040" cy="1188720"/>
+          </a:xfrm>
+          <a:prstGeom prst="rect">
+            <a:avLst>
+              <a:gd name="adj" fmla="val 5385"/>
+            </a:avLst>
+          </a:prstGeom>
+          <a:solidFill>
+            <a:srgbClr val="1A2236"/>
+          </a:solidFill>
+          <a:ln/>
+        </p:spPr>
+      </p:sp>
+      <p:sp>
+        <p:nvSpPr>
+          <p:cNvPr id="11" name="Shape 9"/>
+          <p:cNvSpPr/>
+          <p:nvPr/>
+        </p:nvSpPr>
+        <p:spPr>
+          <a:xfrm>
+            <a:off x="4754880" y="1783080"/>
+            <a:ext cx="54864" cy="1188720"/>
+          </a:xfrm>
+          <a:prstGeom prst="rect">
+            <a:avLst>
+              <a:gd name="adj" fmla="val 50000"/>
+            </a:avLst>
+          </a:prstGeom>
+          <a:solidFill>
+            <a:srgbClr val="76B900"/>
+          </a:solidFill>
+          <a:ln/>
+        </p:spPr>
+      </p:sp>
+      <p:sp>
+        <p:nvSpPr>
+          <p:cNvPr id="12" name="Text 10"/>
+          <p:cNvSpPr/>
+          <p:nvPr/>
+        </p:nvSpPr>
+        <p:spPr>
+          <a:xfrm>
+            <a:off x="4956048" y="1874520"/>
+            <a:ext cx="3383280" cy="228600"/>
+          </a:xfrm>
+          <a:prstGeom prst="rect">
+            <a:avLst/>
+          </a:prstGeom>
+          <a:noFill/>
+          <a:ln/>
+        </p:spPr>
+        <p:txBody>
+          <a:bodyPr wrap="square" lIns="0" tIns="0" rIns="0" bIns="0" rtlCol="0" anchor="ctr"/>
+          <a:lstStyle/>
+          <a:p>
+            <a:pPr indent="0" marL="0">
+              <a:buNone/>
+            </a:pPr>
+            <a:r>
+              <a:rPr lang="en-US" sz="1400" b="1" dirty="0">
+                <a:solidFill>
+                  <a:srgbClr val="E2E8F0"/>
+                </a:solidFill>
+                <a:latin typeface="Calibri" pitchFamily="34" charset="0"/>
+                <a:ea typeface="Calibri" pitchFamily="34" charset="-122"/>
+                <a:cs typeface="Calibri" pitchFamily="34" charset="-120"/>
+              </a:rPr>
+              <a:t>GPU Particle Controls</a:t>
+            </a:r>
+            <a:endParaRPr lang="en-US" sz="1400" dirty="0"/>
+          </a:p>
+        </p:txBody>
+      </p:sp>
+      <p:sp>
+        <p:nvSpPr>
+          <p:cNvPr id="13" name="Text 11"/>
+          <p:cNvSpPr/>
+          <p:nvPr/>
+        </p:nvSpPr>
+        <p:spPr>
+          <a:xfrm>
+            <a:off x="4956048" y="2194560"/>
+            <a:ext cx="3383280" cy="640080"/>
+          </a:xfrm>
+          <a:prstGeom prst="rect">
+            <a:avLst/>
+          </a:prstGeom>
+          <a:noFill/>
+          <a:ln/>
+        </p:spPr>
+        <p:txBody>
+          <a:bodyPr wrap="square" lIns="0" tIns="0" rIns="0" bIns="0" rtlCol="0" anchor="ctr"/>
+          <a:lstStyle/>
+          <a:p>
+            <a:pPr indent="0" marL="0">
+              <a:lnSpc>
+                <a:spcPct val="130000"/>
+              </a:lnSpc>
+              <a:buNone/>
+            </a:pPr>
+            <a:r>
+              <a:rPr lang="en-US" sz="1000" dirty="0">
+                <a:solidFill>
+                  <a:srgbClr val="94A3B8"/>
+                </a:solidFill>
+                <a:latin typeface="Calibri" pitchFamily="34" charset="0"/>
+                <a:ea typeface="Calibri" pitchFamily="34" charset="-122"/>
+                <a:cs typeface="Calibri" pitchFamily="34" charset="-120"/>
+              </a:rPr>
+              <a:t>Adjust count (50K-1M), flow speed, trail length, and particle size. All processed on GPU in real-time</a:t>
+            </a:r>
+            <a:endParaRPr lang="en-US" sz="1000" dirty="0"/>
+          </a:p>
+        </p:txBody>
+      </p:sp>
+      <p:sp>
+        <p:nvSpPr>
+          <p:cNvPr id="14" name="Shape 12"/>
+          <p:cNvSpPr/>
+          <p:nvPr/>
+        </p:nvSpPr>
+        <p:spPr>
+          <a:xfrm>
+            <a:off x="731520" y="3246120"/>
+            <a:ext cx="3749040" cy="1188720"/>
+          </a:xfrm>
+          <a:prstGeom prst="rect">
+            <a:avLst>
+              <a:gd name="adj" fmla="val 5385"/>
+            </a:avLst>
+          </a:prstGeom>
+          <a:solidFill>
+            <a:srgbClr val="1A2236"/>
+          </a:solidFill>
+          <a:ln/>
+        </p:spPr>
+      </p:sp>
+      <p:sp>
+        <p:nvSpPr>
+          <p:cNvPr id="15" name="Shape 13"/>
+          <p:cNvSpPr/>
+          <p:nvPr/>
+        </p:nvSpPr>
+        <p:spPr>
+          <a:xfrm>
+            <a:off x="731520" y="3246120"/>
+            <a:ext cx="54864" cy="1188720"/>
+          </a:xfrm>
+          <a:prstGeom prst="rect">
+            <a:avLst>
+              <a:gd name="adj" fmla="val 50000"/>
+            </a:avLst>
+          </a:prstGeom>
+          <a:solidFill>
+            <a:srgbClr val="00B4D8"/>
+          </a:solidFill>
+          <a:ln/>
+        </p:spPr>
+      </p:sp>
+      <p:sp>
+        <p:nvSpPr>
+          <p:cNvPr id="16" name="Text 14"/>
+          <p:cNvSpPr/>
+          <p:nvPr/>
+        </p:nvSpPr>
+        <p:spPr>
+          <a:xfrm>
+            <a:off x="932688" y="3337560"/>
+            <a:ext cx="3383280" cy="228600"/>
+          </a:xfrm>
+          <a:prstGeom prst="rect">
+            <a:avLst/>
+          </a:prstGeom>
+          <a:noFill/>
+          <a:ln/>
+        </p:spPr>
+        <p:txBody>
+          <a:bodyPr wrap="square" lIns="0" tIns="0" rIns="0" bIns="0" rtlCol="0" anchor="ctr"/>
+          <a:lstStyle/>
+          <a:p>
+            <a:pPr indent="0" marL="0">
+              <a:buNone/>
+            </a:pPr>
+            <a:r>
+              <a:rPr lang="en-US" sz="1400" b="1" dirty="0">
+                <a:solidFill>
+                  <a:srgbClr val="E2E8F0"/>
+                </a:solidFill>
+                <a:latin typeface="Calibri" pitchFamily="34" charset="0"/>
+                <a:ea typeface="Calibri" pitchFamily="34" charset="-122"/>
+                <a:cs typeface="Calibri" pitchFamily="34" charset="-120"/>
+              </a:rPr>
+              <a:t>Robinson Dark Basemap</a:t>
+            </a:r>
+            <a:endParaRPr lang="en-US" sz="1400" dirty="0"/>
           </a:p>
         </p:txBody>
       </p:sp>
@@ -2091,24 +2913,626 @@
         </p:nvSpPr>
         <p:spPr>
           <a:xfrm>
-            <a:off x="7955280" y="4590288"/>
-            <a:ext cx="1051560" cy="274320"/>
-          </a:xfrm>
-          <a:prstGeom prst="rect">
-            <a:avLst/>
-          </a:prstGeom>
-          <a:noFill/>
-          <a:ln/>
-        </p:spPr>
-        <p:txBody>
-          <a:bodyPr wrap="square" lIns="0" tIns="0" rIns="0" bIns="0" rtlCol="0" anchor="t"/>
+            <a:off x="932688" y="3657600"/>
+            <a:ext cx="3383280" cy="640080"/>
+          </a:xfrm>
+          <a:prstGeom prst="rect">
+            <a:avLst/>
+          </a:prstGeom>
+          <a:noFill/>
+          <a:ln/>
+        </p:spPr>
+        <p:txBody>
+          <a:bodyPr wrap="square" lIns="0" tIns="0" rIns="0" bIns="0" rtlCol="0" anchor="ctr"/>
+          <a:lstStyle/>
+          <a:p>
+            <a:pPr indent="0" marL="0">
+              <a:lnSpc>
+                <a:spcPct val="130000"/>
+              </a:lnSpc>
+              <a:buNone/>
+            </a:pPr>
+            <a:r>
+              <a:rPr lang="en-US" sz="1000" dirty="0">
+                <a:solidFill>
+                  <a:srgbClr val="94A3B8"/>
+                </a:solidFill>
+                <a:latin typeface="Calibri" pitchFamily="34" charset="0"/>
+                <a:ea typeface="Calibri" pitchFamily="34" charset="-122"/>
+                <a:cs typeface="Calibri" pitchFamily="34" charset="-120"/>
+              </a:rPr>
+              <a:t>Full-world view with custom dark-styled WMO vector tiles. Pan and zoom with particle re-spawning</a:t>
+            </a:r>
+            <a:endParaRPr lang="en-US" sz="1000" dirty="0"/>
+          </a:p>
+        </p:txBody>
+      </p:sp>
+      <p:sp>
+        <p:nvSpPr>
+          <p:cNvPr id="18" name="Shape 16"/>
+          <p:cNvSpPr/>
+          <p:nvPr/>
+        </p:nvSpPr>
+        <p:spPr>
+          <a:xfrm>
+            <a:off x="4754880" y="3246120"/>
+            <a:ext cx="3749040" cy="1188720"/>
+          </a:xfrm>
+          <a:prstGeom prst="rect">
+            <a:avLst>
+              <a:gd name="adj" fmla="val 5385"/>
+            </a:avLst>
+          </a:prstGeom>
+          <a:solidFill>
+            <a:srgbClr val="1A2236"/>
+          </a:solidFill>
+          <a:ln/>
+        </p:spPr>
+      </p:sp>
+      <p:sp>
+        <p:nvSpPr>
+          <p:cNvPr id="19" name="Shape 17"/>
+          <p:cNvSpPr/>
+          <p:nvPr/>
+        </p:nvSpPr>
+        <p:spPr>
+          <a:xfrm>
+            <a:off x="4754880" y="3246120"/>
+            <a:ext cx="54864" cy="1188720"/>
+          </a:xfrm>
+          <a:prstGeom prst="rect">
+            <a:avLst>
+              <a:gd name="adj" fmla="val 50000"/>
+            </a:avLst>
+          </a:prstGeom>
+          <a:solidFill>
+            <a:srgbClr val="F59E0B"/>
+          </a:solidFill>
+          <a:ln/>
+        </p:spPr>
+      </p:sp>
+      <p:sp>
+        <p:nvSpPr>
+          <p:cNvPr id="20" name="Text 18"/>
+          <p:cNvSpPr/>
+          <p:nvPr/>
+        </p:nvSpPr>
+        <p:spPr>
+          <a:xfrm>
+            <a:off x="4956048" y="3337560"/>
+            <a:ext cx="3383280" cy="228600"/>
+          </a:xfrm>
+          <a:prstGeom prst="rect">
+            <a:avLst/>
+          </a:prstGeom>
+          <a:noFill/>
+          <a:ln/>
+        </p:spPr>
+        <p:txBody>
+          <a:bodyPr wrap="square" lIns="0" tIns="0" rIns="0" bIns="0" rtlCol="0" anchor="ctr"/>
+          <a:lstStyle/>
+          <a:p>
+            <a:pPr indent="0" marL="0">
+              <a:buNone/>
+            </a:pPr>
+            <a:r>
+              <a:rPr lang="en-US" sz="1400" b="1" dirty="0">
+                <a:solidFill>
+                  <a:srgbClr val="E2E8F0"/>
+                </a:solidFill>
+                <a:latin typeface="Calibri" pitchFamily="34" charset="0"/>
+                <a:ea typeface="Calibri" pitchFamily="34" charset="-122"/>
+                <a:cs typeface="Calibri" pitchFamily="34" charset="-120"/>
+              </a:rPr>
+              <a:t>Automatic GPU Fallback</a:t>
+            </a:r>
+            <a:endParaRPr lang="en-US" sz="1400" dirty="0"/>
+          </a:p>
+        </p:txBody>
+      </p:sp>
+      <p:sp>
+        <p:nvSpPr>
+          <p:cNvPr id="21" name="Text 19"/>
+          <p:cNvSpPr/>
+          <p:nvPr/>
+        </p:nvSpPr>
+        <p:spPr>
+          <a:xfrm>
+            <a:off x="4956048" y="3657600"/>
+            <a:ext cx="3383280" cy="640080"/>
+          </a:xfrm>
+          <a:prstGeom prst="rect">
+            <a:avLst/>
+          </a:prstGeom>
+          <a:noFill/>
+          <a:ln/>
+        </p:spPr>
+        <p:txBody>
+          <a:bodyPr wrap="square" lIns="0" tIns="0" rIns="0" bIns="0" rtlCol="0" anchor="ctr"/>
+          <a:lstStyle/>
+          <a:p>
+            <a:pPr indent="0" marL="0">
+              <a:lnSpc>
+                <a:spcPct val="130000"/>
+              </a:lnSpc>
+              <a:buNone/>
+            </a:pPr>
+            <a:r>
+              <a:rPr lang="en-US" sz="1000" dirty="0">
+                <a:solidFill>
+                  <a:srgbClr val="94A3B8"/>
+                </a:solidFill>
+                <a:latin typeface="Calibri" pitchFamily="34" charset="0"/>
+                <a:ea typeface="Calibri" pitchFamily="34" charset="-122"/>
+                <a:cs typeface="Calibri" pitchFamily="34" charset="-120"/>
+              </a:rPr>
+              <a:t>WebGPU with 500K particles + bloom on NVIDIA GPUs. Canvas 2D with 8K particles on older browsers</a:t>
+            </a:r>
+            <a:endParaRPr lang="en-US" sz="1000" dirty="0"/>
+          </a:p>
+        </p:txBody>
+      </p:sp>
+    </p:spTree>
+  </p:cSld>
+  <p:clrMapOvr>
+    <a:masterClrMapping/>
+  </p:clrMapOvr>
+</p:sld>
+</file>
+
+<file path=ppt/slides/slide11.xml><?xml version="1.0" encoding="utf-8"?>
+<p:sld xmlns:a="http://schemas.openxmlformats.org/drawingml/2006/main" xmlns:r="http://schemas.openxmlformats.org/officeDocument/2006/relationships" xmlns:p="http://schemas.openxmlformats.org/presentationml/2006/main">
+  <p:cSld name="Slide 11">
+    <p:bg>
+      <p:bgPr>
+        <a:solidFill>
+          <a:srgbClr val="0A0E17"/>
+        </a:solidFill>
+      </p:bgPr>
+    </p:bg>
+    <p:spTree>
+      <p:nvGrpSpPr>
+        <p:cNvPr id="1" name=""/>
+        <p:cNvGrpSpPr/>
+        <p:nvPr/>
+      </p:nvGrpSpPr>
+      <p:grpSpPr>
+        <a:xfrm>
+          <a:off x="0" y="0"/>
+          <a:ext cx="0" cy="0"/>
+          <a:chOff x="0" y="0"/>
+          <a:chExt cx="0" cy="0"/>
+        </a:xfrm>
+      </p:grpSpPr>
+      <p:sp>
+        <p:nvSpPr>
+          <p:cNvPr id="2" name="Shape 0"/>
+          <p:cNvSpPr/>
+          <p:nvPr/>
+        </p:nvSpPr>
+        <p:spPr>
+          <a:xfrm>
+            <a:off x="0" y="0"/>
+            <a:ext cx="64008" cy="5143500"/>
+          </a:xfrm>
+          <a:prstGeom prst="rect">
+            <a:avLst/>
+          </a:prstGeom>
+          <a:solidFill>
+            <a:srgbClr val="00B4D8"/>
+          </a:solidFill>
+          <a:ln/>
+        </p:spPr>
+      </p:sp>
+      <p:sp>
+        <p:nvSpPr>
+          <p:cNvPr id="3" name="Text 1"/>
+          <p:cNvSpPr/>
+          <p:nvPr/>
+        </p:nvSpPr>
+        <p:spPr>
+          <a:xfrm>
+            <a:off x="731520" y="914400"/>
+            <a:ext cx="7315200" cy="731520"/>
+          </a:xfrm>
+          <a:prstGeom prst="rect">
+            <a:avLst/>
+          </a:prstGeom>
+          <a:noFill/>
+          <a:ln/>
+        </p:spPr>
+        <p:txBody>
+          <a:bodyPr wrap="square" lIns="0" tIns="0" rIns="0" bIns="0" rtlCol="0" anchor="ctr"/>
+          <a:lstStyle/>
+          <a:p>
+            <a:pPr indent="0" marL="0">
+              <a:buNone/>
+            </a:pPr>
+            <a:r>
+              <a:rPr lang="en-US" sz="4400" dirty="0">
+                <a:solidFill>
+                  <a:srgbClr val="E2E8F0"/>
+                </a:solidFill>
+                <a:latin typeface="Arial Black" pitchFamily="34" charset="0"/>
+                <a:ea typeface="Arial Black" pitchFamily="34" charset="-122"/>
+                <a:cs typeface="Arial Black" pitchFamily="34" charset="-120"/>
+              </a:rPr>
+              <a:t>Thank You</a:t>
+            </a:r>
+            <a:endParaRPr lang="en-US" sz="4400" dirty="0"/>
+          </a:p>
+        </p:txBody>
+      </p:sp>
+      <p:sp>
+        <p:nvSpPr>
+          <p:cNvPr id="4" name="Text 2"/>
+          <p:cNvSpPr/>
+          <p:nvPr/>
+        </p:nvSpPr>
+        <p:spPr>
+          <a:xfrm>
+            <a:off x="731520" y="1737360"/>
+            <a:ext cx="7315200" cy="457200"/>
+          </a:xfrm>
+          <a:prstGeom prst="rect">
+            <a:avLst/>
+          </a:prstGeom>
+          <a:noFill/>
+          <a:ln/>
+        </p:spPr>
+        <p:txBody>
+          <a:bodyPr wrap="square" lIns="0" tIns="0" rIns="0" bIns="0" rtlCol="0" anchor="ctr"/>
+          <a:lstStyle/>
+          <a:p>
+            <a:pPr indent="0" marL="0">
+              <a:buNone/>
+            </a:pPr>
+            <a:r>
+              <a:rPr lang="en-US" sz="2200" dirty="0">
+                <a:solidFill>
+                  <a:srgbClr val="00B4D8"/>
+                </a:solidFill>
+                <a:latin typeface="Calibri" pitchFamily="34" charset="0"/>
+                <a:ea typeface="Calibri" pitchFamily="34" charset="-122"/>
+                <a:cs typeface="Calibri" pitchFamily="34" charset="-120"/>
+              </a:rPr>
+              <a:t>Jhonatan Garrido-Lecca</a:t>
+            </a:r>
+            <a:endParaRPr lang="en-US" sz="2200" dirty="0"/>
+          </a:p>
+        </p:txBody>
+      </p:sp>
+      <p:sp>
+        <p:nvSpPr>
+          <p:cNvPr id="5" name="Text 3"/>
+          <p:cNvSpPr/>
+          <p:nvPr/>
+        </p:nvSpPr>
+        <p:spPr>
+          <a:xfrm>
+            <a:off x="731520" y="2377440"/>
+            <a:ext cx="7315200" cy="365760"/>
+          </a:xfrm>
+          <a:prstGeom prst="rect">
+            <a:avLst/>
+          </a:prstGeom>
+          <a:noFill/>
+          <a:ln/>
+        </p:spPr>
+        <p:txBody>
+          <a:bodyPr wrap="square" lIns="0" tIns="0" rIns="0" bIns="0" rtlCol="0" anchor="ctr"/>
+          <a:lstStyle/>
+          <a:p>
+            <a:pPr indent="0" marL="0">
+              <a:buNone/>
+            </a:pPr>
+            <a:r>
+              <a:rPr lang="en-US" sz="1400" dirty="0">
+                <a:solidFill>
+                  <a:srgbClr val="94A3B8"/>
+                </a:solidFill>
+                <a:latin typeface="Consolas" pitchFamily="34" charset="0"/>
+                <a:ea typeface="Consolas" pitchFamily="34" charset="-122"/>
+                <a:cs typeface="Consolas" pitchFamily="34" charset="-120"/>
+              </a:rPr>
+              <a:t>garridolecca.github.io/aerosols-globe</a:t>
+            </a:r>
+            <a:endParaRPr lang="en-US" sz="1400" dirty="0"/>
+          </a:p>
+        </p:txBody>
+      </p:sp>
+      <p:sp>
+        <p:nvSpPr>
+          <p:cNvPr id="6" name="Shape 4"/>
+          <p:cNvSpPr/>
+          <p:nvPr/>
+        </p:nvSpPr>
+        <p:spPr>
+          <a:xfrm>
+            <a:off x="731520" y="3108960"/>
+            <a:ext cx="1508760" cy="502920"/>
+          </a:xfrm>
+          <a:prstGeom prst="rect">
+            <a:avLst>
+              <a:gd name="adj" fmla="val 9091"/>
+            </a:avLst>
+          </a:prstGeom>
+          <a:solidFill>
+            <a:srgbClr val="1A2236"/>
+          </a:solidFill>
+          <a:ln/>
+        </p:spPr>
+      </p:sp>
+      <p:sp>
+        <p:nvSpPr>
+          <p:cNvPr id="7" name="Text 5"/>
+          <p:cNvSpPr/>
+          <p:nvPr/>
+        </p:nvSpPr>
+        <p:spPr>
+          <a:xfrm>
+            <a:off x="731520" y="3108960"/>
+            <a:ext cx="1508760" cy="502920"/>
+          </a:xfrm>
+          <a:prstGeom prst="rect">
+            <a:avLst/>
+          </a:prstGeom>
+          <a:noFill/>
+          <a:ln/>
+        </p:spPr>
+        <p:txBody>
+          <a:bodyPr wrap="square" lIns="0" tIns="0" rIns="0" bIns="0" rtlCol="0" anchor="ctr"/>
           <a:lstStyle/>
           <a:p>
             <a:pPr algn="ctr" indent="0" marL="0">
               <a:buNone/>
             </a:pPr>
             <a:r>
-              <a:rPr lang="en-US" sz="700" spc="200" kern="0" dirty="0">
+              <a:rPr lang="en-US" sz="900" b="1" dirty="0">
+                <a:solidFill>
+                  <a:srgbClr val="00B4D8"/>
+                </a:solidFill>
+                <a:latin typeface="Calibri" pitchFamily="34" charset="0"/>
+                <a:ea typeface="Calibri" pitchFamily="34" charset="-122"/>
+                <a:cs typeface="Calibri" pitchFamily="34" charset="-120"/>
+              </a:rPr>
+              <a:t>NASA GEOS-FP</a:t>
+            </a:r>
+            <a:endParaRPr lang="en-US" sz="900" dirty="0"/>
+          </a:p>
+        </p:txBody>
+      </p:sp>
+      <p:sp>
+        <p:nvSpPr>
+          <p:cNvPr id="8" name="Shape 6"/>
+          <p:cNvSpPr/>
+          <p:nvPr/>
+        </p:nvSpPr>
+        <p:spPr>
+          <a:xfrm>
+            <a:off x="2377440" y="3108960"/>
+            <a:ext cx="1508760" cy="502920"/>
+          </a:xfrm>
+          <a:prstGeom prst="rect">
+            <a:avLst>
+              <a:gd name="adj" fmla="val 9091"/>
+            </a:avLst>
+          </a:prstGeom>
+          <a:solidFill>
+            <a:srgbClr val="1A2236"/>
+          </a:solidFill>
+          <a:ln/>
+        </p:spPr>
+      </p:sp>
+      <p:sp>
+        <p:nvSpPr>
+          <p:cNvPr id="9" name="Text 7"/>
+          <p:cNvSpPr/>
+          <p:nvPr/>
+        </p:nvSpPr>
+        <p:spPr>
+          <a:xfrm>
+            <a:off x="2377440" y="3108960"/>
+            <a:ext cx="1508760" cy="502920"/>
+          </a:xfrm>
+          <a:prstGeom prst="rect">
+            <a:avLst/>
+          </a:prstGeom>
+          <a:noFill/>
+          <a:ln/>
+        </p:spPr>
+        <p:txBody>
+          <a:bodyPr wrap="square" lIns="0" tIns="0" rIns="0" bIns="0" rtlCol="0" anchor="ctr"/>
+          <a:lstStyle/>
+          <a:p>
+            <a:pPr algn="ctr" indent="0" marL="0">
+              <a:buNone/>
+            </a:pPr>
+            <a:r>
+              <a:rPr lang="en-US" sz="900" b="1" dirty="0">
+                <a:solidFill>
+                  <a:srgbClr val="76B900"/>
+                </a:solidFill>
+                <a:latin typeface="Calibri" pitchFamily="34" charset="0"/>
+                <a:ea typeface="Calibri" pitchFamily="34" charset="-122"/>
+                <a:cs typeface="Calibri" pitchFamily="34" charset="-120"/>
+              </a:rPr>
+              <a:t>NVIDIA WebGPU</a:t>
+            </a:r>
+            <a:endParaRPr lang="en-US" sz="900" dirty="0"/>
+          </a:p>
+        </p:txBody>
+      </p:sp>
+      <p:sp>
+        <p:nvSpPr>
+          <p:cNvPr id="10" name="Shape 8"/>
+          <p:cNvSpPr/>
+          <p:nvPr/>
+        </p:nvSpPr>
+        <p:spPr>
+          <a:xfrm>
+            <a:off x="4023360" y="3108960"/>
+            <a:ext cx="1508760" cy="502920"/>
+          </a:xfrm>
+          <a:prstGeom prst="rect">
+            <a:avLst>
+              <a:gd name="adj" fmla="val 9091"/>
+            </a:avLst>
+          </a:prstGeom>
+          <a:solidFill>
+            <a:srgbClr val="1A2236"/>
+          </a:solidFill>
+          <a:ln/>
+        </p:spPr>
+      </p:sp>
+      <p:sp>
+        <p:nvSpPr>
+          <p:cNvPr id="11" name="Text 9"/>
+          <p:cNvSpPr/>
+          <p:nvPr/>
+        </p:nvSpPr>
+        <p:spPr>
+          <a:xfrm>
+            <a:off x="4023360" y="3108960"/>
+            <a:ext cx="1508760" cy="502920"/>
+          </a:xfrm>
+          <a:prstGeom prst="rect">
+            <a:avLst/>
+          </a:prstGeom>
+          <a:noFill/>
+          <a:ln/>
+        </p:spPr>
+        <p:txBody>
+          <a:bodyPr wrap="square" lIns="0" tIns="0" rIns="0" bIns="0" rtlCol="0" anchor="ctr"/>
+          <a:lstStyle/>
+          <a:p>
+            <a:pPr algn="ctr" indent="0" marL="0">
+              <a:buNone/>
+            </a:pPr>
+            <a:r>
+              <a:rPr lang="en-US" sz="900" b="1" dirty="0">
+                <a:solidFill>
+                  <a:srgbClr val="0079C1"/>
+                </a:solidFill>
+                <a:latin typeface="Calibri" pitchFamily="34" charset="0"/>
+                <a:ea typeface="Calibri" pitchFamily="34" charset="-122"/>
+                <a:cs typeface="Calibri" pitchFamily="34" charset="-120"/>
+              </a:rPr>
+              <a:t>ArcGIS SDK 5.0</a:t>
+            </a:r>
+            <a:endParaRPr lang="en-US" sz="900" dirty="0"/>
+          </a:p>
+        </p:txBody>
+      </p:sp>
+      <p:sp>
+        <p:nvSpPr>
+          <p:cNvPr id="12" name="Shape 10"/>
+          <p:cNvSpPr/>
+          <p:nvPr/>
+        </p:nvSpPr>
+        <p:spPr>
+          <a:xfrm>
+            <a:off x="5669280" y="3108960"/>
+            <a:ext cx="1508760" cy="502920"/>
+          </a:xfrm>
+          <a:prstGeom prst="rect">
+            <a:avLst>
+              <a:gd name="adj" fmla="val 9091"/>
+            </a:avLst>
+          </a:prstGeom>
+          <a:solidFill>
+            <a:srgbClr val="1A2236"/>
+          </a:solidFill>
+          <a:ln/>
+        </p:spPr>
+      </p:sp>
+      <p:sp>
+        <p:nvSpPr>
+          <p:cNvPr id="13" name="Text 11"/>
+          <p:cNvSpPr/>
+          <p:nvPr/>
+        </p:nvSpPr>
+        <p:spPr>
+          <a:xfrm>
+            <a:off x="5669280" y="3108960"/>
+            <a:ext cx="1508760" cy="502920"/>
+          </a:xfrm>
+          <a:prstGeom prst="rect">
+            <a:avLst/>
+          </a:prstGeom>
+          <a:noFill/>
+          <a:ln/>
+        </p:spPr>
+        <p:txBody>
+          <a:bodyPr wrap="square" lIns="0" tIns="0" rIns="0" bIns="0" rtlCol="0" anchor="ctr"/>
+          <a:lstStyle/>
+          <a:p>
+            <a:pPr algn="ctr" indent="0" marL="0">
+              <a:buNone/>
+            </a:pPr>
+            <a:r>
+              <a:rPr lang="en-US" sz="900" b="1" dirty="0">
+                <a:solidFill>
+                  <a:srgbClr val="8B5CF6"/>
+                </a:solidFill>
+                <a:latin typeface="Calibri" pitchFamily="34" charset="0"/>
+                <a:ea typeface="Calibri" pitchFamily="34" charset="-122"/>
+                <a:cs typeface="Calibri" pitchFamily="34" charset="-120"/>
+              </a:rPr>
+              <a:t>Robinson (WMO)</a:t>
+            </a:r>
+            <a:endParaRPr lang="en-US" sz="900" dirty="0"/>
+          </a:p>
+        </p:txBody>
+      </p:sp>
+      <p:sp>
+        <p:nvSpPr>
+          <p:cNvPr id="14" name="Shape 12"/>
+          <p:cNvSpPr/>
+          <p:nvPr/>
+        </p:nvSpPr>
+        <p:spPr>
+          <a:xfrm>
+            <a:off x="7315200" y="3108960"/>
+            <a:ext cx="1508760" cy="502920"/>
+          </a:xfrm>
+          <a:prstGeom prst="rect">
+            <a:avLst>
+              <a:gd name="adj" fmla="val 9091"/>
+            </a:avLst>
+          </a:prstGeom>
+          <a:solidFill>
+            <a:srgbClr val="1A2236"/>
+          </a:solidFill>
+          <a:ln/>
+        </p:spPr>
+      </p:sp>
+      <p:sp>
+        <p:nvSpPr>
+          <p:cNvPr id="15" name="Text 13"/>
+          <p:cNvSpPr/>
+          <p:nvPr/>
+        </p:nvSpPr>
+        <p:spPr>
+          <a:xfrm>
+            <a:off x="7315200" y="3108960"/>
+            <a:ext cx="1508760" cy="502920"/>
+          </a:xfrm>
+          <a:prstGeom prst="rect">
+            <a:avLst/>
+          </a:prstGeom>
+          <a:noFill/>
+          <a:ln/>
+        </p:spPr>
+        <p:txBody>
+          <a:bodyPr wrap="square" lIns="0" tIns="0" rIns="0" bIns="0" rtlCol="0" anchor="ctr"/>
+          <a:lstStyle/>
+          <a:p>
+            <a:pPr algn="ctr" indent="0" marL="0">
+              <a:buNone/>
+            </a:pPr>
+            <a:r>
+              <a:rPr lang="en-US" sz="900" b="1" dirty="0">
                 <a:solidFill>
                   <a:srgbClr val="94A3B8"/>
                 </a:solidFill>
@@ -2116,9 +3540,48 @@
                 <a:ea typeface="Calibri" pitchFamily="34" charset="-122"/>
                 <a:cs typeface="Calibri" pitchFamily="34" charset="-120"/>
               </a:rPr>
-              <a:t>SHADERS</a:t>
-            </a:r>
-            <a:endParaRPr lang="en-US" sz="700" dirty="0"/>
+              <a:t>GitHub Pages</a:t>
+            </a:r>
+            <a:endParaRPr lang="en-US" sz="900" dirty="0"/>
+          </a:p>
+        </p:txBody>
+      </p:sp>
+      <p:sp>
+        <p:nvSpPr>
+          <p:cNvPr id="16" name="Text 14"/>
+          <p:cNvSpPr/>
+          <p:nvPr/>
+        </p:nvSpPr>
+        <p:spPr>
+          <a:xfrm>
+            <a:off x="731520" y="3931920"/>
+            <a:ext cx="7315200" cy="274320"/>
+          </a:xfrm>
+          <a:prstGeom prst="rect">
+            <a:avLst/>
+          </a:prstGeom>
+          <a:noFill/>
+          <a:ln/>
+        </p:spPr>
+        <p:txBody>
+          <a:bodyPr wrap="square" lIns="0" tIns="0" rIns="0" bIns="0" rtlCol="0" anchor="ctr"/>
+          <a:lstStyle/>
+          <a:p>
+            <a:pPr indent="0" marL="0">
+              <a:buNone/>
+            </a:pPr>
+            <a:r>
+              <a:rPr lang="en-US" sz="1100" dirty="0">
+                <a:solidFill>
+                  <a:srgbClr val="94A3B8"/>
+                </a:solidFill>
+                <a:latin typeface="Calibri" pitchFamily="34" charset="0"/>
+                <a:ea typeface="Calibri" pitchFamily="34" charset="-122"/>
+                <a:cs typeface="Calibri" pitchFamily="34" charset="-120"/>
+              </a:rPr>
+              <a:t>Open source | Real NASA data | GPU-accelerated | Robinson projection | Zero dependencies</a:t>
+            </a:r>
+            <a:endParaRPr lang="en-US" sz="1100" dirty="0"/>
           </a:p>
         </p:txBody>
       </p:sp>
@@ -2163,7 +3626,7 @@
         <p:spPr>
           <a:xfrm>
             <a:off x="0" y="0"/>
-            <a:ext cx="73152" cy="5143500"/>
+            <a:ext cx="64008" cy="5143500"/>
           </a:xfrm>
           <a:prstGeom prst="rect">
             <a:avLst/>
@@ -2183,7 +3646,7 @@
         <p:spPr>
           <a:xfrm>
             <a:off x="731520" y="365760"/>
-            <a:ext cx="7315200" cy="457200"/>
+            <a:ext cx="7315200" cy="365760"/>
           </a:xfrm>
           <a:prstGeom prst="rect">
             <a:avLst/>
@@ -2221,7 +3684,7 @@
         </p:nvSpPr>
         <p:spPr>
           <a:xfrm>
-            <a:off x="731520" y="777240"/>
+            <a:off x="731520" y="731520"/>
             <a:ext cx="7315200" cy="548640"/>
           </a:xfrm>
           <a:prstGeom prst="rect">
@@ -2260,8 +3723,8 @@
         </p:nvSpPr>
         <p:spPr>
           <a:xfrm>
-            <a:off x="731520" y="1554480"/>
-            <a:ext cx="7498080" cy="822960"/>
+            <a:off x="731520" y="1463040"/>
+            <a:ext cx="7680960" cy="640080"/>
           </a:xfrm>
           <a:prstGeom prst="rect">
             <a:avLst/>
@@ -2280,7 +3743,7 @@
               <a:buNone/>
             </a:pPr>
             <a:r>
-              <a:rPr lang="en-US" sz="1400" dirty="0">
+              <a:rPr lang="en-US" sz="1300" dirty="0">
                 <a:solidFill>
                   <a:srgbClr val="94A3B8"/>
                 </a:solidFill>
@@ -2288,9 +3751,9 @@
                 <a:ea typeface="Calibri" pitchFamily="34" charset="-122"/>
                 <a:cs typeface="Calibri" pitchFamily="34" charset="-120"/>
               </a:rPr>
-              <a:t>Aerosols are tiny particles suspended in Earth's atmosphere — black carbon from fires, mineral dust from deserts, sea salt from ocean spray. They influence climate, air quality, and human health, but they're invisible to the eye and complex to visualize at global scale.</a:t>
-            </a:r>
-            <a:endParaRPr lang="en-US" sz="1400" dirty="0"/>
+              <a:t>Aerosols are tiny particles suspended in Earth's atmosphere. They influence climate, air quality, and human health, but are invisible to the eye and complex to visualize at global scale.</a:t>
+            </a:r>
+            <a:endParaRPr lang="en-US" sz="1300" dirty="0"/>
           </a:p>
         </p:txBody>
       </p:sp>
@@ -2302,12 +3765,12 @@
         </p:nvSpPr>
         <p:spPr>
           <a:xfrm>
-            <a:off x="731520" y="2606040"/>
-            <a:ext cx="7680960" cy="475488"/>
+            <a:off x="731520" y="2331720"/>
+            <a:ext cx="7680960" cy="420624"/>
           </a:xfrm>
           <a:prstGeom prst="rect">
             <a:avLst>
-              <a:gd name="adj" fmla="val 11538"/>
+              <a:gd name="adj" fmla="val 10870"/>
             </a:avLst>
           </a:prstGeom>
           <a:solidFill>
@@ -2324,8 +3787,8 @@
         </p:nvSpPr>
         <p:spPr>
           <a:xfrm>
-            <a:off x="914400" y="2697480"/>
-            <a:ext cx="292608" cy="292608"/>
+            <a:off x="914400" y="2404872"/>
+            <a:ext cx="274320" cy="274320"/>
           </a:xfrm>
           <a:prstGeom prst="ellipse">
             <a:avLst/>
@@ -2344,8 +3807,8 @@
         </p:nvSpPr>
         <p:spPr>
           <a:xfrm>
-            <a:off x="914400" y="2697480"/>
-            <a:ext cx="292608" cy="292608"/>
+            <a:off x="914400" y="2404872"/>
+            <a:ext cx="274320" cy="274320"/>
           </a:xfrm>
           <a:prstGeom prst="rect">
             <a:avLst/>
@@ -2383,24 +3846,24 @@
         </p:nvSpPr>
         <p:spPr>
           <a:xfrm>
-            <a:off x="1371600" y="2642616"/>
-            <a:ext cx="3657600" cy="201168"/>
-          </a:xfrm>
-          <a:prstGeom prst="rect">
-            <a:avLst/>
-          </a:prstGeom>
-          <a:noFill/>
-          <a:ln/>
-        </p:spPr>
-        <p:txBody>
-          <a:bodyPr wrap="square" lIns="0" tIns="0" rIns="0" bIns="0" rtlCol="0" anchor="ctr"/>
-          <a:lstStyle/>
-          <a:p>
-            <a:pPr indent="0" marL="0">
-              <a:buNone/>
-            </a:pPr>
-            <a:r>
-              <a:rPr lang="en-US" sz="1300" b="1" dirty="0">
+            <a:off x="1371600" y="2350008"/>
+            <a:ext cx="3657600" cy="182880"/>
+          </a:xfrm>
+          <a:prstGeom prst="rect">
+            <a:avLst/>
+          </a:prstGeom>
+          <a:noFill/>
+          <a:ln/>
+        </p:spPr>
+        <p:txBody>
+          <a:bodyPr wrap="square" lIns="0" tIns="0" rIns="0" bIns="0" rtlCol="0" anchor="ctr"/>
+          <a:lstStyle/>
+          <a:p>
+            <a:pPr indent="0" marL="0">
+              <a:buNone/>
+            </a:pPr>
+            <a:r>
+              <a:rPr lang="en-US" sz="1200" b="1" dirty="0">
                 <a:solidFill>
                   <a:srgbClr val="E2E8F0"/>
                 </a:solidFill>
@@ -2408,9 +3871,9 @@
                 <a:ea typeface="Calibri" pitchFamily="34" charset="-122"/>
                 <a:cs typeface="Calibri" pitchFamily="34" charset="-120"/>
               </a:rPr>
-              <a:t>Static satellite images lack movement</a:t>
-            </a:r>
-            <a:endParaRPr lang="en-US" sz="1300" dirty="0"/>
+              <a:t>Static images miss movement</a:t>
+            </a:r>
+            <a:endParaRPr lang="en-US" sz="1200" dirty="0"/>
           </a:p>
         </p:txBody>
       </p:sp>
@@ -2422,24 +3885,24 @@
         </p:nvSpPr>
         <p:spPr>
           <a:xfrm>
-            <a:off x="1371600" y="2843784"/>
-            <a:ext cx="6400800" cy="182880"/>
-          </a:xfrm>
-          <a:prstGeom prst="rect">
-            <a:avLst/>
-          </a:prstGeom>
-          <a:noFill/>
-          <a:ln/>
-        </p:spPr>
-        <p:txBody>
-          <a:bodyPr wrap="square" lIns="0" tIns="0" rIns="0" bIns="0" rtlCol="0" anchor="ctr"/>
-          <a:lstStyle/>
-          <a:p>
-            <a:pPr indent="0" marL="0">
-              <a:buNone/>
-            </a:pPr>
-            <a:r>
-              <a:rPr lang="en-US" sz="1000" dirty="0">
+            <a:off x="1371600" y="2532888"/>
+            <a:ext cx="6583680" cy="182880"/>
+          </a:xfrm>
+          <a:prstGeom prst="rect">
+            <a:avLst/>
+          </a:prstGeom>
+          <a:noFill/>
+          <a:ln/>
+        </p:spPr>
+        <p:txBody>
+          <a:bodyPr wrap="square" lIns="0" tIns="0" rIns="0" bIns="0" rtlCol="0" anchor="ctr"/>
+          <a:lstStyle/>
+          <a:p>
+            <a:pPr indent="0" marL="0">
+              <a:buNone/>
+            </a:pPr>
+            <a:r>
+              <a:rPr lang="en-US" sz="900" dirty="0">
                 <a:solidFill>
                   <a:srgbClr val="94A3B8"/>
                 </a:solidFill>
@@ -2447,9 +3910,9 @@
                 <a:ea typeface="Calibri" pitchFamily="34" charset="-122"/>
                 <a:cs typeface="Calibri" pitchFamily="34" charset="-120"/>
               </a:rPr>
-              <a:t>Aerosols are transported by wind — snapshots miss the flow</a:t>
-            </a:r>
-            <a:endParaRPr lang="en-US" sz="1000" dirty="0"/>
+              <a:t>Aerosols are transported by wind — snapshots don't show flow</a:t>
+            </a:r>
+            <a:endParaRPr lang="en-US" sz="900" dirty="0"/>
           </a:p>
         </p:txBody>
       </p:sp>
@@ -2461,12 +3924,12 @@
         </p:nvSpPr>
         <p:spPr>
           <a:xfrm>
-            <a:off x="731520" y="3172968"/>
-            <a:ext cx="7680960" cy="475488"/>
+            <a:off x="731520" y="2843784"/>
+            <a:ext cx="7680960" cy="420624"/>
           </a:xfrm>
           <a:prstGeom prst="rect">
             <a:avLst>
-              <a:gd name="adj" fmla="val 11538"/>
+              <a:gd name="adj" fmla="val 10870"/>
             </a:avLst>
           </a:prstGeom>
           <a:solidFill>
@@ -2483,8 +3946,8 @@
         </p:nvSpPr>
         <p:spPr>
           <a:xfrm>
-            <a:off x="914400" y="3264408"/>
-            <a:ext cx="292608" cy="292608"/>
+            <a:off x="914400" y="2916936"/>
+            <a:ext cx="274320" cy="274320"/>
           </a:xfrm>
           <a:prstGeom prst="ellipse">
             <a:avLst/>
@@ -2503,8 +3966,8 @@
         </p:nvSpPr>
         <p:spPr>
           <a:xfrm>
-            <a:off x="914400" y="3264408"/>
-            <a:ext cx="292608" cy="292608"/>
+            <a:off x="914400" y="2916936"/>
+            <a:ext cx="274320" cy="274320"/>
           </a:xfrm>
           <a:prstGeom prst="rect">
             <a:avLst/>
@@ -2542,24 +4005,24 @@
         </p:nvSpPr>
         <p:spPr>
           <a:xfrm>
-            <a:off x="1371600" y="3209544"/>
-            <a:ext cx="3657600" cy="201168"/>
-          </a:xfrm>
-          <a:prstGeom prst="rect">
-            <a:avLst/>
-          </a:prstGeom>
-          <a:noFill/>
-          <a:ln/>
-        </p:spPr>
-        <p:txBody>
-          <a:bodyPr wrap="square" lIns="0" tIns="0" rIns="0" bIns="0" rtlCol="0" anchor="ctr"/>
-          <a:lstStyle/>
-          <a:p>
-            <a:pPr indent="0" marL="0">
-              <a:buNone/>
-            </a:pPr>
-            <a:r>
-              <a:rPr lang="en-US" sz="1300" b="1" dirty="0">
+            <a:off x="1371600" y="2862072"/>
+            <a:ext cx="3657600" cy="182880"/>
+          </a:xfrm>
+          <a:prstGeom prst="rect">
+            <a:avLst/>
+          </a:prstGeom>
+          <a:noFill/>
+          <a:ln/>
+        </p:spPr>
+        <p:txBody>
+          <a:bodyPr wrap="square" lIns="0" tIns="0" rIns="0" bIns="0" rtlCol="0" anchor="ctr"/>
+          <a:lstStyle/>
+          <a:p>
+            <a:pPr indent="0" marL="0">
+              <a:buNone/>
+            </a:pPr>
+            <a:r>
+              <a:rPr lang="en-US" sz="1200" b="1" dirty="0">
                 <a:solidFill>
                   <a:srgbClr val="E2E8F0"/>
                 </a:solidFill>
@@ -2567,9 +4030,9 @@
                 <a:ea typeface="Calibri" pitchFamily="34" charset="-122"/>
                 <a:cs typeface="Calibri" pitchFamily="34" charset="-120"/>
               </a:rPr>
-              <a:t>Traditional rendering is too slow</a:t>
-            </a:r>
-            <a:endParaRPr lang="en-US" sz="1300" dirty="0"/>
+              <a:t>CPU rendering is too slow</a:t>
+            </a:r>
+            <a:endParaRPr lang="en-US" sz="1200" dirty="0"/>
           </a:p>
         </p:txBody>
       </p:sp>
@@ -2581,24 +4044,24 @@
         </p:nvSpPr>
         <p:spPr>
           <a:xfrm>
-            <a:off x="1371600" y="3410712"/>
-            <a:ext cx="6400800" cy="182880"/>
-          </a:xfrm>
-          <a:prstGeom prst="rect">
-            <a:avLst/>
-          </a:prstGeom>
-          <a:noFill/>
-          <a:ln/>
-        </p:spPr>
-        <p:txBody>
-          <a:bodyPr wrap="square" lIns="0" tIns="0" rIns="0" bIns="0" rtlCol="0" anchor="ctr"/>
-          <a:lstStyle/>
-          <a:p>
-            <a:pPr indent="0" marL="0">
-              <a:buNone/>
-            </a:pPr>
-            <a:r>
-              <a:rPr lang="en-US" sz="1000" dirty="0">
+            <a:off x="1371600" y="3044952"/>
+            <a:ext cx="6583680" cy="182880"/>
+          </a:xfrm>
+          <a:prstGeom prst="rect">
+            <a:avLst/>
+          </a:prstGeom>
+          <a:noFill/>
+          <a:ln/>
+        </p:spPr>
+        <p:txBody>
+          <a:bodyPr wrap="square" lIns="0" tIns="0" rIns="0" bIns="0" rtlCol="0" anchor="ctr"/>
+          <a:lstStyle/>
+          <a:p>
+            <a:pPr indent="0" marL="0">
+              <a:buNone/>
+            </a:pPr>
+            <a:r>
+              <a:rPr lang="en-US" sz="900" dirty="0">
                 <a:solidFill>
                   <a:srgbClr val="94A3B8"/>
                 </a:solidFill>
@@ -2606,9 +4069,9 @@
                 <a:ea typeface="Calibri" pitchFamily="34" charset="-122"/>
                 <a:cs typeface="Calibri" pitchFamily="34" charset="-120"/>
               </a:rPr>
-              <a:t>Canvas 2D can handle ~8,000 particles before frame drops</a:t>
-            </a:r>
-            <a:endParaRPr lang="en-US" sz="1000" dirty="0"/>
+              <a:t>Canvas 2D handles ~8K particles before frame drops at 60 FPS</a:t>
+            </a:r>
+            <a:endParaRPr lang="en-US" sz="900" dirty="0"/>
           </a:p>
         </p:txBody>
       </p:sp>
@@ -2620,12 +4083,12 @@
         </p:nvSpPr>
         <p:spPr>
           <a:xfrm>
-            <a:off x="731520" y="3739896"/>
-            <a:ext cx="7680960" cy="475488"/>
+            <a:off x="731520" y="3355848"/>
+            <a:ext cx="7680960" cy="420624"/>
           </a:xfrm>
           <a:prstGeom prst="rect">
             <a:avLst>
-              <a:gd name="adj" fmla="val 11538"/>
+              <a:gd name="adj" fmla="val 10870"/>
             </a:avLst>
           </a:prstGeom>
           <a:solidFill>
@@ -2642,8 +4105,8 @@
         </p:nvSpPr>
         <p:spPr>
           <a:xfrm>
-            <a:off x="914400" y="3831336"/>
-            <a:ext cx="292608" cy="292608"/>
+            <a:off x="914400" y="3429000"/>
+            <a:ext cx="274320" cy="274320"/>
           </a:xfrm>
           <a:prstGeom prst="ellipse">
             <a:avLst/>
@@ -2662,8 +4125,8 @@
         </p:nvSpPr>
         <p:spPr>
           <a:xfrm>
-            <a:off x="914400" y="3831336"/>
-            <a:ext cx="292608" cy="292608"/>
+            <a:off x="914400" y="3429000"/>
+            <a:ext cx="274320" cy="274320"/>
           </a:xfrm>
           <a:prstGeom prst="rect">
             <a:avLst/>
@@ -2701,24 +4164,24 @@
         </p:nvSpPr>
         <p:spPr>
           <a:xfrm>
-            <a:off x="1371600" y="3776472"/>
-            <a:ext cx="3657600" cy="201168"/>
-          </a:xfrm>
-          <a:prstGeom prst="rect">
-            <a:avLst/>
-          </a:prstGeom>
-          <a:noFill/>
-          <a:ln/>
-        </p:spPr>
-        <p:txBody>
-          <a:bodyPr wrap="square" lIns="0" tIns="0" rIns="0" bIns="0" rtlCol="0" anchor="ctr"/>
-          <a:lstStyle/>
-          <a:p>
-            <a:pPr indent="0" marL="0">
-              <a:buNone/>
-            </a:pPr>
-            <a:r>
-              <a:rPr lang="en-US" sz="1300" b="1" dirty="0">
+            <a:off x="1371600" y="3374136"/>
+            <a:ext cx="3657600" cy="182880"/>
+          </a:xfrm>
+          <a:prstGeom prst="rect">
+            <a:avLst/>
+          </a:prstGeom>
+          <a:noFill/>
+          <a:ln/>
+        </p:spPr>
+        <p:txBody>
+          <a:bodyPr wrap="square" lIns="0" tIns="0" rIns="0" bIns="0" rtlCol="0" anchor="ctr"/>
+          <a:lstStyle/>
+          <a:p>
+            <a:pPr indent="0" marL="0">
+              <a:buNone/>
+            </a:pPr>
+            <a:r>
+              <a:rPr lang="en-US" sz="1200" b="1" dirty="0">
                 <a:solidFill>
                   <a:srgbClr val="E2E8F0"/>
                 </a:solidFill>
@@ -2726,9 +4189,9 @@
                 <a:ea typeface="Calibri" pitchFamily="34" charset="-122"/>
                 <a:cs typeface="Calibri" pitchFamily="34" charset="-120"/>
               </a:rPr>
-              <a:t>Species data is mixed together</a:t>
-            </a:r>
-            <a:endParaRPr lang="en-US" sz="1300" dirty="0"/>
+              <a:t>Species data is mixed</a:t>
+            </a:r>
+            <a:endParaRPr lang="en-US" sz="1200" dirty="0"/>
           </a:p>
         </p:txBody>
       </p:sp>
@@ -2740,24 +4203,24 @@
         </p:nvSpPr>
         <p:spPr>
           <a:xfrm>
-            <a:off x="1371600" y="3977640"/>
-            <a:ext cx="6400800" cy="182880"/>
-          </a:xfrm>
-          <a:prstGeom prst="rect">
-            <a:avLst/>
-          </a:prstGeom>
-          <a:noFill/>
-          <a:ln/>
-        </p:spPr>
-        <p:txBody>
-          <a:bodyPr wrap="square" lIns="0" tIns="0" rIns="0" bIns="0" rtlCol="0" anchor="ctr"/>
-          <a:lstStyle/>
-          <a:p>
-            <a:pPr indent="0" marL="0">
-              <a:buNone/>
-            </a:pPr>
-            <a:r>
-              <a:rPr lang="en-US" sz="1000" dirty="0">
+            <a:off x="1371600" y="3557016"/>
+            <a:ext cx="6583680" cy="182880"/>
+          </a:xfrm>
+          <a:prstGeom prst="rect">
+            <a:avLst/>
+          </a:prstGeom>
+          <a:noFill/>
+          <a:ln/>
+        </p:spPr>
+        <p:txBody>
+          <a:bodyPr wrap="square" lIns="0" tIns="0" rIns="0" bIns="0" rtlCol="0" anchor="ctr"/>
+          <a:lstStyle/>
+          <a:p>
+            <a:pPr indent="0" marL="0">
+              <a:buNone/>
+            </a:pPr>
+            <a:r>
+              <a:rPr lang="en-US" sz="900" dirty="0">
                 <a:solidFill>
                   <a:srgbClr val="94A3B8"/>
                 </a:solidFill>
@@ -2765,9 +4228,9 @@
                 <a:ea typeface="Calibri" pitchFamily="34" charset="-122"/>
                 <a:cs typeface="Calibri" pitchFamily="34" charset="-120"/>
               </a:rPr>
-              <a:t>Each aerosol type has distinct sources and transport patterns</a:t>
-            </a:r>
-            <a:endParaRPr lang="en-US" sz="1000" dirty="0"/>
+              <a:t>Each aerosol type (dust, carbon, salt) has distinct transport patterns</a:t>
+            </a:r>
+            <a:endParaRPr lang="en-US" sz="900" dirty="0"/>
           </a:p>
         </p:txBody>
       </p:sp>
@@ -2779,12 +4242,12 @@
         </p:nvSpPr>
         <p:spPr>
           <a:xfrm>
-            <a:off x="731520" y="4306824"/>
-            <a:ext cx="7680960" cy="475488"/>
+            <a:off x="731520" y="3867912"/>
+            <a:ext cx="7680960" cy="420624"/>
           </a:xfrm>
           <a:prstGeom prst="rect">
             <a:avLst>
-              <a:gd name="adj" fmla="val 11538"/>
+              <a:gd name="adj" fmla="val 10870"/>
             </a:avLst>
           </a:prstGeom>
           <a:solidFill>
@@ -2801,8 +4264,8 @@
         </p:nvSpPr>
         <p:spPr>
           <a:xfrm>
-            <a:off x="914400" y="4398264"/>
-            <a:ext cx="292608" cy="292608"/>
+            <a:off x="914400" y="3941064"/>
+            <a:ext cx="274320" cy="274320"/>
           </a:xfrm>
           <a:prstGeom prst="ellipse">
             <a:avLst/>
@@ -2821,8 +4284,8 @@
         </p:nvSpPr>
         <p:spPr>
           <a:xfrm>
-            <a:off x="914400" y="4398264"/>
-            <a:ext cx="292608" cy="292608"/>
+            <a:off x="914400" y="3941064"/>
+            <a:ext cx="274320" cy="274320"/>
           </a:xfrm>
           <a:prstGeom prst="rect">
             <a:avLst/>
@@ -2860,24 +4323,24 @@
         </p:nvSpPr>
         <p:spPr>
           <a:xfrm>
-            <a:off x="1371600" y="4343400"/>
-            <a:ext cx="3657600" cy="201168"/>
-          </a:xfrm>
-          <a:prstGeom prst="rect">
-            <a:avLst/>
-          </a:prstGeom>
-          <a:noFill/>
-          <a:ln/>
-        </p:spPr>
-        <p:txBody>
-          <a:bodyPr wrap="square" lIns="0" tIns="0" rIns="0" bIns="0" rtlCol="0" anchor="ctr"/>
-          <a:lstStyle/>
-          <a:p>
-            <a:pPr indent="0" marL="0">
-              <a:buNone/>
-            </a:pPr>
-            <a:r>
-              <a:rPr lang="en-US" sz="1300" b="1" dirty="0">
+            <a:off x="1371600" y="3886200"/>
+            <a:ext cx="3657600" cy="182880"/>
+          </a:xfrm>
+          <a:prstGeom prst="rect">
+            <a:avLst/>
+          </a:prstGeom>
+          <a:noFill/>
+          <a:ln/>
+        </p:spPr>
+        <p:txBody>
+          <a:bodyPr wrap="square" lIns="0" tIns="0" rIns="0" bIns="0" rtlCol="0" anchor="ctr"/>
+          <a:lstStyle/>
+          <a:p>
+            <a:pPr indent="0" marL="0">
+              <a:buNone/>
+            </a:pPr>
+            <a:r>
+              <a:rPr lang="en-US" sz="1200" b="1" dirty="0">
                 <a:solidFill>
                   <a:srgbClr val="E2E8F0"/>
                 </a:solidFill>
@@ -2885,9 +4348,9 @@
                 <a:ea typeface="Calibri" pitchFamily="34" charset="-122"/>
                 <a:cs typeface="Calibri" pitchFamily="34" charset="-120"/>
               </a:rPr>
-              <a:t>No accessible real-time data pipeline</a:t>
-            </a:r>
-            <a:endParaRPr lang="en-US" sz="1300" dirty="0"/>
+              <a:t>No accessible real-time pipeline</a:t>
+            </a:r>
+            <a:endParaRPr lang="en-US" sz="1200" dirty="0"/>
           </a:p>
         </p:txBody>
       </p:sp>
@@ -2899,24 +4362,24 @@
         </p:nvSpPr>
         <p:spPr>
           <a:xfrm>
-            <a:off x="1371600" y="4544568"/>
-            <a:ext cx="6400800" cy="182880"/>
-          </a:xfrm>
-          <a:prstGeom prst="rect">
-            <a:avLst/>
-          </a:prstGeom>
-          <a:noFill/>
-          <a:ln/>
-        </p:spPr>
-        <p:txBody>
-          <a:bodyPr wrap="square" lIns="0" tIns="0" rIns="0" bIns="0" rtlCol="0" anchor="ctr"/>
-          <a:lstStyle/>
-          <a:p>
-            <a:pPr indent="0" marL="0">
-              <a:buNone/>
-            </a:pPr>
-            <a:r>
-              <a:rPr lang="en-US" sz="1000" dirty="0">
+            <a:off x="1371600" y="4069080"/>
+            <a:ext cx="6583680" cy="182880"/>
+          </a:xfrm>
+          <a:prstGeom prst="rect">
+            <a:avLst/>
+          </a:prstGeom>
+          <a:noFill/>
+          <a:ln/>
+        </p:spPr>
+        <p:txBody>
+          <a:bodyPr wrap="square" lIns="0" tIns="0" rIns="0" bIns="0" rtlCol="0" anchor="ctr"/>
+          <a:lstStyle/>
+          <a:p>
+            <a:pPr indent="0" marL="0">
+              <a:buNone/>
+            </a:pPr>
+            <a:r>
+              <a:rPr lang="en-US" sz="900" dirty="0">
                 <a:solidFill>
                   <a:srgbClr val="94A3B8"/>
                 </a:solidFill>
@@ -2924,9 +4387,168 @@
                 <a:ea typeface="Calibri" pitchFamily="34" charset="-122"/>
                 <a:cs typeface="Calibri" pitchFamily="34" charset="-120"/>
               </a:rPr>
-              <a:t>NASA data requires authentication and complex processing</a:t>
-            </a:r>
-            <a:endParaRPr lang="en-US" sz="1000" dirty="0"/>
+              <a:t>NASA data typically requires authentication and complex processing</a:t>
+            </a:r>
+            <a:endParaRPr lang="en-US" sz="900" dirty="0"/>
+          </a:p>
+        </p:txBody>
+      </p:sp>
+      <p:sp>
+        <p:nvSpPr>
+          <p:cNvPr id="26" name="Shape 24"/>
+          <p:cNvSpPr/>
+          <p:nvPr/>
+        </p:nvSpPr>
+        <p:spPr>
+          <a:xfrm>
+            <a:off x="731520" y="4379976"/>
+            <a:ext cx="7680960" cy="420624"/>
+          </a:xfrm>
+          <a:prstGeom prst="rect">
+            <a:avLst>
+              <a:gd name="adj" fmla="val 10870"/>
+            </a:avLst>
+          </a:prstGeom>
+          <a:solidFill>
+            <a:srgbClr val="1A2236"/>
+          </a:solidFill>
+          <a:ln/>
+        </p:spPr>
+      </p:sp>
+      <p:sp>
+        <p:nvSpPr>
+          <p:cNvPr id="27" name="Shape 25"/>
+          <p:cNvSpPr/>
+          <p:nvPr/>
+        </p:nvSpPr>
+        <p:spPr>
+          <a:xfrm>
+            <a:off x="914400" y="4453128"/>
+            <a:ext cx="274320" cy="274320"/>
+          </a:xfrm>
+          <a:prstGeom prst="ellipse">
+            <a:avLst/>
+          </a:prstGeom>
+          <a:solidFill>
+            <a:srgbClr val="8B5CF6"/>
+          </a:solidFill>
+          <a:ln/>
+        </p:spPr>
+      </p:sp>
+      <p:sp>
+        <p:nvSpPr>
+          <p:cNvPr id="28" name="Text 26"/>
+          <p:cNvSpPr/>
+          <p:nvPr/>
+        </p:nvSpPr>
+        <p:spPr>
+          <a:xfrm>
+            <a:off x="914400" y="4453128"/>
+            <a:ext cx="274320" cy="274320"/>
+          </a:xfrm>
+          <a:prstGeom prst="rect">
+            <a:avLst/>
+          </a:prstGeom>
+          <a:noFill/>
+          <a:ln/>
+        </p:spPr>
+        <p:txBody>
+          <a:bodyPr wrap="square" lIns="0" tIns="0" rIns="0" bIns="0" rtlCol="0" anchor="ctr"/>
+          <a:lstStyle/>
+          <a:p>
+            <a:pPr algn="ctr" indent="0" marL="0">
+              <a:buNone/>
+            </a:pPr>
+            <a:r>
+              <a:rPr lang="en-US" sz="1100" dirty="0">
+                <a:solidFill>
+                  <a:srgbClr val="FFFFFF"/>
+                </a:solidFill>
+                <a:latin typeface="Arial Black" pitchFamily="34" charset="0"/>
+                <a:ea typeface="Arial Black" pitchFamily="34" charset="-122"/>
+                <a:cs typeface="Arial Black" pitchFamily="34" charset="-120"/>
+              </a:rPr>
+              <a:t>5</a:t>
+            </a:r>
+            <a:endParaRPr lang="en-US" sz="1100" dirty="0"/>
+          </a:p>
+        </p:txBody>
+      </p:sp>
+      <p:sp>
+        <p:nvSpPr>
+          <p:cNvPr id="29" name="Text 27"/>
+          <p:cNvSpPr/>
+          <p:nvPr/>
+        </p:nvSpPr>
+        <p:spPr>
+          <a:xfrm>
+            <a:off x="1371600" y="4398264"/>
+            <a:ext cx="3657600" cy="182880"/>
+          </a:xfrm>
+          <a:prstGeom prst="rect">
+            <a:avLst/>
+          </a:prstGeom>
+          <a:noFill/>
+          <a:ln/>
+        </p:spPr>
+        <p:txBody>
+          <a:bodyPr wrap="square" lIns="0" tIns="0" rIns="0" bIns="0" rtlCol="0" anchor="ctr"/>
+          <a:lstStyle/>
+          <a:p>
+            <a:pPr indent="0" marL="0">
+              <a:buNone/>
+            </a:pPr>
+            <a:r>
+              <a:rPr lang="en-US" sz="1200" b="1" dirty="0">
+                <a:solidFill>
+                  <a:srgbClr val="E2E8F0"/>
+                </a:solidFill>
+                <a:latin typeface="Calibri" pitchFamily="34" charset="0"/>
+                <a:ea typeface="Calibri" pitchFamily="34" charset="-122"/>
+                <a:cs typeface="Calibri" pitchFamily="34" charset="-120"/>
+              </a:rPr>
+              <a:t>Standard projections distort poles</a:t>
+            </a:r>
+            <a:endParaRPr lang="en-US" sz="1200" dirty="0"/>
+          </a:p>
+        </p:txBody>
+      </p:sp>
+      <p:sp>
+        <p:nvSpPr>
+          <p:cNvPr id="30" name="Text 28"/>
+          <p:cNvSpPr/>
+          <p:nvPr/>
+        </p:nvSpPr>
+        <p:spPr>
+          <a:xfrm>
+            <a:off x="1371600" y="4581144"/>
+            <a:ext cx="6583680" cy="182880"/>
+          </a:xfrm>
+          <a:prstGeom prst="rect">
+            <a:avLst/>
+          </a:prstGeom>
+          <a:noFill/>
+          <a:ln/>
+        </p:spPr>
+        <p:txBody>
+          <a:bodyPr wrap="square" lIns="0" tIns="0" rIns="0" bIns="0" rtlCol="0" anchor="ctr"/>
+          <a:lstStyle/>
+          <a:p>
+            <a:pPr indent="0" marL="0">
+              <a:buNone/>
+            </a:pPr>
+            <a:r>
+              <a:rPr lang="en-US" sz="900" dirty="0">
+                <a:solidFill>
+                  <a:srgbClr val="94A3B8"/>
+                </a:solidFill>
+                <a:latin typeface="Calibri" pitchFamily="34" charset="0"/>
+                <a:ea typeface="Calibri" pitchFamily="34" charset="-122"/>
+                <a:cs typeface="Calibri" pitchFamily="34" charset="-120"/>
+              </a:rPr>
+              <a:t>Web Mercator exaggerates high latitudes — Robinson shows true proportions</a:t>
+            </a:r>
+            <a:endParaRPr lang="en-US" sz="900" dirty="0"/>
           </a:p>
         </p:txBody>
       </p:sp>
@@ -2971,7 +4593,7 @@
         <p:spPr>
           <a:xfrm>
             <a:off x="0" y="0"/>
-            <a:ext cx="73152" cy="5143500"/>
+            <a:ext cx="64008" cy="5143500"/>
           </a:xfrm>
           <a:prstGeom prst="rect">
             <a:avLst/>
@@ -2991,7 +4613,7 @@
         <p:spPr>
           <a:xfrm>
             <a:off x="731520" y="365760"/>
-            <a:ext cx="7315200" cy="457200"/>
+            <a:ext cx="7315200" cy="365760"/>
           </a:xfrm>
           <a:prstGeom prst="rect">
             <a:avLst/>
@@ -3029,7 +4651,7 @@
         </p:nvSpPr>
         <p:spPr>
           <a:xfrm>
-            <a:off x="731520" y="777240"/>
+            <a:off x="731520" y="731520"/>
             <a:ext cx="8229600" cy="548640"/>
           </a:xfrm>
           <a:prstGeom prst="rect">
@@ -3054,7 +4676,7 @@
                 <a:ea typeface="Arial Black" pitchFamily="34" charset="-122"/>
                 <a:cs typeface="Arial Black" pitchFamily="34" charset="-120"/>
               </a:rPr>
-              <a:t>End-to-End Aerosol Transport Visualization</a:t>
+              <a:t>End-to-End Aerosol Transport Pipeline</a:t>
             </a:r>
             <a:endParaRPr lang="en-US" sz="2800" dirty="0"/>
           </a:p>
@@ -3068,12 +4690,12 @@
         </p:nvSpPr>
         <p:spPr>
           <a:xfrm>
-            <a:off x="457200" y="1645920"/>
-            <a:ext cx="1600200" cy="2926080"/>
+            <a:off x="365760" y="1554480"/>
+            <a:ext cx="1627632" cy="3017520"/>
           </a:xfrm>
           <a:prstGeom prst="rect">
             <a:avLst>
-              <a:gd name="adj" fmla="val 4571"/>
+              <a:gd name="adj" fmla="val 3933"/>
             </a:avLst>
           </a:prstGeom>
           <a:solidFill>
@@ -3090,7 +4712,7 @@
         </p:nvSpPr>
         <p:spPr>
           <a:xfrm>
-            <a:off x="1024128" y="1828800"/>
+            <a:off x="950976" y="1737360"/>
             <a:ext cx="457200" cy="457200"/>
           </a:xfrm>
           <a:prstGeom prst="ellipse">
@@ -3110,7 +4732,7 @@
         </p:nvSpPr>
         <p:spPr>
           <a:xfrm>
-            <a:off x="1024128" y="1828800"/>
+            <a:off x="950976" y="1737360"/>
             <a:ext cx="457200" cy="457200"/>
           </a:xfrm>
           <a:prstGeom prst="rect">
@@ -3149,8 +4771,8 @@
         </p:nvSpPr>
         <p:spPr>
           <a:xfrm>
-            <a:off x="548640" y="2423160"/>
-            <a:ext cx="1417320" cy="320040"/>
+            <a:off x="438912" y="2331720"/>
+            <a:ext cx="1481328" cy="274320"/>
           </a:xfrm>
           <a:prstGeom prst="rect">
             <a:avLst/>
@@ -3166,7 +4788,7 @@
               <a:buNone/>
             </a:pPr>
             <a:r>
-              <a:rPr lang="en-US" sz="1200" b="1" dirty="0">
+              <a:rPr lang="en-US" sz="1100" b="1" dirty="0">
                 <a:solidFill>
                   <a:srgbClr val="E2E8F0"/>
                 </a:solidFill>
@@ -3176,7 +4798,7 @@
               </a:rPr>
               <a:t>NASA GEOS-FP</a:t>
             </a:r>
-            <a:endParaRPr lang="en-US" sz="1200" dirty="0"/>
+            <a:endParaRPr lang="en-US" sz="1100" dirty="0"/>
           </a:p>
         </p:txBody>
       </p:sp>
@@ -3188,8 +4810,8 @@
         </p:nvSpPr>
         <p:spPr>
           <a:xfrm>
-            <a:off x="548640" y="2788920"/>
-            <a:ext cx="1417320" cy="1371600"/>
+            <a:off x="438912" y="2697480"/>
+            <a:ext cx="1481328" cy="1371600"/>
           </a:xfrm>
           <a:prstGeom prst="rect">
             <a:avLst/>
@@ -3216,7 +4838,7 @@
                 <a:ea typeface="Calibri" pitchFamily="34" charset="-122"/>
                 <a:cs typeface="Calibri" pitchFamily="34" charset="-120"/>
               </a:rPr>
-              <a:t>Real-time wind + aerosol data</a:t>
+              <a:t>Real-time wind + aerosol</a:t>
             </a:r>
             <a:endParaRPr lang="en-US" sz="900" dirty="0"/>
           </a:p>
@@ -3236,7 +4858,7 @@
                 <a:ea typeface="Calibri" pitchFamily="34" charset="-122"/>
                 <a:cs typeface="Calibri" pitchFamily="34" charset="-120"/>
               </a:rPr>
-              <a:t>0.25° global via OPeNDAP</a:t>
+              <a:t>0.25 deg global, OPeNDAP</a:t>
             </a:r>
             <a:endParaRPr lang="en-US" sz="900" dirty="0"/>
           </a:p>
@@ -3256,7 +4878,7 @@
                 <a:ea typeface="Calibri" pitchFamily="34" charset="-122"/>
                 <a:cs typeface="Calibri" pitchFamily="34" charset="-120"/>
               </a:rPr>
-              <a:t>No authentication needed</a:t>
+              <a:t>No authentication</a:t>
             </a:r>
             <a:endParaRPr lang="en-US" sz="900" dirty="0"/>
           </a:p>
@@ -3270,8 +4892,8 @@
         </p:nvSpPr>
         <p:spPr>
           <a:xfrm>
-            <a:off x="2057400" y="2651760"/>
-            <a:ext cx="137160" cy="365760"/>
+            <a:off x="1993392" y="2560320"/>
+            <a:ext cx="128016" cy="365760"/>
           </a:xfrm>
           <a:prstGeom prst="rect">
             <a:avLst/>
@@ -3287,7 +4909,7 @@
               <a:buNone/>
             </a:pPr>
             <a:r>
-              <a:rPr lang="en-US" sz="1600" dirty="0">
+              <a:rPr lang="en-US" sz="1400" dirty="0">
                 <a:solidFill>
                   <a:srgbClr val="94A3B8"/>
                 </a:solidFill>
@@ -3297,7 +4919,7 @@
               </a:rPr>
               <a:t>&gt;</a:t>
             </a:r>
-            <a:endParaRPr lang="en-US" sz="1600" dirty="0"/>
+            <a:endParaRPr lang="en-US" sz="1400" dirty="0"/>
           </a:p>
         </p:txBody>
       </p:sp>
@@ -3309,12 +4931,12 @@
         </p:nvSpPr>
         <p:spPr>
           <a:xfrm>
-            <a:off x="2194560" y="1645920"/>
-            <a:ext cx="1600200" cy="2926080"/>
+            <a:off x="2121408" y="1554480"/>
+            <a:ext cx="1627632" cy="3017520"/>
           </a:xfrm>
           <a:prstGeom prst="rect">
             <a:avLst>
-              <a:gd name="adj" fmla="val 4571"/>
+              <a:gd name="adj" fmla="val 3933"/>
             </a:avLst>
           </a:prstGeom>
           <a:solidFill>
@@ -3331,7 +4953,7 @@
         </p:nvSpPr>
         <p:spPr>
           <a:xfrm>
-            <a:off x="2761488" y="1828800"/>
+            <a:off x="2706624" y="1737360"/>
             <a:ext cx="457200" cy="457200"/>
           </a:xfrm>
           <a:prstGeom prst="ellipse">
@@ -3351,7 +4973,7 @@
         </p:nvSpPr>
         <p:spPr>
           <a:xfrm>
-            <a:off x="2761488" y="1828800"/>
+            <a:off x="2706624" y="1737360"/>
             <a:ext cx="457200" cy="457200"/>
           </a:xfrm>
           <a:prstGeom prst="rect">
@@ -3390,8 +5012,8 @@
         </p:nvSpPr>
         <p:spPr>
           <a:xfrm>
-            <a:off x="2286000" y="2423160"/>
-            <a:ext cx="1417320" cy="320040"/>
+            <a:off x="2194560" y="2331720"/>
+            <a:ext cx="1481328" cy="274320"/>
           </a:xfrm>
           <a:prstGeom prst="rect">
             <a:avLst/>
@@ -3407,7 +5029,7 @@
               <a:buNone/>
             </a:pPr>
             <a:r>
-              <a:rPr lang="en-US" sz="1200" b="1" dirty="0">
+              <a:rPr lang="en-US" sz="1100" b="1" dirty="0">
                 <a:solidFill>
                   <a:srgbClr val="E2E8F0"/>
                 </a:solidFill>
@@ -3417,7 +5039,7 @@
               </a:rPr>
               <a:t>Python Pipeline</a:t>
             </a:r>
-            <a:endParaRPr lang="en-US" sz="1200" dirty="0"/>
+            <a:endParaRPr lang="en-US" sz="1100" dirty="0"/>
           </a:p>
         </p:txBody>
       </p:sp>
@@ -3429,8 +5051,8 @@
         </p:nvSpPr>
         <p:spPr>
           <a:xfrm>
-            <a:off x="2286000" y="2788920"/>
-            <a:ext cx="1417320" cy="1371600"/>
+            <a:off x="2194560" y="2697480"/>
+            <a:ext cx="1481328" cy="1371600"/>
           </a:xfrm>
           <a:prstGeom prst="rect">
             <a:avLst/>
@@ -3457,7 +5079,7 @@
                 <a:ea typeface="Calibri" pitchFamily="34" charset="-122"/>
                 <a:cs typeface="Calibri" pitchFamily="34" charset="-120"/>
               </a:rPr>
-              <a:t>Weight wind by concentration</a:t>
+              <a:t>Weight wind by aerosol</a:t>
             </a:r>
             <a:endParaRPr lang="en-US" sz="900" dirty="0"/>
           </a:p>
@@ -3477,7 +5099,7 @@
                 <a:ea typeface="Calibri" pitchFamily="34" charset="-122"/>
                 <a:cs typeface="Calibri" pitchFamily="34" charset="-120"/>
               </a:rPr>
-              <a:t>flux = wind x norm(aerosol)</a:t>
+              <a:t>flux = wind x norm(conc)</a:t>
             </a:r>
             <a:endParaRPr lang="en-US" sz="900" dirty="0"/>
           </a:p>
@@ -3511,8 +5133,8 @@
         </p:nvSpPr>
         <p:spPr>
           <a:xfrm>
-            <a:off x="3794760" y="2651760"/>
-            <a:ext cx="137160" cy="365760"/>
+            <a:off x="3749040" y="2560320"/>
+            <a:ext cx="128016" cy="365760"/>
           </a:xfrm>
           <a:prstGeom prst="rect">
             <a:avLst/>
@@ -3528,7 +5150,7 @@
               <a:buNone/>
             </a:pPr>
             <a:r>
-              <a:rPr lang="en-US" sz="1600" dirty="0">
+              <a:rPr lang="en-US" sz="1400" dirty="0">
                 <a:solidFill>
                   <a:srgbClr val="94A3B8"/>
                 </a:solidFill>
@@ -3538,7 +5160,7 @@
               </a:rPr>
               <a:t>&gt;</a:t>
             </a:r>
-            <a:endParaRPr lang="en-US" sz="1600" dirty="0"/>
+            <a:endParaRPr lang="en-US" sz="1400" dirty="0"/>
           </a:p>
         </p:txBody>
       </p:sp>
@@ -3550,12 +5172,12 @@
         </p:nvSpPr>
         <p:spPr>
           <a:xfrm>
-            <a:off x="3931920" y="1645920"/>
-            <a:ext cx="1600200" cy="2926080"/>
+            <a:off x="3877056" y="1554480"/>
+            <a:ext cx="1627632" cy="3017520"/>
           </a:xfrm>
           <a:prstGeom prst="rect">
             <a:avLst>
-              <a:gd name="adj" fmla="val 4571"/>
+              <a:gd name="adj" fmla="val 3933"/>
             </a:avLst>
           </a:prstGeom>
           <a:solidFill>
@@ -3572,7 +5194,7 @@
         </p:nvSpPr>
         <p:spPr>
           <a:xfrm>
-            <a:off x="4498848" y="1828800"/>
+            <a:off x="4462272" y="1737360"/>
             <a:ext cx="457200" cy="457200"/>
           </a:xfrm>
           <a:prstGeom prst="ellipse">
@@ -3592,7 +5214,7 @@
         </p:nvSpPr>
         <p:spPr>
           <a:xfrm>
-            <a:off x="4498848" y="1828800"/>
+            <a:off x="4462272" y="1737360"/>
             <a:ext cx="457200" cy="457200"/>
           </a:xfrm>
           <a:prstGeom prst="rect">
@@ -3631,8 +5253,8 @@
         </p:nvSpPr>
         <p:spPr>
           <a:xfrm>
-            <a:off x="4023360" y="2423160"/>
-            <a:ext cx="1417320" cy="320040"/>
+            <a:off x="3950208" y="2331720"/>
+            <a:ext cx="1481328" cy="274320"/>
           </a:xfrm>
           <a:prstGeom prst="rect">
             <a:avLst/>
@@ -3648,7 +5270,7 @@
               <a:buNone/>
             </a:pPr>
             <a:r>
-              <a:rPr lang="en-US" sz="1200" b="1" dirty="0">
+              <a:rPr lang="en-US" sz="1100" b="1" dirty="0">
                 <a:solidFill>
                   <a:srgbClr val="E2E8F0"/>
                 </a:solidFill>
@@ -3658,7 +5280,7 @@
               </a:rPr>
               <a:t>PNG Encoding</a:t>
             </a:r>
-            <a:endParaRPr lang="en-US" sz="1200" dirty="0"/>
+            <a:endParaRPr lang="en-US" sz="1100" dirty="0"/>
           </a:p>
         </p:txBody>
       </p:sp>
@@ -3670,8 +5292,8 @@
         </p:nvSpPr>
         <p:spPr>
           <a:xfrm>
-            <a:off x="4023360" y="2788920"/>
-            <a:ext cx="1417320" cy="1371600"/>
+            <a:off x="3950208" y="2697480"/>
+            <a:ext cx="1481328" cy="1371600"/>
           </a:xfrm>
           <a:prstGeom prst="rect">
             <a:avLst/>
@@ -3698,7 +5320,7 @@
                 <a:ea typeface="Calibri" pitchFamily="34" charset="-122"/>
                 <a:cs typeface="Calibri" pitchFamily="34" charset="-120"/>
               </a:rPr>
-              <a:t>U→Red, V→Green, Mag→Blue</a:t>
+              <a:t>U-&gt;Red, V-&gt;Green, Mag-&gt;Blue</a:t>
             </a:r>
             <a:endParaRPr lang="en-US" sz="900" dirty="0"/>
           </a:p>
@@ -3738,7 +5360,7 @@
                 <a:ea typeface="Calibri" pitchFamily="34" charset="-122"/>
                 <a:cs typeface="Calibri" pitchFamily="34" charset="-120"/>
               </a:rPr>
-              <a:t>360x181 grid (1° resolution)</a:t>
+              <a:t>360x181 grid</a:t>
             </a:r>
             <a:endParaRPr lang="en-US" sz="900" dirty="0"/>
           </a:p>
@@ -3752,8 +5374,8 @@
         </p:nvSpPr>
         <p:spPr>
           <a:xfrm>
-            <a:off x="5532120" y="2651760"/>
-            <a:ext cx="137160" cy="365760"/>
+            <a:off x="5504688" y="2560320"/>
+            <a:ext cx="128016" cy="365760"/>
           </a:xfrm>
           <a:prstGeom prst="rect">
             <a:avLst/>
@@ -3769,7 +5391,7 @@
               <a:buNone/>
             </a:pPr>
             <a:r>
-              <a:rPr lang="en-US" sz="1600" dirty="0">
+              <a:rPr lang="en-US" sz="1400" dirty="0">
                 <a:solidFill>
                   <a:srgbClr val="94A3B8"/>
                 </a:solidFill>
@@ -3779,7 +5401,7 @@
               </a:rPr>
               <a:t>&gt;</a:t>
             </a:r>
-            <a:endParaRPr lang="en-US" sz="1600" dirty="0"/>
+            <a:endParaRPr lang="en-US" sz="1400" dirty="0"/>
           </a:p>
         </p:txBody>
       </p:sp>
@@ -3791,12 +5413,12 @@
         </p:nvSpPr>
         <p:spPr>
           <a:xfrm>
-            <a:off x="5669280" y="1645920"/>
-            <a:ext cx="1600200" cy="2926080"/>
+            <a:off x="5632704" y="1554480"/>
+            <a:ext cx="1627632" cy="3017520"/>
           </a:xfrm>
           <a:prstGeom prst="rect">
             <a:avLst>
-              <a:gd name="adj" fmla="val 4571"/>
+              <a:gd name="adj" fmla="val 3933"/>
             </a:avLst>
           </a:prstGeom>
           <a:solidFill>
@@ -3813,7 +5435,7 @@
         </p:nvSpPr>
         <p:spPr>
           <a:xfrm>
-            <a:off x="6236208" y="1828800"/>
+            <a:off x="6217920" y="1737360"/>
             <a:ext cx="457200" cy="457200"/>
           </a:xfrm>
           <a:prstGeom prst="ellipse">
@@ -3833,7 +5455,7 @@
         </p:nvSpPr>
         <p:spPr>
           <a:xfrm>
-            <a:off x="6236208" y="1828800"/>
+            <a:off x="6217920" y="1737360"/>
             <a:ext cx="457200" cy="457200"/>
           </a:xfrm>
           <a:prstGeom prst="rect">
@@ -3872,8 +5494,8 @@
         </p:nvSpPr>
         <p:spPr>
           <a:xfrm>
-            <a:off x="5760720" y="2423160"/>
-            <a:ext cx="1417320" cy="320040"/>
+            <a:off x="5705856" y="2331720"/>
+            <a:ext cx="1481328" cy="274320"/>
           </a:xfrm>
           <a:prstGeom prst="rect">
             <a:avLst/>
@@ -3889,7 +5511,7 @@
               <a:buNone/>
             </a:pPr>
             <a:r>
-              <a:rPr lang="en-US" sz="1200" b="1" dirty="0">
+              <a:rPr lang="en-US" sz="1100" b="1" dirty="0">
                 <a:solidFill>
                   <a:srgbClr val="E2E8F0"/>
                 </a:solidFill>
@@ -3899,7 +5521,7 @@
               </a:rPr>
               <a:t>WebGPU Compute</a:t>
             </a:r>
-            <a:endParaRPr lang="en-US" sz="1200" dirty="0"/>
+            <a:endParaRPr lang="en-US" sz="1100" dirty="0"/>
           </a:p>
         </p:txBody>
       </p:sp>
@@ -3911,8 +5533,8 @@
         </p:nvSpPr>
         <p:spPr>
           <a:xfrm>
-            <a:off x="5760720" y="2788920"/>
-            <a:ext cx="1417320" cy="1371600"/>
+            <a:off x="5705856" y="2697480"/>
+            <a:ext cx="1481328" cy="1371600"/>
           </a:xfrm>
           <a:prstGeom prst="rect">
             <a:avLst/>
@@ -3959,7 +5581,7 @@
                 <a:ea typeface="Calibri" pitchFamily="34" charset="-122"/>
                 <a:cs typeface="Calibri" pitchFamily="34" charset="-120"/>
               </a:rPr>
-              <a:t>WGSL compute shaders</a:t>
+              <a:t>6-pass WGSL pipeline</a:t>
             </a:r>
             <a:endParaRPr lang="en-US" sz="900" dirty="0"/>
           </a:p>
@@ -3979,7 +5601,7 @@
                 <a:ea typeface="Calibri" pitchFamily="34" charset="-122"/>
                 <a:cs typeface="Calibri" pitchFamily="34" charset="-120"/>
               </a:rPr>
-              <a:t>Additive glow rendering</a:t>
+              <a:t>Bloom post-processing</a:t>
             </a:r>
             <a:endParaRPr lang="en-US" sz="900" dirty="0"/>
           </a:p>
@@ -3993,8 +5615,8 @@
         </p:nvSpPr>
         <p:spPr>
           <a:xfrm>
-            <a:off x="7269480" y="2651760"/>
-            <a:ext cx="137160" cy="365760"/>
+            <a:off x="7260336" y="2560320"/>
+            <a:ext cx="128016" cy="365760"/>
           </a:xfrm>
           <a:prstGeom prst="rect">
             <a:avLst/>
@@ -4010,7 +5632,7 @@
               <a:buNone/>
             </a:pPr>
             <a:r>
-              <a:rPr lang="en-US" sz="1600" dirty="0">
+              <a:rPr lang="en-US" sz="1400" dirty="0">
                 <a:solidFill>
                   <a:srgbClr val="94A3B8"/>
                 </a:solidFill>
@@ -4020,7 +5642,7 @@
               </a:rPr>
               <a:t>&gt;</a:t>
             </a:r>
-            <a:endParaRPr lang="en-US" sz="1600" dirty="0"/>
+            <a:endParaRPr lang="en-US" sz="1400" dirty="0"/>
           </a:p>
         </p:txBody>
       </p:sp>
@@ -4032,12 +5654,12 @@
         </p:nvSpPr>
         <p:spPr>
           <a:xfrm>
-            <a:off x="7406640" y="1645920"/>
-            <a:ext cx="1600200" cy="2926080"/>
+            <a:off x="7388352" y="1554480"/>
+            <a:ext cx="1627632" cy="3017520"/>
           </a:xfrm>
           <a:prstGeom prst="rect">
             <a:avLst>
-              <a:gd name="adj" fmla="val 4571"/>
+              <a:gd name="adj" fmla="val 3933"/>
             </a:avLst>
           </a:prstGeom>
           <a:solidFill>
@@ -4054,7 +5676,7 @@
         </p:nvSpPr>
         <p:spPr>
           <a:xfrm>
-            <a:off x="7973568" y="1828800"/>
+            <a:off x="7973568" y="1737360"/>
             <a:ext cx="457200" cy="457200"/>
           </a:xfrm>
           <a:prstGeom prst="ellipse">
@@ -4074,7 +5696,7 @@
         </p:nvSpPr>
         <p:spPr>
           <a:xfrm>
-            <a:off x="7973568" y="1828800"/>
+            <a:off x="7973568" y="1737360"/>
             <a:ext cx="457200" cy="457200"/>
           </a:xfrm>
           <a:prstGeom prst="rect">
@@ -4113,8 +5735,8 @@
         </p:nvSpPr>
         <p:spPr>
           <a:xfrm>
-            <a:off x="7498080" y="2423160"/>
-            <a:ext cx="1417320" cy="320040"/>
+            <a:off x="7461504" y="2331720"/>
+            <a:ext cx="1481328" cy="274320"/>
           </a:xfrm>
           <a:prstGeom prst="rect">
             <a:avLst/>
@@ -4130,7 +5752,7 @@
               <a:buNone/>
             </a:pPr>
             <a:r>
-              <a:rPr lang="en-US" sz="1200" b="1" dirty="0">
+              <a:rPr lang="en-US" sz="1100" b="1" dirty="0">
                 <a:solidFill>
                   <a:srgbClr val="E2E8F0"/>
                 </a:solidFill>
@@ -4138,9 +5760,9 @@
                 <a:ea typeface="Calibri" pitchFamily="34" charset="-122"/>
                 <a:cs typeface="Calibri" pitchFamily="34" charset="-120"/>
               </a:rPr>
-              <a:t>Browser Output</a:t>
-            </a:r>
-            <a:endParaRPr lang="en-US" sz="1200" dirty="0"/>
+              <a:t>Robinson Output</a:t>
+            </a:r>
+            <a:endParaRPr lang="en-US" sz="1100" dirty="0"/>
           </a:p>
         </p:txBody>
       </p:sp>
@@ -4152,8 +5774,8 @@
         </p:nvSpPr>
         <p:spPr>
           <a:xfrm>
-            <a:off x="7498080" y="2788920"/>
-            <a:ext cx="1417320" cy="1371600"/>
+            <a:off x="7461504" y="2697480"/>
+            <a:ext cx="1481328" cy="1371600"/>
           </a:xfrm>
           <a:prstGeom prst="rect">
             <a:avLst/>
@@ -4180,7 +5802,7 @@
                 <a:ea typeface="Calibri" pitchFamily="34" charset="-122"/>
                 <a:cs typeface="Calibri" pitchFamily="34" charset="-120"/>
               </a:rPr>
-              <a:t>ArcGIS dark basemap</a:t>
+              <a:t>WMO dark basemap</a:t>
             </a:r>
             <a:endParaRPr lang="en-US" sz="900" dirty="0"/>
           </a:p>
@@ -4267,7 +5889,7 @@
         <p:spPr>
           <a:xfrm>
             <a:off x="0" y="0"/>
-            <a:ext cx="73152" cy="5143500"/>
+            <a:ext cx="64008" cy="5143500"/>
           </a:xfrm>
           <a:prstGeom prst="rect">
             <a:avLst/>
@@ -4287,7 +5909,7 @@
         <p:spPr>
           <a:xfrm>
             <a:off x="731520" y="365760"/>
-            <a:ext cx="7315200" cy="457200"/>
+            <a:ext cx="7315200" cy="365760"/>
           </a:xfrm>
           <a:prstGeom prst="rect">
             <a:avLst/>
@@ -4311,7 +5933,7 @@
                 <a:ea typeface="Calibri" pitchFamily="34" charset="-122"/>
                 <a:cs typeface="Calibri" pitchFamily="34" charset="-120"/>
               </a:rPr>
-              <a:t>DATA SOURCES</a:t>
+              <a:t>STEP 1: DATA ACQUISITION</a:t>
             </a:r>
             <a:endParaRPr lang="en-US" sz="1100" dirty="0"/>
           </a:p>
@@ -4325,7 +5947,7 @@
         </p:nvSpPr>
         <p:spPr>
           <a:xfrm>
-            <a:off x="731520" y="777240"/>
+            <a:off x="731520" y="731520"/>
             <a:ext cx="8229600" cy="548640"/>
           </a:xfrm>
           <a:prstGeom prst="rect">
@@ -4364,24 +5986,24 @@
         </p:nvSpPr>
         <p:spPr>
           <a:xfrm>
-            <a:off x="731520" y="1371600"/>
-            <a:ext cx="7315200" cy="365760"/>
-          </a:xfrm>
-          <a:prstGeom prst="rect">
-            <a:avLst/>
-          </a:prstGeom>
-          <a:noFill/>
-          <a:ln/>
-        </p:spPr>
-        <p:txBody>
-          <a:bodyPr wrap="square" lIns="0" tIns="0" rIns="0" bIns="0" rtlCol="0" anchor="ctr"/>
-          <a:lstStyle/>
-          <a:p>
-            <a:pPr indent="0" marL="0">
-              <a:buNone/>
-            </a:pPr>
-            <a:r>
-              <a:rPr lang="en-US" sz="1400" dirty="0">
+            <a:off x="731520" y="1325880"/>
+            <a:ext cx="7315200" cy="320040"/>
+          </a:xfrm>
+          <a:prstGeom prst="rect">
+            <a:avLst/>
+          </a:prstGeom>
+          <a:noFill/>
+          <a:ln/>
+        </p:spPr>
+        <p:txBody>
+          <a:bodyPr wrap="square" lIns="0" tIns="0" rIns="0" bIns="0" rtlCol="0" anchor="ctr"/>
+          <a:lstStyle/>
+          <a:p>
+            <a:pPr indent="0" marL="0">
+              <a:buNone/>
+            </a:pPr>
+            <a:r>
+              <a:rPr lang="en-US" sz="1300" dirty="0">
                 <a:solidFill>
                   <a:srgbClr val="94A3B8"/>
                 </a:solidFill>
@@ -4391,7 +6013,7 @@
               </a:rPr>
               <a:t>Real-time atmospheric data streamed via OPeNDAP — no authentication required.</a:t>
             </a:r>
-            <a:endParaRPr lang="en-US" sz="1400" dirty="0"/>
+            <a:endParaRPr lang="en-US" sz="1300" dirty="0"/>
           </a:p>
         </p:txBody>
       </p:sp>
@@ -4403,12 +6025,12 @@
         </p:nvSpPr>
         <p:spPr>
           <a:xfrm>
-            <a:off x="731520" y="2011680"/>
-            <a:ext cx="3749040" cy="2560320"/>
+            <a:off x="731520" y="1920240"/>
+            <a:ext cx="3749040" cy="2743200"/>
           </a:xfrm>
           <a:prstGeom prst="rect">
             <a:avLst>
-              <a:gd name="adj" fmla="val 2857"/>
+              <a:gd name="adj" fmla="val 2333"/>
             </a:avLst>
           </a:prstGeom>
           <a:solidFill>
@@ -4425,8 +6047,8 @@
         </p:nvSpPr>
         <p:spPr>
           <a:xfrm>
-            <a:off x="1005840" y="2148840"/>
-            <a:ext cx="3200400" cy="274320"/>
+            <a:off x="1005840" y="2011680"/>
+            <a:ext cx="2743200" cy="274320"/>
           </a:xfrm>
           <a:prstGeom prst="rect">
             <a:avLst/>
@@ -4464,8 +6086,8 @@
         </p:nvSpPr>
         <p:spPr>
           <a:xfrm>
-            <a:off x="1005840" y="2514600"/>
-            <a:ext cx="3200400" cy="1920240"/>
+            <a:off x="1005840" y="2423160"/>
+            <a:ext cx="3291840" cy="2011680"/>
           </a:xfrm>
           <a:prstGeom prst="rect">
             <a:avLst/>
@@ -4492,7 +6114,7 @@
                 <a:ea typeface="Calibri" pitchFamily="34" charset="-122"/>
                 <a:cs typeface="Calibri" pitchFamily="34" charset="-120"/>
               </a:rPr>
-              <a:t>U10M</a:t>
+              <a:t>U10M — Eastward wind at 10m</a:t>
             </a:r>
             <a:endParaRPr lang="en-US" sz="1100" dirty="0"/>
           </a:p>
@@ -4504,15 +6126,15 @@
               <a:buNone/>
             </a:pPr>
             <a:r>
-              <a:rPr lang="en-US" sz="1100" dirty="0">
-                <a:solidFill>
-                  <a:srgbClr val="94A3B8"/>
-                </a:solidFill>
-                <a:latin typeface="Calibri" pitchFamily="34" charset="0"/>
-                <a:ea typeface="Calibri" pitchFamily="34" charset="-122"/>
-                <a:cs typeface="Calibri" pitchFamily="34" charset="-120"/>
-              </a:rPr>
-              <a:t>Eastward wind at 10m above surface</a:t>
+              <a:rPr lang="en-US" sz="1100" b="1" dirty="0">
+                <a:solidFill>
+                  <a:srgbClr val="E2E8F0"/>
+                </a:solidFill>
+                <a:latin typeface="Calibri" pitchFamily="34" charset="0"/>
+                <a:ea typeface="Calibri" pitchFamily="34" charset="-122"/>
+                <a:cs typeface="Calibri" pitchFamily="34" charset="-120"/>
+              </a:rPr>
+              <a:t>V10M — Northward wind at 10m</a:t>
             </a:r>
             <a:endParaRPr lang="en-US" sz="1100" dirty="0"/>
           </a:p>
@@ -4533,15 +6155,15 @@
               <a:buNone/>
             </a:pPr>
             <a:r>
-              <a:rPr lang="en-US" sz="1100" b="1" dirty="0">
-                <a:solidFill>
-                  <a:srgbClr val="E2E8F0"/>
-                </a:solidFill>
-                <a:latin typeface="Calibri" pitchFamily="34" charset="0"/>
-                <a:ea typeface="Calibri" pitchFamily="34" charset="-122"/>
-                <a:cs typeface="Calibri" pitchFamily="34" charset="-120"/>
-              </a:rPr>
-              <a:t>V10M</a:t>
+              <a:rPr lang="en-US" sz="1000" dirty="0">
+                <a:solidFill>
+                  <a:srgbClr val="94A3B8"/>
+                </a:solidFill>
+                <a:latin typeface="Calibri" pitchFamily="34" charset="0"/>
+                <a:ea typeface="Calibri" pitchFamily="34" charset="-122"/>
+                <a:cs typeface="Calibri" pitchFamily="34" charset="-120"/>
+              </a:rPr>
+              <a:t>Resolution: 0.25 deg global (~28 km)</a:t>
             </a:r>
             <a:endParaRPr lang="en-US" sz="1100" dirty="0"/>
           </a:p>
@@ -4553,7 +6175,7 @@
               <a:buNone/>
             </a:pPr>
             <a:r>
-              <a:rPr lang="en-US" sz="1100" dirty="0">
+              <a:rPr lang="en-US" sz="1000" dirty="0">
                 <a:solidFill>
                   <a:srgbClr val="94A3B8"/>
                 </a:solidFill>
@@ -4561,7 +6183,7 @@
                 <a:ea typeface="Calibri" pitchFamily="34" charset="-122"/>
                 <a:cs typeface="Calibri" pitchFamily="34" charset="-120"/>
               </a:rPr>
-              <a:t>Northward wind at 10m above surface</a:t>
+              <a:t>Temporal: 3-hourly, rolling ~3 weeks</a:t>
             </a:r>
             <a:endParaRPr lang="en-US" sz="1100" dirty="0"/>
           </a:p>
@@ -4572,6 +6194,17 @@
               </a:lnSpc>
               <a:buNone/>
             </a:pPr>
+            <a:r>
+              <a:rPr lang="en-US" sz="1000" dirty="0">
+                <a:solidFill>
+                  <a:srgbClr val="94A3B8"/>
+                </a:solidFill>
+                <a:latin typeface="Calibri" pitchFamily="34" charset="0"/>
+                <a:ea typeface="Calibri" pitchFamily="34" charset="-122"/>
+                <a:cs typeface="Calibri" pitchFamily="34" charset="-120"/>
+              </a:rPr>
+              <a:t>Access: OPeNDAP (zero authentication)</a:t>
+            </a:r>
             <a:endParaRPr lang="en-US" sz="1100" dirty="0"/>
           </a:p>
           <a:p>
@@ -4581,17 +6214,6 @@
               </a:lnSpc>
               <a:buNone/>
             </a:pPr>
-            <a:r>
-              <a:rPr lang="en-US" sz="1100" dirty="0">
-                <a:solidFill>
-                  <a:srgbClr val="94A3B8"/>
-                </a:solidFill>
-                <a:latin typeface="Calibri" pitchFamily="34" charset="0"/>
-                <a:ea typeface="Calibri" pitchFamily="34" charset="-122"/>
-                <a:cs typeface="Calibri" pitchFamily="34" charset="-120"/>
-              </a:rPr>
-              <a:t>Resolution: 0.25° global (~28 km)</a:t>
-            </a:r>
             <a:endParaRPr lang="en-US" sz="1100" dirty="0"/>
           </a:p>
           <a:p>
@@ -4602,15 +6224,15 @@
               <a:buNone/>
             </a:pPr>
             <a:r>
-              <a:rPr lang="en-US" sz="1100" dirty="0">
-                <a:solidFill>
-                  <a:srgbClr val="94A3B8"/>
-                </a:solidFill>
-                <a:latin typeface="Calibri" pitchFamily="34" charset="0"/>
-                <a:ea typeface="Calibri" pitchFamily="34" charset="-122"/>
-                <a:cs typeface="Calibri" pitchFamily="34" charset="-120"/>
-              </a:rPr>
-              <a:t>Temporal: 3-hourly, rolling ~3 weeks</a:t>
+              <a:rPr lang="en-US" sz="900" dirty="0">
+                <a:solidFill>
+                  <a:srgbClr val="00B4D8"/>
+                </a:solidFill>
+                <a:latin typeface="Calibri" pitchFamily="34" charset="0"/>
+                <a:ea typeface="Calibri" pitchFamily="34" charset="-122"/>
+                <a:cs typeface="Calibri" pitchFamily="34" charset="-120"/>
+              </a:rPr>
+              <a:t>opendap.nccs.nasa.gov/dods/GEOS-5/fp/</a:t>
             </a:r>
             <a:endParaRPr lang="en-US" sz="1100" dirty="0"/>
           </a:p>
@@ -4624,12 +6246,12 @@
         </p:nvSpPr>
         <p:spPr>
           <a:xfrm>
-            <a:off x="4663440" y="2011680"/>
-            <a:ext cx="3749040" cy="2560320"/>
+            <a:off x="4663440" y="1920240"/>
+            <a:ext cx="3749040" cy="2743200"/>
           </a:xfrm>
           <a:prstGeom prst="rect">
             <a:avLst>
-              <a:gd name="adj" fmla="val 2857"/>
+              <a:gd name="adj" fmla="val 2333"/>
             </a:avLst>
           </a:prstGeom>
           <a:solidFill>
@@ -4646,8 +6268,8 @@
         </p:nvSpPr>
         <p:spPr>
           <a:xfrm>
-            <a:off x="4937760" y="2148840"/>
-            <a:ext cx="3200400" cy="274320"/>
+            <a:off x="4937760" y="2011680"/>
+            <a:ext cx="2743200" cy="274320"/>
           </a:xfrm>
           <a:prstGeom prst="rect">
             <a:avLst/>
@@ -4685,7 +6307,7 @@
         </p:nvSpPr>
         <p:spPr>
           <a:xfrm>
-            <a:off x="5029200" y="2560320"/>
+            <a:off x="5029200" y="2487168"/>
             <a:ext cx="109728" cy="109728"/>
           </a:xfrm>
           <a:prstGeom prst="rect">
@@ -4707,7 +6329,7 @@
         </p:nvSpPr>
         <p:spPr>
           <a:xfrm>
-            <a:off x="5257800" y="2523744"/>
+            <a:off x="5257800" y="2450592"/>
             <a:ext cx="1097280" cy="182880"/>
           </a:xfrm>
           <a:prstGeom prst="rect">
@@ -4746,7 +6368,7 @@
         </p:nvSpPr>
         <p:spPr>
           <a:xfrm>
-            <a:off x="6400800" y="2523744"/>
+            <a:off x="6400800" y="2450592"/>
             <a:ext cx="1828800" cy="182880"/>
           </a:xfrm>
           <a:prstGeom prst="rect">
@@ -4771,7 +6393,7 @@
                 <a:ea typeface="Calibri" pitchFamily="34" charset="-122"/>
                 <a:cs typeface="Calibri" pitchFamily="34" charset="-120"/>
               </a:rPr>
-              <a:t>Black Carbon (soot, combustion)</a:t>
+              <a:t>Black Carbon (combustion, soot)</a:t>
             </a:r>
             <a:endParaRPr lang="en-US" sz="900" dirty="0"/>
           </a:p>
@@ -4785,7 +6407,7 @@
         </p:nvSpPr>
         <p:spPr>
           <a:xfrm>
-            <a:off x="5029200" y="2944368"/>
+            <a:off x="5029200" y="2889504"/>
             <a:ext cx="109728" cy="109728"/>
           </a:xfrm>
           <a:prstGeom prst="rect">
@@ -4807,7 +6429,7 @@
         </p:nvSpPr>
         <p:spPr>
           <a:xfrm>
-            <a:off x="5257800" y="2907792"/>
+            <a:off x="5257800" y="2852928"/>
             <a:ext cx="1097280" cy="182880"/>
           </a:xfrm>
           <a:prstGeom prst="rect">
@@ -4846,7 +6468,7 @@
         </p:nvSpPr>
         <p:spPr>
           <a:xfrm>
-            <a:off x="6400800" y="2907792"/>
+            <a:off x="6400800" y="2852928"/>
             <a:ext cx="1828800" cy="182880"/>
           </a:xfrm>
           <a:prstGeom prst="rect">
@@ -4885,7 +6507,7 @@
         </p:nvSpPr>
         <p:spPr>
           <a:xfrm>
-            <a:off x="5029200" y="3328416"/>
+            <a:off x="5029200" y="3291840"/>
             <a:ext cx="109728" cy="109728"/>
           </a:xfrm>
           <a:prstGeom prst="rect">
@@ -4907,7 +6529,7 @@
         </p:nvSpPr>
         <p:spPr>
           <a:xfrm>
-            <a:off x="5257800" y="3291840"/>
+            <a:off x="5257800" y="3255264"/>
             <a:ext cx="1097280" cy="182880"/>
           </a:xfrm>
           <a:prstGeom prst="rect">
@@ -4946,7 +6568,7 @@
         </p:nvSpPr>
         <p:spPr>
           <a:xfrm>
-            <a:off x="6400800" y="3291840"/>
+            <a:off x="6400800" y="3255264"/>
             <a:ext cx="1828800" cy="182880"/>
           </a:xfrm>
           <a:prstGeom prst="rect">
@@ -4985,7 +6607,7 @@
         </p:nvSpPr>
         <p:spPr>
           <a:xfrm>
-            <a:off x="5029200" y="3712464"/>
+            <a:off x="5029200" y="3694176"/>
             <a:ext cx="109728" cy="109728"/>
           </a:xfrm>
           <a:prstGeom prst="rect">
@@ -5007,7 +6629,7 @@
         </p:nvSpPr>
         <p:spPr>
           <a:xfrm>
-            <a:off x="5257800" y="3675888"/>
+            <a:off x="5257800" y="3657600"/>
             <a:ext cx="1097280" cy="182880"/>
           </a:xfrm>
           <a:prstGeom prst="rect">
@@ -5046,7 +6668,7 @@
         </p:nvSpPr>
         <p:spPr>
           <a:xfrm>
-            <a:off x="6400800" y="3675888"/>
+            <a:off x="6400800" y="3657600"/>
             <a:ext cx="1828800" cy="182880"/>
           </a:xfrm>
           <a:prstGeom prst="rect">
@@ -5174,6 +6796,45 @@
               <a:t>Sulfate Aerosols</a:t>
             </a:r>
             <a:endParaRPr lang="en-US" sz="900" dirty="0"/>
+          </a:p>
+        </p:txBody>
+      </p:sp>
+      <p:sp>
+        <p:nvSpPr>
+          <p:cNvPr id="26" name="Text 24"/>
+          <p:cNvSpPr/>
+          <p:nvPr/>
+        </p:nvSpPr>
+        <p:spPr>
+          <a:xfrm>
+            <a:off x="5029200" y="4297680"/>
+            <a:ext cx="2743200" cy="182880"/>
+          </a:xfrm>
+          <a:prstGeom prst="rect">
+            <a:avLst/>
+          </a:prstGeom>
+          <a:noFill/>
+          <a:ln/>
+        </p:spPr>
+        <p:txBody>
+          <a:bodyPr wrap="square" lIns="0" tIns="0" rIns="0" bIns="0" rtlCol="0" anchor="ctr"/>
+          <a:lstStyle/>
+          <a:p>
+            <a:pPr indent="0" marL="0">
+              <a:buNone/>
+            </a:pPr>
+            <a:r>
+              <a:rPr lang="en-US" sz="800" dirty="0">
+                <a:solidFill>
+                  <a:srgbClr val="94A3B8"/>
+                </a:solidFill>
+                <a:latin typeface="Calibri" pitchFamily="34" charset="0"/>
+                <a:ea typeface="Calibri" pitchFamily="34" charset="-122"/>
+                <a:cs typeface="Calibri" pitchFamily="34" charset="-120"/>
+              </a:rPr>
+              <a:t>kg/m2 surface mass concentration</a:t>
+            </a:r>
+            <a:endParaRPr lang="en-US" sz="800" dirty="0"/>
           </a:p>
         </p:txBody>
       </p:sp>
@@ -5218,7 +6879,7 @@
         <p:spPr>
           <a:xfrm>
             <a:off x="0" y="0"/>
-            <a:ext cx="73152" cy="5143500"/>
+            <a:ext cx="64008" cy="5143500"/>
           </a:xfrm>
           <a:prstGeom prst="rect">
             <a:avLst/>
@@ -5238,7 +6899,7 @@
         <p:spPr>
           <a:xfrm>
             <a:off x="731520" y="365760"/>
-            <a:ext cx="7315200" cy="457200"/>
+            <a:ext cx="7315200" cy="365760"/>
           </a:xfrm>
           <a:prstGeom prst="rect">
             <a:avLst/>
@@ -5262,7 +6923,7 @@
                 <a:ea typeface="Calibri" pitchFamily="34" charset="-122"/>
                 <a:cs typeface="Calibri" pitchFamily="34" charset="-120"/>
               </a:rPr>
-              <a:t>PROCESSING</a:t>
+              <a:t>STEPS 2-3: PROCESSING + ENCODING</a:t>
             </a:r>
             <a:endParaRPr lang="en-US" sz="1100" dirty="0"/>
           </a:p>
@@ -5276,7 +6937,7 @@
         </p:nvSpPr>
         <p:spPr>
           <a:xfrm>
-            <a:off x="731520" y="777240"/>
+            <a:off x="731520" y="731520"/>
             <a:ext cx="8229600" cy="548640"/>
           </a:xfrm>
           <a:prstGeom prst="rect">
@@ -5315,8 +6976,8 @@
         </p:nvSpPr>
         <p:spPr>
           <a:xfrm>
-            <a:off x="731520" y="1554480"/>
-            <a:ext cx="7680960" cy="731520"/>
+            <a:off x="731520" y="1463040"/>
+            <a:ext cx="7680960" cy="640080"/>
           </a:xfrm>
           <a:prstGeom prst="rect">
             <a:avLst>
@@ -5337,7 +6998,7 @@
         </p:nvSpPr>
         <p:spPr>
           <a:xfrm>
-            <a:off x="1005840" y="1645920"/>
+            <a:off x="914400" y="1508760"/>
             <a:ext cx="7315200" cy="548640"/>
           </a:xfrm>
           <a:prstGeom prst="rect">
@@ -5376,8 +7037,8 @@
         </p:nvSpPr>
         <p:spPr>
           <a:xfrm>
-            <a:off x="731520" y="2468880"/>
-            <a:ext cx="7680960" cy="548640"/>
+            <a:off x="731520" y="2286000"/>
+            <a:ext cx="7680960" cy="457200"/>
           </a:xfrm>
           <a:prstGeom prst="rect">
             <a:avLst/>
@@ -5404,7 +7065,7 @@
                 <a:ea typeface="Calibri" pitchFamily="34" charset="-122"/>
                 <a:cs typeface="Calibri" pitchFamily="34" charset="-120"/>
               </a:rPr>
-              <a:t>This preserves wind direction but scales magnitude by how much aerosol is present.</a:t>
+              <a:t>Wind direction is preserved, but magnitude scales by aerosol concentration.</a:t>
             </a:r>
             <a:endParaRPr lang="en-US" sz="1200" dirty="0"/>
           </a:p>
@@ -5438,12 +7099,12 @@
         </p:nvSpPr>
         <p:spPr>
           <a:xfrm>
-            <a:off x="731520" y="3200400"/>
-            <a:ext cx="7680960" cy="1463040"/>
+            <a:off x="731520" y="2926080"/>
+            <a:ext cx="3749040" cy="1828800"/>
           </a:xfrm>
           <a:prstGeom prst="rect">
             <a:avLst>
-              <a:gd name="adj" fmla="val 5000"/>
+              <a:gd name="adj" fmla="val 3500"/>
             </a:avLst>
           </a:prstGeom>
           <a:solidFill>
@@ -5460,8 +7121,8 @@
         </p:nvSpPr>
         <p:spPr>
           <a:xfrm>
-            <a:off x="1005840" y="3291840"/>
-            <a:ext cx="3657600" cy="274320"/>
+            <a:off x="1005840" y="3017520"/>
+            <a:ext cx="2743200" cy="228600"/>
           </a:xfrm>
           <a:prstGeom prst="rect">
             <a:avLst/>
@@ -5485,7 +7146,7 @@
                 <a:ea typeface="Calibri" pitchFamily="34" charset="-122"/>
                 <a:cs typeface="Calibri" pitchFamily="34" charset="-120"/>
               </a:rPr>
-              <a:t>PNG ENCODING</a:t>
+              <a:t>PNG CHANNEL ENCODING</a:t>
             </a:r>
             <a:endParaRPr lang="en-US" sz="1000" dirty="0"/>
           </a:p>
@@ -5499,12 +7160,12 @@
         </p:nvSpPr>
         <p:spPr>
           <a:xfrm>
-            <a:off x="1097280" y="3657600"/>
-            <a:ext cx="137160" cy="137160"/>
+            <a:off x="1005840" y="3383280"/>
+            <a:ext cx="128016" cy="128016"/>
           </a:xfrm>
           <a:prstGeom prst="rect">
             <a:avLst>
-              <a:gd name="adj" fmla="val 13333"/>
+              <a:gd name="adj" fmla="val 14286"/>
             </a:avLst>
           </a:prstGeom>
           <a:solidFill>
@@ -5521,8 +7182,8 @@
         </p:nvSpPr>
         <p:spPr>
           <a:xfrm>
-            <a:off x="1371600" y="3639312"/>
-            <a:ext cx="1371600" cy="182880"/>
+            <a:off x="1280160" y="3364992"/>
+            <a:ext cx="1188720" cy="182880"/>
           </a:xfrm>
           <a:prstGeom prst="rect">
             <a:avLst/>
@@ -5560,47 +7221,8 @@
         </p:nvSpPr>
         <p:spPr>
           <a:xfrm>
-            <a:off x="2926080" y="3639312"/>
+            <a:off x="2560320" y="3364992"/>
             <a:ext cx="1828800" cy="182880"/>
-          </a:xfrm>
-          <a:prstGeom prst="rect">
-            <a:avLst/>
-          </a:prstGeom>
-          <a:noFill/>
-          <a:ln/>
-        </p:spPr>
-        <p:txBody>
-          <a:bodyPr wrap="square" lIns="0" tIns="0" rIns="0" bIns="0" rtlCol="0" anchor="ctr"/>
-          <a:lstStyle/>
-          <a:p>
-            <a:pPr indent="0" marL="0">
-              <a:buNone/>
-            </a:pPr>
-            <a:r>
-              <a:rPr lang="en-US" sz="1000" dirty="0">
-                <a:solidFill>
-                  <a:srgbClr val="94A3B8"/>
-                </a:solidFill>
-                <a:latin typeface="Calibri" pitchFamily="34" charset="0"/>
-                <a:ea typeface="Calibri" pitchFamily="34" charset="-122"/>
-                <a:cs typeface="Calibri" pitchFamily="34" charset="-120"/>
-              </a:rPr>
-              <a:t>U component</a:t>
-            </a:r>
-            <a:endParaRPr lang="en-US" sz="1000" dirty="0"/>
-          </a:p>
-        </p:txBody>
-      </p:sp>
-      <p:sp>
-        <p:nvSpPr>
-          <p:cNvPr id="13" name="Text 11"/>
-          <p:cNvSpPr/>
-          <p:nvPr/>
-        </p:nvSpPr>
-        <p:spPr>
-          <a:xfrm>
-            <a:off x="5029200" y="3639312"/>
-            <a:ext cx="3200400" cy="182880"/>
           </a:xfrm>
           <a:prstGeom prst="rect">
             <a:avLst/>
@@ -5624,7 +7246,7 @@
                 <a:ea typeface="Consolas" pitchFamily="34" charset="-122"/>
                 <a:cs typeface="Consolas" pitchFamily="34" charset="-120"/>
               </a:rPr>
-              <a:t>[-max, +max] mapped to [0, 255]</a:t>
+              <a:t>U component [-max, +max] -&gt; [0, 255]</a:t>
             </a:r>
             <a:endParaRPr lang="en-US" sz="900" dirty="0"/>
           </a:p>
@@ -5632,18 +7254,18 @@
       </p:sp>
       <p:sp>
         <p:nvSpPr>
-          <p:cNvPr id="14" name="Shape 12"/>
-          <p:cNvSpPr/>
-          <p:nvPr/>
-        </p:nvSpPr>
-        <p:spPr>
-          <a:xfrm>
-            <a:off x="1097280" y="3977640"/>
-            <a:ext cx="137160" cy="137160"/>
+          <p:cNvPr id="13" name="Shape 11"/>
+          <p:cNvSpPr/>
+          <p:nvPr/>
+        </p:nvSpPr>
+        <p:spPr>
+          <a:xfrm>
+            <a:off x="1005840" y="3730752"/>
+            <a:ext cx="128016" cy="128016"/>
           </a:xfrm>
           <a:prstGeom prst="rect">
             <a:avLst>
-              <a:gd name="adj" fmla="val 13333"/>
+              <a:gd name="adj" fmla="val 14286"/>
             </a:avLst>
           </a:prstGeom>
           <a:solidFill>
@@ -5654,92 +7276,53 @@
       </p:sp>
       <p:sp>
         <p:nvSpPr>
+          <p:cNvPr id="14" name="Text 12"/>
+          <p:cNvSpPr/>
+          <p:nvPr/>
+        </p:nvSpPr>
+        <p:spPr>
+          <a:xfrm>
+            <a:off x="1280160" y="3712464"/>
+            <a:ext cx="1188720" cy="182880"/>
+          </a:xfrm>
+          <a:prstGeom prst="rect">
+            <a:avLst/>
+          </a:prstGeom>
+          <a:noFill/>
+          <a:ln/>
+        </p:spPr>
+        <p:txBody>
+          <a:bodyPr wrap="square" lIns="0" tIns="0" rIns="0" bIns="0" rtlCol="0" anchor="ctr"/>
+          <a:lstStyle/>
+          <a:p>
+            <a:pPr indent="0" marL="0">
+              <a:buNone/>
+            </a:pPr>
+            <a:r>
+              <a:rPr lang="en-US" sz="1000" b="1" dirty="0">
+                <a:solidFill>
+                  <a:srgbClr val="E2E8F0"/>
+                </a:solidFill>
+                <a:latin typeface="Calibri" pitchFamily="34" charset="0"/>
+                <a:ea typeface="Calibri" pitchFamily="34" charset="-122"/>
+                <a:cs typeface="Calibri" pitchFamily="34" charset="-120"/>
+              </a:rPr>
+              <a:t>Green Channel</a:t>
+            </a:r>
+            <a:endParaRPr lang="en-US" sz="1000" dirty="0"/>
+          </a:p>
+        </p:txBody>
+      </p:sp>
+      <p:sp>
+        <p:nvSpPr>
           <p:cNvPr id="15" name="Text 13"/>
           <p:cNvSpPr/>
           <p:nvPr/>
         </p:nvSpPr>
         <p:spPr>
           <a:xfrm>
-            <a:off x="1371600" y="3959352"/>
-            <a:ext cx="1371600" cy="182880"/>
-          </a:xfrm>
-          <a:prstGeom prst="rect">
-            <a:avLst/>
-          </a:prstGeom>
-          <a:noFill/>
-          <a:ln/>
-        </p:spPr>
-        <p:txBody>
-          <a:bodyPr wrap="square" lIns="0" tIns="0" rIns="0" bIns="0" rtlCol="0" anchor="ctr"/>
-          <a:lstStyle/>
-          <a:p>
-            <a:pPr indent="0" marL="0">
-              <a:buNone/>
-            </a:pPr>
-            <a:r>
-              <a:rPr lang="en-US" sz="1000" b="1" dirty="0">
-                <a:solidFill>
-                  <a:srgbClr val="E2E8F0"/>
-                </a:solidFill>
-                <a:latin typeface="Calibri" pitchFamily="34" charset="0"/>
-                <a:ea typeface="Calibri" pitchFamily="34" charset="-122"/>
-                <a:cs typeface="Calibri" pitchFamily="34" charset="-120"/>
-              </a:rPr>
-              <a:t>Green Channel</a:t>
-            </a:r>
-            <a:endParaRPr lang="en-US" sz="1000" dirty="0"/>
-          </a:p>
-        </p:txBody>
-      </p:sp>
-      <p:sp>
-        <p:nvSpPr>
-          <p:cNvPr id="16" name="Text 14"/>
-          <p:cNvSpPr/>
-          <p:nvPr/>
-        </p:nvSpPr>
-        <p:spPr>
-          <a:xfrm>
-            <a:off x="2926080" y="3959352"/>
+            <a:off x="2560320" y="3712464"/>
             <a:ext cx="1828800" cy="182880"/>
-          </a:xfrm>
-          <a:prstGeom prst="rect">
-            <a:avLst/>
-          </a:prstGeom>
-          <a:noFill/>
-          <a:ln/>
-        </p:spPr>
-        <p:txBody>
-          <a:bodyPr wrap="square" lIns="0" tIns="0" rIns="0" bIns="0" rtlCol="0" anchor="ctr"/>
-          <a:lstStyle/>
-          <a:p>
-            <a:pPr indent="0" marL="0">
-              <a:buNone/>
-            </a:pPr>
-            <a:r>
-              <a:rPr lang="en-US" sz="1000" dirty="0">
-                <a:solidFill>
-                  <a:srgbClr val="94A3B8"/>
-                </a:solidFill>
-                <a:latin typeface="Calibri" pitchFamily="34" charset="0"/>
-                <a:ea typeface="Calibri" pitchFamily="34" charset="-122"/>
-                <a:cs typeface="Calibri" pitchFamily="34" charset="-120"/>
-              </a:rPr>
-              <a:t>V component</a:t>
-            </a:r>
-            <a:endParaRPr lang="en-US" sz="1000" dirty="0"/>
-          </a:p>
-        </p:txBody>
-      </p:sp>
-      <p:sp>
-        <p:nvSpPr>
-          <p:cNvPr id="17" name="Text 15"/>
-          <p:cNvSpPr/>
-          <p:nvPr/>
-        </p:nvSpPr>
-        <p:spPr>
-          <a:xfrm>
-            <a:off x="5029200" y="3959352"/>
-            <a:ext cx="3200400" cy="182880"/>
           </a:xfrm>
           <a:prstGeom prst="rect">
             <a:avLst/>
@@ -5763,7 +7346,7 @@
                 <a:ea typeface="Consolas" pitchFamily="34" charset="-122"/>
                 <a:cs typeface="Consolas" pitchFamily="34" charset="-120"/>
               </a:rPr>
-              <a:t>[-max, +max] mapped to [0, 255]</a:t>
+              <a:t>V component [-max, +max] -&gt; [0, 255]</a:t>
             </a:r>
             <a:endParaRPr lang="en-US" sz="900" dirty="0"/>
           </a:p>
@@ -5771,18 +7354,18 @@
       </p:sp>
       <p:sp>
         <p:nvSpPr>
-          <p:cNvPr id="18" name="Shape 16"/>
-          <p:cNvSpPr/>
-          <p:nvPr/>
-        </p:nvSpPr>
-        <p:spPr>
-          <a:xfrm>
-            <a:off x="1097280" y="4297680"/>
-            <a:ext cx="137160" cy="137160"/>
+          <p:cNvPr id="16" name="Shape 14"/>
+          <p:cNvSpPr/>
+          <p:nvPr/>
+        </p:nvSpPr>
+        <p:spPr>
+          <a:xfrm>
+            <a:off x="1005840" y="4078224"/>
+            <a:ext cx="128016" cy="128016"/>
           </a:xfrm>
           <a:prstGeom prst="rect">
             <a:avLst>
-              <a:gd name="adj" fmla="val 13333"/>
+              <a:gd name="adj" fmla="val 14286"/>
             </a:avLst>
           </a:prstGeom>
           <a:solidFill>
@@ -5793,14 +7376,14 @@
       </p:sp>
       <p:sp>
         <p:nvSpPr>
-          <p:cNvPr id="19" name="Text 17"/>
-          <p:cNvSpPr/>
-          <p:nvPr/>
-        </p:nvSpPr>
-        <p:spPr>
-          <a:xfrm>
-            <a:off x="1371600" y="4279392"/>
-            <a:ext cx="1371600" cy="182880"/>
+          <p:cNvPr id="17" name="Text 15"/>
+          <p:cNvSpPr/>
+          <p:nvPr/>
+        </p:nvSpPr>
+        <p:spPr>
+          <a:xfrm>
+            <a:off x="1280160" y="4059936"/>
+            <a:ext cx="1188720" cy="182880"/>
           </a:xfrm>
           <a:prstGeom prst="rect">
             <a:avLst/>
@@ -5832,53 +7415,14 @@
       </p:sp>
       <p:sp>
         <p:nvSpPr>
-          <p:cNvPr id="20" name="Text 18"/>
-          <p:cNvSpPr/>
-          <p:nvPr/>
-        </p:nvSpPr>
-        <p:spPr>
-          <a:xfrm>
-            <a:off x="2926080" y="4279392"/>
+          <p:cNvPr id="18" name="Text 16"/>
+          <p:cNvSpPr/>
+          <p:nvPr/>
+        </p:nvSpPr>
+        <p:spPr>
+          <a:xfrm>
+            <a:off x="2560320" y="4059936"/>
             <a:ext cx="1828800" cy="182880"/>
-          </a:xfrm>
-          <a:prstGeom prst="rect">
-            <a:avLst/>
-          </a:prstGeom>
-          <a:noFill/>
-          <a:ln/>
-        </p:spPr>
-        <p:txBody>
-          <a:bodyPr wrap="square" lIns="0" tIns="0" rIns="0" bIns="0" rtlCol="0" anchor="ctr"/>
-          <a:lstStyle/>
-          <a:p>
-            <a:pPr indent="0" marL="0">
-              <a:buNone/>
-            </a:pPr>
-            <a:r>
-              <a:rPr lang="en-US" sz="1000" dirty="0">
-                <a:solidFill>
-                  <a:srgbClr val="94A3B8"/>
-                </a:solidFill>
-                <a:latin typeface="Calibri" pitchFamily="34" charset="0"/>
-                <a:ea typeface="Calibri" pitchFamily="34" charset="-122"/>
-                <a:cs typeface="Calibri" pitchFamily="34" charset="-120"/>
-              </a:rPr>
-              <a:t>Magnitude</a:t>
-            </a:r>
-            <a:endParaRPr lang="en-US" sz="1000" dirty="0"/>
-          </a:p>
-        </p:txBody>
-      </p:sp>
-      <p:sp>
-        <p:nvSpPr>
-          <p:cNvPr id="21" name="Text 19"/>
-          <p:cNvSpPr/>
-          <p:nvPr/>
-        </p:nvSpPr>
-        <p:spPr>
-          <a:xfrm>
-            <a:off x="5029200" y="4279392"/>
-            <a:ext cx="3200400" cy="182880"/>
           </a:xfrm>
           <a:prstGeom prst="rect">
             <a:avLst/>
@@ -5902,9 +7446,577 @@
                 <a:ea typeface="Consolas" pitchFamily="34" charset="-122"/>
                 <a:cs typeface="Consolas" pitchFamily="34" charset="-120"/>
               </a:rPr>
-              <a:t>[0, max] mapped to [0, 255]</a:t>
+              <a:t>Magnitude [0, max] -&gt; [0, 255]</a:t>
             </a:r>
             <a:endParaRPr lang="en-US" sz="900" dirty="0"/>
+          </a:p>
+        </p:txBody>
+      </p:sp>
+      <p:sp>
+        <p:nvSpPr>
+          <p:cNvPr id="19" name="Shape 17"/>
+          <p:cNvSpPr/>
+          <p:nvPr/>
+        </p:nvSpPr>
+        <p:spPr>
+          <a:xfrm>
+            <a:off x="4663440" y="2926080"/>
+            <a:ext cx="3749040" cy="1828800"/>
+          </a:xfrm>
+          <a:prstGeom prst="rect">
+            <a:avLst>
+              <a:gd name="adj" fmla="val 3500"/>
+            </a:avLst>
+          </a:prstGeom>
+          <a:solidFill>
+            <a:srgbClr val="1A2236"/>
+          </a:solidFill>
+          <a:ln/>
+        </p:spPr>
+      </p:sp>
+      <p:sp>
+        <p:nvSpPr>
+          <p:cNvPr id="20" name="Text 18"/>
+          <p:cNvSpPr/>
+          <p:nvPr/>
+        </p:nvSpPr>
+        <p:spPr>
+          <a:xfrm>
+            <a:off x="4937760" y="3017520"/>
+            <a:ext cx="2743200" cy="228600"/>
+          </a:xfrm>
+          <a:prstGeom prst="rect">
+            <a:avLst/>
+          </a:prstGeom>
+          <a:noFill/>
+          <a:ln/>
+        </p:spPr>
+        <p:txBody>
+          <a:bodyPr wrap="square" lIns="0" tIns="0" rIns="0" bIns="0" rtlCol="0" anchor="ctr"/>
+          <a:lstStyle/>
+          <a:p>
+            <a:pPr indent="0" marL="0">
+              <a:buNone/>
+            </a:pPr>
+            <a:r>
+              <a:rPr lang="en-US" sz="1000" spc="300" kern="0" dirty="0">
+                <a:solidFill>
+                  <a:srgbClr val="76B900"/>
+                </a:solidFill>
+                <a:latin typeface="Calibri" pitchFamily="34" charset="0"/>
+                <a:ea typeface="Calibri" pitchFamily="34" charset="-122"/>
+                <a:cs typeface="Calibri" pitchFamily="34" charset="-120"/>
+              </a:rPr>
+              <a:t>OUTPUT FILES</a:t>
+            </a:r>
+            <a:endParaRPr lang="en-US" sz="1000" dirty="0"/>
+          </a:p>
+        </p:txBody>
+      </p:sp>
+      <p:sp>
+        <p:nvSpPr>
+          <p:cNvPr id="21" name="Text 19"/>
+          <p:cNvSpPr/>
+          <p:nvPr/>
+        </p:nvSpPr>
+        <p:spPr>
+          <a:xfrm>
+            <a:off x="4937760" y="3383280"/>
+            <a:ext cx="1645920" cy="164592"/>
+          </a:xfrm>
+          <a:prstGeom prst="rect">
+            <a:avLst/>
+          </a:prstGeom>
+          <a:noFill/>
+          <a:ln/>
+        </p:spPr>
+        <p:txBody>
+          <a:bodyPr wrap="square" lIns="0" tIns="0" rIns="0" bIns="0" rtlCol="0" anchor="ctr"/>
+          <a:lstStyle/>
+          <a:p>
+            <a:pPr indent="0" marL="0">
+              <a:buNone/>
+            </a:pPr>
+            <a:r>
+              <a:rPr lang="en-US" sz="900" dirty="0">
+                <a:solidFill>
+                  <a:srgbClr val="E2E8F0"/>
+                </a:solidFill>
+                <a:latin typeface="Consolas" pitchFamily="34" charset="0"/>
+                <a:ea typeface="Consolas" pitchFamily="34" charset="-122"/>
+                <a:cs typeface="Consolas" pitchFamily="34" charset="-120"/>
+              </a:rPr>
+              <a:t>composite.png</a:t>
+            </a:r>
+            <a:endParaRPr lang="en-US" sz="900" dirty="0"/>
+          </a:p>
+        </p:txBody>
+      </p:sp>
+      <p:sp>
+        <p:nvSpPr>
+          <p:cNvPr id="22" name="Text 20"/>
+          <p:cNvSpPr/>
+          <p:nvPr/>
+        </p:nvSpPr>
+        <p:spPr>
+          <a:xfrm>
+            <a:off x="6675120" y="3383280"/>
+            <a:ext cx="640080" cy="164592"/>
+          </a:xfrm>
+          <a:prstGeom prst="rect">
+            <a:avLst/>
+          </a:prstGeom>
+          <a:noFill/>
+          <a:ln/>
+        </p:spPr>
+        <p:txBody>
+          <a:bodyPr wrap="square" lIns="0" tIns="0" rIns="0" bIns="0" rtlCol="0" anchor="ctr"/>
+          <a:lstStyle/>
+          <a:p>
+            <a:pPr indent="0" marL="0">
+              <a:buNone/>
+            </a:pPr>
+            <a:r>
+              <a:rPr lang="en-US" sz="900" dirty="0">
+                <a:solidFill>
+                  <a:srgbClr val="94A3B8"/>
+                </a:solidFill>
+                <a:latin typeface="Calibri" pitchFamily="34" charset="0"/>
+                <a:ea typeface="Calibri" pitchFamily="34" charset="-122"/>
+                <a:cs typeface="Calibri" pitchFamily="34" charset="-120"/>
+              </a:rPr>
+              <a:t>112 KB</a:t>
+            </a:r>
+            <a:endParaRPr lang="en-US" sz="900" dirty="0"/>
+          </a:p>
+        </p:txBody>
+      </p:sp>
+      <p:sp>
+        <p:nvSpPr>
+          <p:cNvPr id="23" name="Text 21"/>
+          <p:cNvSpPr/>
+          <p:nvPr/>
+        </p:nvSpPr>
+        <p:spPr>
+          <a:xfrm>
+            <a:off x="7315200" y="3383280"/>
+            <a:ext cx="1005840" cy="164592"/>
+          </a:xfrm>
+          <a:prstGeom prst="rect">
+            <a:avLst/>
+          </a:prstGeom>
+          <a:noFill/>
+          <a:ln/>
+        </p:spPr>
+        <p:txBody>
+          <a:bodyPr wrap="square" lIns="0" tIns="0" rIns="0" bIns="0" rtlCol="0" anchor="ctr"/>
+          <a:lstStyle/>
+          <a:p>
+            <a:pPr indent="0" marL="0">
+              <a:buNone/>
+            </a:pPr>
+            <a:r>
+              <a:rPr lang="en-US" sz="800" dirty="0">
+                <a:solidFill>
+                  <a:srgbClr val="94A3B8"/>
+                </a:solidFill>
+                <a:latin typeface="Calibri" pitchFamily="34" charset="0"/>
+                <a:ea typeface="Calibri" pitchFamily="34" charset="-122"/>
+                <a:cs typeface="Calibri" pitchFamily="34" charset="-120"/>
+              </a:rPr>
+              <a:t>All 5 species combined</a:t>
+            </a:r>
+            <a:endParaRPr lang="en-US" sz="800" dirty="0"/>
+          </a:p>
+        </p:txBody>
+      </p:sp>
+      <p:sp>
+        <p:nvSpPr>
+          <p:cNvPr id="24" name="Text 22"/>
+          <p:cNvSpPr/>
+          <p:nvPr/>
+        </p:nvSpPr>
+        <p:spPr>
+          <a:xfrm>
+            <a:off x="4937760" y="3703320"/>
+            <a:ext cx="1645920" cy="164592"/>
+          </a:xfrm>
+          <a:prstGeom prst="rect">
+            <a:avLst/>
+          </a:prstGeom>
+          <a:noFill/>
+          <a:ln/>
+        </p:spPr>
+        <p:txBody>
+          <a:bodyPr wrap="square" lIns="0" tIns="0" rIns="0" bIns="0" rtlCol="0" anchor="ctr"/>
+          <a:lstStyle/>
+          <a:p>
+            <a:pPr indent="0" marL="0">
+              <a:buNone/>
+            </a:pPr>
+            <a:r>
+              <a:rPr lang="en-US" sz="900" dirty="0">
+                <a:solidFill>
+                  <a:srgbClr val="E2E8F0"/>
+                </a:solidFill>
+                <a:latin typeface="Consolas" pitchFamily="34" charset="0"/>
+                <a:ea typeface="Consolas" pitchFamily="34" charset="-122"/>
+                <a:cs typeface="Consolas" pitchFamily="34" charset="-120"/>
+              </a:rPr>
+              <a:t>black_carbon.png</a:t>
+            </a:r>
+            <a:endParaRPr lang="en-US" sz="900" dirty="0"/>
+          </a:p>
+        </p:txBody>
+      </p:sp>
+      <p:sp>
+        <p:nvSpPr>
+          <p:cNvPr id="25" name="Text 23"/>
+          <p:cNvSpPr/>
+          <p:nvPr/>
+        </p:nvSpPr>
+        <p:spPr>
+          <a:xfrm>
+            <a:off x="6675120" y="3703320"/>
+            <a:ext cx="640080" cy="164592"/>
+          </a:xfrm>
+          <a:prstGeom prst="rect">
+            <a:avLst/>
+          </a:prstGeom>
+          <a:noFill/>
+          <a:ln/>
+        </p:spPr>
+        <p:txBody>
+          <a:bodyPr wrap="square" lIns="0" tIns="0" rIns="0" bIns="0" rtlCol="0" anchor="ctr"/>
+          <a:lstStyle/>
+          <a:p>
+            <a:pPr indent="0" marL="0">
+              <a:buNone/>
+            </a:pPr>
+            <a:r>
+              <a:rPr lang="en-US" sz="900" dirty="0">
+                <a:solidFill>
+                  <a:srgbClr val="94A3B8"/>
+                </a:solidFill>
+                <a:latin typeface="Calibri" pitchFamily="34" charset="0"/>
+                <a:ea typeface="Calibri" pitchFamily="34" charset="-122"/>
+                <a:cs typeface="Calibri" pitchFamily="34" charset="-120"/>
+              </a:rPr>
+              <a:t>107 KB</a:t>
+            </a:r>
+            <a:endParaRPr lang="en-US" sz="900" dirty="0"/>
+          </a:p>
+        </p:txBody>
+      </p:sp>
+      <p:sp>
+        <p:nvSpPr>
+          <p:cNvPr id="26" name="Text 24"/>
+          <p:cNvSpPr/>
+          <p:nvPr/>
+        </p:nvSpPr>
+        <p:spPr>
+          <a:xfrm>
+            <a:off x="7315200" y="3703320"/>
+            <a:ext cx="1005840" cy="164592"/>
+          </a:xfrm>
+          <a:prstGeom prst="rect">
+            <a:avLst/>
+          </a:prstGeom>
+          <a:noFill/>
+          <a:ln/>
+        </p:spPr>
+        <p:txBody>
+          <a:bodyPr wrap="square" lIns="0" tIns="0" rIns="0" bIns="0" rtlCol="0" anchor="ctr"/>
+          <a:lstStyle/>
+          <a:p>
+            <a:pPr indent="0" marL="0">
+              <a:buNone/>
+            </a:pPr>
+            <a:r>
+              <a:rPr lang="en-US" sz="800" dirty="0">
+                <a:solidFill>
+                  <a:srgbClr val="94A3B8"/>
+                </a:solidFill>
+                <a:latin typeface="Calibri" pitchFamily="34" charset="0"/>
+                <a:ea typeface="Calibri" pitchFamily="34" charset="-122"/>
+                <a:cs typeface="Calibri" pitchFamily="34" charset="-120"/>
+              </a:rPr>
+              <a:t>Combustion + wildfires</a:t>
+            </a:r>
+            <a:endParaRPr lang="en-US" sz="800" dirty="0"/>
+          </a:p>
+        </p:txBody>
+      </p:sp>
+      <p:sp>
+        <p:nvSpPr>
+          <p:cNvPr id="27" name="Text 25"/>
+          <p:cNvSpPr/>
+          <p:nvPr/>
+        </p:nvSpPr>
+        <p:spPr>
+          <a:xfrm>
+            <a:off x="4937760" y="4023360"/>
+            <a:ext cx="1645920" cy="164592"/>
+          </a:xfrm>
+          <a:prstGeom prst="rect">
+            <a:avLst/>
+          </a:prstGeom>
+          <a:noFill/>
+          <a:ln/>
+        </p:spPr>
+        <p:txBody>
+          <a:bodyPr wrap="square" lIns="0" tIns="0" rIns="0" bIns="0" rtlCol="0" anchor="ctr"/>
+          <a:lstStyle/>
+          <a:p>
+            <a:pPr indent="0" marL="0">
+              <a:buNone/>
+            </a:pPr>
+            <a:r>
+              <a:rPr lang="en-US" sz="900" dirty="0">
+                <a:solidFill>
+                  <a:srgbClr val="E2E8F0"/>
+                </a:solidFill>
+                <a:latin typeface="Consolas" pitchFamily="34" charset="0"/>
+                <a:ea typeface="Consolas" pitchFamily="34" charset="-122"/>
+                <a:cs typeface="Consolas" pitchFamily="34" charset="-120"/>
+              </a:rPr>
+              <a:t>dust.png</a:t>
+            </a:r>
+            <a:endParaRPr lang="en-US" sz="900" dirty="0"/>
+          </a:p>
+        </p:txBody>
+      </p:sp>
+      <p:sp>
+        <p:nvSpPr>
+          <p:cNvPr id="28" name="Text 26"/>
+          <p:cNvSpPr/>
+          <p:nvPr/>
+        </p:nvSpPr>
+        <p:spPr>
+          <a:xfrm>
+            <a:off x="6675120" y="4023360"/>
+            <a:ext cx="640080" cy="164592"/>
+          </a:xfrm>
+          <a:prstGeom prst="rect">
+            <a:avLst/>
+          </a:prstGeom>
+          <a:noFill/>
+          <a:ln/>
+        </p:spPr>
+        <p:txBody>
+          <a:bodyPr wrap="square" lIns="0" tIns="0" rIns="0" bIns="0" rtlCol="0" anchor="ctr"/>
+          <a:lstStyle/>
+          <a:p>
+            <a:pPr indent="0" marL="0">
+              <a:buNone/>
+            </a:pPr>
+            <a:r>
+              <a:rPr lang="en-US" sz="900" dirty="0">
+                <a:solidFill>
+                  <a:srgbClr val="94A3B8"/>
+                </a:solidFill>
+                <a:latin typeface="Calibri" pitchFamily="34" charset="0"/>
+                <a:ea typeface="Calibri" pitchFamily="34" charset="-122"/>
+                <a:cs typeface="Calibri" pitchFamily="34" charset="-120"/>
+              </a:rPr>
+              <a:t>100 KB</a:t>
+            </a:r>
+            <a:endParaRPr lang="en-US" sz="900" dirty="0"/>
+          </a:p>
+        </p:txBody>
+      </p:sp>
+      <p:sp>
+        <p:nvSpPr>
+          <p:cNvPr id="29" name="Text 27"/>
+          <p:cNvSpPr/>
+          <p:nvPr/>
+        </p:nvSpPr>
+        <p:spPr>
+          <a:xfrm>
+            <a:off x="7315200" y="4023360"/>
+            <a:ext cx="1005840" cy="164592"/>
+          </a:xfrm>
+          <a:prstGeom prst="rect">
+            <a:avLst/>
+          </a:prstGeom>
+          <a:noFill/>
+          <a:ln/>
+        </p:spPr>
+        <p:txBody>
+          <a:bodyPr wrap="square" lIns="0" tIns="0" rIns="0" bIns="0" rtlCol="0" anchor="ctr"/>
+          <a:lstStyle/>
+          <a:p>
+            <a:pPr indent="0" marL="0">
+              <a:buNone/>
+            </a:pPr>
+            <a:r>
+              <a:rPr lang="en-US" sz="800" dirty="0">
+                <a:solidFill>
+                  <a:srgbClr val="94A3B8"/>
+                </a:solidFill>
+                <a:latin typeface="Calibri" pitchFamily="34" charset="0"/>
+                <a:ea typeface="Calibri" pitchFamily="34" charset="-122"/>
+                <a:cs typeface="Calibri" pitchFamily="34" charset="-120"/>
+              </a:rPr>
+              <a:t>Mineral dust transport</a:t>
+            </a:r>
+            <a:endParaRPr lang="en-US" sz="800" dirty="0"/>
+          </a:p>
+        </p:txBody>
+      </p:sp>
+      <p:sp>
+        <p:nvSpPr>
+          <p:cNvPr id="30" name="Text 28"/>
+          <p:cNvSpPr/>
+          <p:nvPr/>
+        </p:nvSpPr>
+        <p:spPr>
+          <a:xfrm>
+            <a:off x="4937760" y="4343400"/>
+            <a:ext cx="1645920" cy="164592"/>
+          </a:xfrm>
+          <a:prstGeom prst="rect">
+            <a:avLst/>
+          </a:prstGeom>
+          <a:noFill/>
+          <a:ln/>
+        </p:spPr>
+        <p:txBody>
+          <a:bodyPr wrap="square" lIns="0" tIns="0" rIns="0" bIns="0" rtlCol="0" anchor="ctr"/>
+          <a:lstStyle/>
+          <a:p>
+            <a:pPr indent="0" marL="0">
+              <a:buNone/>
+            </a:pPr>
+            <a:r>
+              <a:rPr lang="en-US" sz="900" dirty="0">
+                <a:solidFill>
+                  <a:srgbClr val="E2E8F0"/>
+                </a:solidFill>
+                <a:latin typeface="Consolas" pitchFamily="34" charset="0"/>
+                <a:ea typeface="Consolas" pitchFamily="34" charset="-122"/>
+                <a:cs typeface="Consolas" pitchFamily="34" charset="-120"/>
+              </a:rPr>
+              <a:t>sea_salt.png</a:t>
+            </a:r>
+            <a:endParaRPr lang="en-US" sz="900" dirty="0"/>
+          </a:p>
+        </p:txBody>
+      </p:sp>
+      <p:sp>
+        <p:nvSpPr>
+          <p:cNvPr id="31" name="Text 29"/>
+          <p:cNvSpPr/>
+          <p:nvPr/>
+        </p:nvSpPr>
+        <p:spPr>
+          <a:xfrm>
+            <a:off x="6675120" y="4343400"/>
+            <a:ext cx="640080" cy="164592"/>
+          </a:xfrm>
+          <a:prstGeom prst="rect">
+            <a:avLst/>
+          </a:prstGeom>
+          <a:noFill/>
+          <a:ln/>
+        </p:spPr>
+        <p:txBody>
+          <a:bodyPr wrap="square" lIns="0" tIns="0" rIns="0" bIns="0" rtlCol="0" anchor="ctr"/>
+          <a:lstStyle/>
+          <a:p>
+            <a:pPr indent="0" marL="0">
+              <a:buNone/>
+            </a:pPr>
+            <a:r>
+              <a:rPr lang="en-US" sz="900" dirty="0">
+                <a:solidFill>
+                  <a:srgbClr val="94A3B8"/>
+                </a:solidFill>
+                <a:latin typeface="Calibri" pitchFamily="34" charset="0"/>
+                <a:ea typeface="Calibri" pitchFamily="34" charset="-122"/>
+                <a:cs typeface="Calibri" pitchFamily="34" charset="-120"/>
+              </a:rPr>
+              <a:t>103 KB</a:t>
+            </a:r>
+            <a:endParaRPr lang="en-US" sz="900" dirty="0"/>
+          </a:p>
+        </p:txBody>
+      </p:sp>
+      <p:sp>
+        <p:nvSpPr>
+          <p:cNvPr id="32" name="Text 30"/>
+          <p:cNvSpPr/>
+          <p:nvPr/>
+        </p:nvSpPr>
+        <p:spPr>
+          <a:xfrm>
+            <a:off x="7315200" y="4343400"/>
+            <a:ext cx="1005840" cy="164592"/>
+          </a:xfrm>
+          <a:prstGeom prst="rect">
+            <a:avLst/>
+          </a:prstGeom>
+          <a:noFill/>
+          <a:ln/>
+        </p:spPr>
+        <p:txBody>
+          <a:bodyPr wrap="square" lIns="0" tIns="0" rIns="0" bIns="0" rtlCol="0" anchor="ctr"/>
+          <a:lstStyle/>
+          <a:p>
+            <a:pPr indent="0" marL="0">
+              <a:buNone/>
+            </a:pPr>
+            <a:r>
+              <a:rPr lang="en-US" sz="800" dirty="0">
+                <a:solidFill>
+                  <a:srgbClr val="94A3B8"/>
+                </a:solidFill>
+                <a:latin typeface="Calibri" pitchFamily="34" charset="0"/>
+                <a:ea typeface="Calibri" pitchFamily="34" charset="-122"/>
+                <a:cs typeface="Calibri" pitchFamily="34" charset="-120"/>
+              </a:rPr>
+              <a:t>Maritime aerosols</a:t>
+            </a:r>
+            <a:endParaRPr lang="en-US" sz="800" dirty="0"/>
+          </a:p>
+        </p:txBody>
+      </p:sp>
+      <p:sp>
+        <p:nvSpPr>
+          <p:cNvPr id="33" name="Text 31"/>
+          <p:cNvSpPr/>
+          <p:nvPr/>
+        </p:nvSpPr>
+        <p:spPr>
+          <a:xfrm>
+            <a:off x="4937760" y="4572000"/>
+            <a:ext cx="3200400" cy="137160"/>
+          </a:xfrm>
+          <a:prstGeom prst="rect">
+            <a:avLst/>
+          </a:prstGeom>
+          <a:noFill/>
+          <a:ln/>
+        </p:spPr>
+        <p:txBody>
+          <a:bodyPr wrap="square" lIns="0" tIns="0" rIns="0" bIns="0" rtlCol="0" anchor="ctr"/>
+          <a:lstStyle/>
+          <a:p>
+            <a:pPr indent="0" marL="0">
+              <a:buNone/>
+            </a:pPr>
+            <a:r>
+              <a:rPr lang="en-US" sz="800" dirty="0">
+                <a:solidFill>
+                  <a:srgbClr val="94A3B8"/>
+                </a:solidFill>
+                <a:latin typeface="Calibri" pitchFamily="34" charset="0"/>
+                <a:ea typeface="Calibri" pitchFamily="34" charset="-122"/>
+                <a:cs typeface="Calibri" pitchFamily="34" charset="-120"/>
+              </a:rPr>
+              <a:t>360x181 pixels | 1 deg resolution | GitHub Pages hosted</a:t>
+            </a:r>
+            <a:endParaRPr lang="en-US" sz="800" dirty="0"/>
           </a:p>
         </p:txBody>
       </p:sp>
@@ -5949,7 +8061,7 @@
         <p:spPr>
           <a:xfrm>
             <a:off x="0" y="0"/>
-            <a:ext cx="73152" cy="5143500"/>
+            <a:ext cx="64008" cy="5143500"/>
           </a:xfrm>
           <a:prstGeom prst="rect">
             <a:avLst/>
@@ -5969,7 +8081,7 @@
         <p:spPr>
           <a:xfrm>
             <a:off x="731520" y="365760"/>
-            <a:ext cx="7315200" cy="457200"/>
+            <a:ext cx="7315200" cy="365760"/>
           </a:xfrm>
           <a:prstGeom prst="rect">
             <a:avLst/>
@@ -5993,7 +8105,7 @@
                 <a:ea typeface="Calibri" pitchFamily="34" charset="-122"/>
                 <a:cs typeface="Calibri" pitchFamily="34" charset="-120"/>
               </a:rPr>
-              <a:t>NVIDIA WebGPU</a:t>
+              <a:t>STEP 4: NVIDIA WebGPU RENDERING</a:t>
             </a:r>
             <a:endParaRPr lang="en-US" sz="1100" dirty="0"/>
           </a:p>
@@ -6007,7 +8119,7 @@
         </p:nvSpPr>
         <p:spPr>
           <a:xfrm>
-            <a:off x="731520" y="777240"/>
+            <a:off x="731520" y="731520"/>
             <a:ext cx="8229600" cy="548640"/>
           </a:xfrm>
           <a:prstGeom prst="rect">
@@ -6032,7 +8144,7 @@
                 <a:ea typeface="Arial Black" pitchFamily="34" charset="-122"/>
                 <a:cs typeface="Arial Black" pitchFamily="34" charset="-120"/>
               </a:rPr>
-              <a:t>4-Pass GPU Rendering Pipeline</a:t>
+              <a:t>6-Pass GPU Pipeline</a:t>
             </a:r>
             <a:endParaRPr lang="en-US" sz="3000" dirty="0"/>
           </a:p>
@@ -6046,12 +8158,12 @@
         </p:nvSpPr>
         <p:spPr>
           <a:xfrm>
-            <a:off x="457200" y="1554480"/>
-            <a:ext cx="1965960" cy="2926080"/>
+            <a:off x="274320" y="1508760"/>
+            <a:ext cx="1325880" cy="2834640"/>
           </a:xfrm>
           <a:prstGeom prst="rect">
             <a:avLst>
-              <a:gd name="adj" fmla="val 3721"/>
+              <a:gd name="adj" fmla="val 4138"/>
             </a:avLst>
           </a:prstGeom>
           <a:solidFill>
@@ -6068,12 +8180,12 @@
         </p:nvSpPr>
         <p:spPr>
           <a:xfrm>
-            <a:off x="457200" y="1554480"/>
-            <a:ext cx="1965960" cy="365760"/>
+            <a:off x="274320" y="1508760"/>
+            <a:ext cx="1325880" cy="320040"/>
           </a:xfrm>
           <a:prstGeom prst="rect">
             <a:avLst>
-              <a:gd name="adj" fmla="val 20000"/>
+              <a:gd name="adj" fmla="val 17143"/>
             </a:avLst>
           </a:prstGeom>
           <a:solidFill>
@@ -6090,8 +8202,8 @@
         </p:nvSpPr>
         <p:spPr>
           <a:xfrm>
-            <a:off x="548640" y="1572768"/>
-            <a:ext cx="1783080" cy="329184"/>
+            <a:off x="320040" y="1527048"/>
+            <a:ext cx="1234440" cy="283464"/>
           </a:xfrm>
           <a:prstGeom prst="rect">
             <a:avLst/>
@@ -6107,7 +8219,7 @@
               <a:buNone/>
             </a:pPr>
             <a:r>
-              <a:rPr lang="en-US" sz="1000" b="1" spc="100" kern="0" dirty="0">
+              <a:rPr lang="en-US" sz="800" b="1" spc="100" kern="0" dirty="0">
                 <a:solidFill>
                   <a:srgbClr val="76B900"/>
                 </a:solidFill>
@@ -6115,9 +8227,9 @@
                 <a:ea typeface="Calibri" pitchFamily="34" charset="-122"/>
                 <a:cs typeface="Calibri" pitchFamily="34" charset="-120"/>
               </a:rPr>
-              <a:t>PASS 1: COMPUTE</a:t>
-            </a:r>
-            <a:endParaRPr lang="en-US" sz="1000" dirty="0"/>
+              <a:t>1. COMPUTE</a:t>
+            </a:r>
+            <a:endParaRPr lang="en-US" sz="800" dirty="0"/>
           </a:p>
         </p:txBody>
       </p:sp>
@@ -6129,8 +8241,8 @@
         </p:nvSpPr>
         <p:spPr>
           <a:xfrm>
-            <a:off x="594360" y="2103120"/>
-            <a:ext cx="1691640" cy="2103120"/>
+            <a:off x="347472" y="1965960"/>
+            <a:ext cx="1179576" cy="2011680"/>
           </a:xfrm>
           <a:prstGeom prst="rect">
             <a:avLst/>
@@ -6149,7 +8261,7 @@
               <a:buNone/>
             </a:pPr>
             <a:r>
-              <a:rPr lang="en-US" sz="1000" dirty="0">
+              <a:rPr lang="en-US" sz="900" dirty="0">
                 <a:solidFill>
                   <a:srgbClr val="94A3B8"/>
                 </a:solidFill>
@@ -6159,7 +8271,7 @@
               </a:rPr>
               <a:t>Advect 500K particles</a:t>
             </a:r>
-            <a:endParaRPr lang="en-US" sz="1000" dirty="0"/>
+            <a:endParaRPr lang="en-US" sz="900" dirty="0"/>
           </a:p>
           <a:p>
             <a:pPr indent="0" marL="0">
@@ -6169,7 +8281,7 @@
               <a:buNone/>
             </a:pPr>
             <a:r>
-              <a:rPr lang="en-US" sz="1000" dirty="0">
+              <a:rPr lang="en-US" sz="900" dirty="0">
                 <a:solidFill>
                   <a:srgbClr val="94A3B8"/>
                 </a:solidFill>
@@ -6177,9 +8289,9 @@
                 <a:ea typeface="Calibri" pitchFamily="34" charset="-122"/>
                 <a:cs typeface="Calibri" pitchFamily="34" charset="-120"/>
               </a:rPr>
-              <a:t>textureLoad() wind sampling</a:t>
-            </a:r>
-            <a:endParaRPr lang="en-US" sz="1000" dirty="0"/>
+              <a:t>textureLoad() sampling</a:t>
+            </a:r>
+            <a:endParaRPr lang="en-US" sz="900" dirty="0"/>
           </a:p>
           <a:p>
             <a:pPr indent="0" marL="0">
@@ -6189,7 +8301,7 @@
               <a:buNone/>
             </a:pPr>
             <a:r>
-              <a:rPr lang="en-US" sz="1000" dirty="0">
+              <a:rPr lang="en-US" sz="900" dirty="0">
                 <a:solidFill>
                   <a:srgbClr val="94A3B8"/>
                 </a:solidFill>
@@ -6197,9 +8309,9 @@
                 <a:ea typeface="Calibri" pitchFamily="34" charset="-122"/>
                 <a:cs typeface="Calibri" pitchFamily="34" charset="-120"/>
               </a:rPr>
-              <a:t>Ping-pong storage buffers</a:t>
-            </a:r>
-            <a:endParaRPr lang="en-US" sz="1000" dirty="0"/>
+              <a:t>Ping-pong buffers</a:t>
+            </a:r>
+            <a:endParaRPr lang="en-US" sz="900" dirty="0"/>
           </a:p>
           <a:p>
             <a:pPr indent="0" marL="0">
@@ -6209,7 +8321,7 @@
               <a:buNone/>
             </a:pPr>
             <a:r>
-              <a:rPr lang="en-US" sz="1000" dirty="0">
+              <a:rPr lang="en-US" sz="900" dirty="0">
                 <a:solidFill>
                   <a:srgbClr val="94A3B8"/>
                 </a:solidFill>
@@ -6219,7 +8331,7 @@
               </a:rPr>
               <a:t>7,813 workgroups</a:t>
             </a:r>
-            <a:endParaRPr lang="en-US" sz="1000" dirty="0"/>
+            <a:endParaRPr lang="en-US" sz="900" dirty="0"/>
           </a:p>
         </p:txBody>
       </p:sp>
@@ -6231,8 +8343,8 @@
         </p:nvSpPr>
         <p:spPr>
           <a:xfrm>
-            <a:off x="2423160" y="2743200"/>
-            <a:ext cx="182880" cy="365760"/>
+            <a:off x="1600200" y="2560320"/>
+            <a:ext cx="137160" cy="274320"/>
           </a:xfrm>
           <a:prstGeom prst="rect">
             <a:avLst/>
@@ -6248,7 +8360,7 @@
               <a:buNone/>
             </a:pPr>
             <a:r>
-              <a:rPr lang="en-US" sz="1600" dirty="0">
+              <a:rPr lang="en-US" sz="1200" dirty="0">
                 <a:solidFill>
                   <a:srgbClr val="76B900"/>
                 </a:solidFill>
@@ -6258,7 +8370,7 @@
               </a:rPr>
               <a:t>&gt;</a:t>
             </a:r>
-            <a:endParaRPr lang="en-US" sz="1600" dirty="0"/>
+            <a:endParaRPr lang="en-US" sz="1200" dirty="0"/>
           </a:p>
         </p:txBody>
       </p:sp>
@@ -6270,12 +8382,12 @@
         </p:nvSpPr>
         <p:spPr>
           <a:xfrm>
-            <a:off x="2606040" y="1554480"/>
-            <a:ext cx="1965960" cy="2926080"/>
+            <a:off x="1737360" y="1508760"/>
+            <a:ext cx="1325880" cy="2834640"/>
           </a:xfrm>
           <a:prstGeom prst="rect">
             <a:avLst>
-              <a:gd name="adj" fmla="val 3721"/>
+              <a:gd name="adj" fmla="val 4138"/>
             </a:avLst>
           </a:prstGeom>
           <a:solidFill>
@@ -6292,12 +8404,12 @@
         </p:nvSpPr>
         <p:spPr>
           <a:xfrm>
-            <a:off x="2606040" y="1554480"/>
-            <a:ext cx="1965960" cy="365760"/>
+            <a:off x="1737360" y="1508760"/>
+            <a:ext cx="1325880" cy="320040"/>
           </a:xfrm>
           <a:prstGeom prst="rect">
             <a:avLst>
-              <a:gd name="adj" fmla="val 20000"/>
+              <a:gd name="adj" fmla="val 17143"/>
             </a:avLst>
           </a:prstGeom>
           <a:solidFill>
@@ -6314,8 +8426,8 @@
         </p:nvSpPr>
         <p:spPr>
           <a:xfrm>
-            <a:off x="2697480" y="1572768"/>
-            <a:ext cx="1783080" cy="329184"/>
+            <a:off x="1783080" y="1527048"/>
+            <a:ext cx="1234440" cy="283464"/>
           </a:xfrm>
           <a:prstGeom prst="rect">
             <a:avLst/>
@@ -6331,7 +8443,7 @@
               <a:buNone/>
             </a:pPr>
             <a:r>
-              <a:rPr lang="en-US" sz="1000" b="1" spc="100" kern="0" dirty="0">
+              <a:rPr lang="en-US" sz="800" b="1" spc="100" kern="0" dirty="0">
                 <a:solidFill>
                   <a:srgbClr val="76B900"/>
                 </a:solidFill>
@@ -6339,9 +8451,9 @@
                 <a:ea typeface="Calibri" pitchFamily="34" charset="-122"/>
                 <a:cs typeface="Calibri" pitchFamily="34" charset="-120"/>
               </a:rPr>
-              <a:t>PASS 2: FADE</a:t>
-            </a:r>
-            <a:endParaRPr lang="en-US" sz="1000" dirty="0"/>
+              <a:t>2. FADE</a:t>
+            </a:r>
+            <a:endParaRPr lang="en-US" sz="800" dirty="0"/>
           </a:p>
         </p:txBody>
       </p:sp>
@@ -6353,8 +8465,8 @@
         </p:nvSpPr>
         <p:spPr>
           <a:xfrm>
-            <a:off x="2743200" y="2103120"/>
-            <a:ext cx="1691640" cy="2103120"/>
+            <a:off x="1810512" y="1965960"/>
+            <a:ext cx="1179576" cy="2011680"/>
           </a:xfrm>
           <a:prstGeom prst="rect">
             <a:avLst/>
@@ -6373,7 +8485,7 @@
               <a:buNone/>
             </a:pPr>
             <a:r>
-              <a:rPr lang="en-US" sz="1000" dirty="0">
+              <a:rPr lang="en-US" sz="900" dirty="0">
                 <a:solidFill>
                   <a:srgbClr val="94A3B8"/>
                 </a:solidFill>
@@ -6383,7 +8495,7 @@
               </a:rPr>
               <a:t>Trail effect via</a:t>
             </a:r>
-            <a:endParaRPr lang="en-US" sz="1000" dirty="0"/>
+            <a:endParaRPr lang="en-US" sz="900" dirty="0"/>
           </a:p>
           <a:p>
             <a:pPr indent="0" marL="0">
@@ -6393,7 +8505,7 @@
               <a:buNone/>
             </a:pPr>
             <a:r>
-              <a:rPr lang="en-US" sz="1000" dirty="0">
+              <a:rPr lang="en-US" sz="900" dirty="0">
                 <a:solidFill>
                   <a:srgbClr val="94A3B8"/>
                 </a:solidFill>
@@ -6401,9 +8513,9 @@
                 <a:ea typeface="Calibri" pitchFamily="34" charset="-122"/>
                 <a:cs typeface="Calibri" pitchFamily="34" charset="-120"/>
               </a:rPr>
-              <a:t>ping-pong render targets</a:t>
-            </a:r>
-            <a:endParaRPr lang="en-US" sz="1000" dirty="0"/>
+              <a:t>ping-pong textures</a:t>
+            </a:r>
+            <a:endParaRPr lang="en-US" sz="900" dirty="0"/>
           </a:p>
           <a:p>
             <a:pPr indent="0" marL="0">
@@ -6413,7 +8525,7 @@
               <a:buNone/>
             </a:pPr>
             <a:r>
-              <a:rPr lang="en-US" sz="1000" dirty="0">
+              <a:rPr lang="en-US" sz="900" dirty="0">
                 <a:solidFill>
                   <a:srgbClr val="94A3B8"/>
                 </a:solidFill>
@@ -6423,7 +8535,7 @@
               </a:rPr>
               <a:t>Configurable opacity</a:t>
             </a:r>
-            <a:endParaRPr lang="en-US" sz="1000" dirty="0"/>
+            <a:endParaRPr lang="en-US" sz="900" dirty="0"/>
           </a:p>
           <a:p>
             <a:pPr indent="0" marL="0">
@@ -6433,7 +8545,7 @@
               <a:buNone/>
             </a:pPr>
             <a:r>
-              <a:rPr lang="en-US" sz="1000" dirty="0">
+              <a:rPr lang="en-US" sz="900" dirty="0">
                 <a:solidFill>
                   <a:srgbClr val="94A3B8"/>
                 </a:solidFill>
@@ -6443,7 +8555,7 @@
               </a:rPr>
               <a:t>Smooth flowing trails</a:t>
             </a:r>
-            <a:endParaRPr lang="en-US" sz="1000" dirty="0"/>
+            <a:endParaRPr lang="en-US" sz="900" dirty="0"/>
           </a:p>
         </p:txBody>
       </p:sp>
@@ -6455,8 +8567,8 @@
         </p:nvSpPr>
         <p:spPr>
           <a:xfrm>
-            <a:off x="4572000" y="2743200"/>
-            <a:ext cx="182880" cy="365760"/>
+            <a:off x="3063240" y="2560320"/>
+            <a:ext cx="137160" cy="274320"/>
           </a:xfrm>
           <a:prstGeom prst="rect">
             <a:avLst/>
@@ -6472,7 +8584,7 @@
               <a:buNone/>
             </a:pPr>
             <a:r>
-              <a:rPr lang="en-US" sz="1600" dirty="0">
+              <a:rPr lang="en-US" sz="1200" dirty="0">
                 <a:solidFill>
                   <a:srgbClr val="76B900"/>
                 </a:solidFill>
@@ -6482,7 +8594,7 @@
               </a:rPr>
               <a:t>&gt;</a:t>
             </a:r>
-            <a:endParaRPr lang="en-US" sz="1600" dirty="0"/>
+            <a:endParaRPr lang="en-US" sz="1200" dirty="0"/>
           </a:p>
         </p:txBody>
       </p:sp>
@@ -6494,12 +8606,12 @@
         </p:nvSpPr>
         <p:spPr>
           <a:xfrm>
-            <a:off x="4754880" y="1554480"/>
-            <a:ext cx="1965960" cy="2926080"/>
+            <a:off x="3200400" y="1508760"/>
+            <a:ext cx="1325880" cy="2834640"/>
           </a:xfrm>
           <a:prstGeom prst="rect">
             <a:avLst>
-              <a:gd name="adj" fmla="val 3721"/>
+              <a:gd name="adj" fmla="val 4138"/>
             </a:avLst>
           </a:prstGeom>
           <a:solidFill>
@@ -6516,12 +8628,12 @@
         </p:nvSpPr>
         <p:spPr>
           <a:xfrm>
-            <a:off x="4754880" y="1554480"/>
-            <a:ext cx="1965960" cy="365760"/>
+            <a:off x="3200400" y="1508760"/>
+            <a:ext cx="1325880" cy="320040"/>
           </a:xfrm>
           <a:prstGeom prst="rect">
             <a:avLst>
-              <a:gd name="adj" fmla="val 20000"/>
+              <a:gd name="adj" fmla="val 17143"/>
             </a:avLst>
           </a:prstGeom>
           <a:solidFill>
@@ -6538,8 +8650,8 @@
         </p:nvSpPr>
         <p:spPr>
           <a:xfrm>
-            <a:off x="4846320" y="1572768"/>
-            <a:ext cx="1783080" cy="329184"/>
+            <a:off x="3246120" y="1527048"/>
+            <a:ext cx="1234440" cy="283464"/>
           </a:xfrm>
           <a:prstGeom prst="rect">
             <a:avLst/>
@@ -6555,7 +8667,7 @@
               <a:buNone/>
             </a:pPr>
             <a:r>
-              <a:rPr lang="en-US" sz="1000" b="1" spc="100" kern="0" dirty="0">
+              <a:rPr lang="en-US" sz="800" b="1" spc="100" kern="0" dirty="0">
                 <a:solidFill>
                   <a:srgbClr val="76B900"/>
                 </a:solidFill>
@@ -6563,9 +8675,9 @@
                 <a:ea typeface="Calibri" pitchFamily="34" charset="-122"/>
                 <a:cs typeface="Calibri" pitchFamily="34" charset="-120"/>
               </a:rPr>
-              <a:t>PASS 3: RENDER</a:t>
-            </a:r>
-            <a:endParaRPr lang="en-US" sz="1000" dirty="0"/>
+              <a:t>3. RENDER</a:t>
+            </a:r>
+            <a:endParaRPr lang="en-US" sz="800" dirty="0"/>
           </a:p>
         </p:txBody>
       </p:sp>
@@ -6577,8 +8689,8 @@
         </p:nvSpPr>
         <p:spPr>
           <a:xfrm>
-            <a:off x="4892040" y="2103120"/>
-            <a:ext cx="1691640" cy="2103120"/>
+            <a:off x="3273552" y="1965960"/>
+            <a:ext cx="1179576" cy="2011680"/>
           </a:xfrm>
           <a:prstGeom prst="rect">
             <a:avLst/>
@@ -6597,7 +8709,7 @@
               <a:buNone/>
             </a:pPr>
             <a:r>
-              <a:rPr lang="en-US" sz="1000" dirty="0">
+              <a:rPr lang="en-US" sz="900" dirty="0">
                 <a:solidFill>
                   <a:srgbClr val="94A3B8"/>
                 </a:solidFill>
@@ -6605,9 +8717,9 @@
                 <a:ea typeface="Calibri" pitchFamily="34" charset="-122"/>
                 <a:cs typeface="Calibri" pitchFamily="34" charset="-120"/>
               </a:rPr>
-              <a:t>Instanced quads (3M verts)</a:t>
-            </a:r>
-            <a:endParaRPr lang="en-US" sz="1000" dirty="0"/>
+              <a:t>Instanced quads</a:t>
+            </a:r>
+            <a:endParaRPr lang="en-US" sz="900" dirty="0"/>
           </a:p>
           <a:p>
             <a:pPr indent="0" marL="0">
@@ -6617,7 +8729,7 @@
               <a:buNone/>
             </a:pPr>
             <a:r>
-              <a:rPr lang="en-US" sz="1000" dirty="0">
+              <a:rPr lang="en-US" sz="900" dirty="0">
                 <a:solidFill>
                   <a:srgbClr val="94A3B8"/>
                 </a:solidFill>
@@ -6625,9 +8737,9 @@
                 <a:ea typeface="Calibri" pitchFamily="34" charset="-122"/>
                 <a:cs typeface="Calibri" pitchFamily="34" charset="-120"/>
               </a:rPr>
-              <a:t>SDF circular glow</a:t>
-            </a:r>
-            <a:endParaRPr lang="en-US" sz="1000" dirty="0"/>
+              <a:t>Size by concentration</a:t>
+            </a:r>
+            <a:endParaRPr lang="en-US" sz="900" dirty="0"/>
           </a:p>
           <a:p>
             <a:pPr indent="0" marL="0">
@@ -6637,7 +8749,7 @@
               <a:buNone/>
             </a:pPr>
             <a:r>
-              <a:rPr lang="en-US" sz="1000" dirty="0">
+              <a:rPr lang="en-US" sz="900" dirty="0">
                 <a:solidFill>
                   <a:srgbClr val="94A3B8"/>
                 </a:solidFill>
@@ -6645,9 +8757,9 @@
                 <a:ea typeface="Calibri" pitchFamily="34" charset="-122"/>
                 <a:cs typeface="Calibri" pitchFamily="34" charset="-120"/>
               </a:rPr>
-              <a:t>Additive blending</a:t>
-            </a:r>
-            <a:endParaRPr lang="en-US" sz="1000" dirty="0"/>
+              <a:t>SDF glow + additive</a:t>
+            </a:r>
+            <a:endParaRPr lang="en-US" sz="900" dirty="0"/>
           </a:p>
           <a:p>
             <a:pPr indent="0" marL="0">
@@ -6657,7 +8769,7 @@
               <a:buNone/>
             </a:pPr>
             <a:r>
-              <a:rPr lang="en-US" sz="1000" dirty="0">
+              <a:rPr lang="en-US" sz="900" dirty="0">
                 <a:solidFill>
                   <a:srgbClr val="94A3B8"/>
                 </a:solidFill>
@@ -6665,9 +8777,9 @@
                 <a:ea typeface="Calibri" pitchFamily="34" charset="-122"/>
                 <a:cs typeface="Calibri" pitchFamily="34" charset="-120"/>
               </a:rPr>
-              <a:t>Per-species color ramps</a:t>
-            </a:r>
-            <a:endParaRPr lang="en-US" sz="1000" dirty="0"/>
+              <a:t>Robinson projection</a:t>
+            </a:r>
+            <a:endParaRPr lang="en-US" sz="900" dirty="0"/>
           </a:p>
         </p:txBody>
       </p:sp>
@@ -6679,8 +8791,8 @@
         </p:nvSpPr>
         <p:spPr>
           <a:xfrm>
-            <a:off x="6720840" y="2743200"/>
-            <a:ext cx="182880" cy="365760"/>
+            <a:off x="4526280" y="2560320"/>
+            <a:ext cx="137160" cy="274320"/>
           </a:xfrm>
           <a:prstGeom prst="rect">
             <a:avLst/>
@@ -6696,7 +8808,7 @@
               <a:buNone/>
             </a:pPr>
             <a:r>
-              <a:rPr lang="en-US" sz="1600" dirty="0">
+              <a:rPr lang="en-US" sz="1200" dirty="0">
                 <a:solidFill>
                   <a:srgbClr val="76B900"/>
                 </a:solidFill>
@@ -6706,7 +8818,7 @@
               </a:rPr>
               <a:t>&gt;</a:t>
             </a:r>
-            <a:endParaRPr lang="en-US" sz="1600" dirty="0"/>
+            <a:endParaRPr lang="en-US" sz="1200" dirty="0"/>
           </a:p>
         </p:txBody>
       </p:sp>
@@ -6718,12 +8830,12 @@
         </p:nvSpPr>
         <p:spPr>
           <a:xfrm>
-            <a:off x="6903720" y="1554480"/>
-            <a:ext cx="1965960" cy="2926080"/>
+            <a:off x="4663440" y="1508760"/>
+            <a:ext cx="1325880" cy="2834640"/>
           </a:xfrm>
           <a:prstGeom prst="rect">
             <a:avLst>
-              <a:gd name="adj" fmla="val 3721"/>
+              <a:gd name="adj" fmla="val 4138"/>
             </a:avLst>
           </a:prstGeom>
           <a:solidFill>
@@ -6740,12 +8852,12 @@
         </p:nvSpPr>
         <p:spPr>
           <a:xfrm>
-            <a:off x="6903720" y="1554480"/>
-            <a:ext cx="1965960" cy="365760"/>
+            <a:off x="4663440" y="1508760"/>
+            <a:ext cx="1325880" cy="320040"/>
           </a:xfrm>
           <a:prstGeom prst="rect">
             <a:avLst>
-              <a:gd name="adj" fmla="val 20000"/>
+              <a:gd name="adj" fmla="val 17143"/>
             </a:avLst>
           </a:prstGeom>
           <a:solidFill>
@@ -6762,8 +8874,8 @@
         </p:nvSpPr>
         <p:spPr>
           <a:xfrm>
-            <a:off x="6995160" y="1572768"/>
-            <a:ext cx="1783080" cy="329184"/>
+            <a:off x="4709160" y="1527048"/>
+            <a:ext cx="1234440" cy="283464"/>
           </a:xfrm>
           <a:prstGeom prst="rect">
             <a:avLst/>
@@ -6779,7 +8891,7 @@
               <a:buNone/>
             </a:pPr>
             <a:r>
-              <a:rPr lang="en-US" sz="1000" b="1" spc="100" kern="0" dirty="0">
+              <a:rPr lang="en-US" sz="800" b="1" spc="100" kern="0" dirty="0">
                 <a:solidFill>
                   <a:srgbClr val="76B900"/>
                 </a:solidFill>
@@ -6787,9 +8899,9 @@
                 <a:ea typeface="Calibri" pitchFamily="34" charset="-122"/>
                 <a:cs typeface="Calibri" pitchFamily="34" charset="-120"/>
               </a:rPr>
-              <a:t>PASS 4: SCREEN</a:t>
-            </a:r>
-            <a:endParaRPr lang="en-US" sz="1000" dirty="0"/>
+              <a:t>4. BLOOM H</a:t>
+            </a:r>
+            <a:endParaRPr lang="en-US" sz="800" dirty="0"/>
           </a:p>
         </p:txBody>
       </p:sp>
@@ -6801,8 +8913,8 @@
         </p:nvSpPr>
         <p:spPr>
           <a:xfrm>
-            <a:off x="7040880" y="2103120"/>
-            <a:ext cx="1691640" cy="2103120"/>
+            <a:off x="4736592" y="1965960"/>
+            <a:ext cx="1179576" cy="2011680"/>
           </a:xfrm>
           <a:prstGeom prst="rect">
             <a:avLst/>
@@ -6821,7 +8933,7 @@
               <a:buNone/>
             </a:pPr>
             <a:r>
-              <a:rPr lang="en-US" sz="1000" dirty="0">
+              <a:rPr lang="en-US" sz="900" dirty="0">
                 <a:solidFill>
                   <a:srgbClr val="94A3B8"/>
                 </a:solidFill>
@@ -6829,9 +8941,9 @@
                 <a:ea typeface="Calibri" pitchFamily="34" charset="-122"/>
                 <a:cs typeface="Calibri" pitchFamily="34" charset="-120"/>
               </a:rPr>
-              <a:t>Copy to swapchain</a:t>
-            </a:r>
-            <a:endParaRPr lang="en-US" sz="1000" dirty="0"/>
+              <a:t>Horizontal blur</a:t>
+            </a:r>
+            <a:endParaRPr lang="en-US" sz="900" dirty="0"/>
           </a:p>
           <a:p>
             <a:pPr indent="0" marL="0">
@@ -6841,7 +8953,7 @@
               <a:buNone/>
             </a:pPr>
             <a:r>
-              <a:rPr lang="en-US" sz="1000" dirty="0">
+              <a:rPr lang="en-US" sz="900" dirty="0">
                 <a:solidFill>
                   <a:srgbClr val="94A3B8"/>
                 </a:solidFill>
@@ -6849,9 +8961,9 @@
                 <a:ea typeface="Calibri" pitchFamily="34" charset="-122"/>
                 <a:cs typeface="Calibri" pitchFamily="34" charset="-120"/>
               </a:rPr>
-              <a:t>Premultiplied alpha</a:t>
-            </a:r>
-            <a:endParaRPr lang="en-US" sz="1000" dirty="0"/>
+              <a:t>9-tap Gaussian</a:t>
+            </a:r>
+            <a:endParaRPr lang="en-US" sz="900" dirty="0"/>
           </a:p>
           <a:p>
             <a:pPr indent="0" marL="0">
@@ -6861,7 +8973,7 @@
               <a:buNone/>
             </a:pPr>
             <a:r>
-              <a:rPr lang="en-US" sz="1000" dirty="0">
+              <a:rPr lang="en-US" sz="900" dirty="0">
                 <a:solidFill>
                   <a:srgbClr val="94A3B8"/>
                 </a:solidFill>
@@ -6869,9 +8981,9 @@
                 <a:ea typeface="Calibri" pitchFamily="34" charset="-122"/>
                 <a:cs typeface="Calibri" pitchFamily="34" charset="-120"/>
               </a:rPr>
-              <a:t>Transparent overlay</a:t>
-            </a:r>
-            <a:endParaRPr lang="en-US" sz="1000" dirty="0"/>
+              <a:t>Half resolution</a:t>
+            </a:r>
+            <a:endParaRPr lang="en-US" sz="900" dirty="0"/>
           </a:p>
           <a:p>
             <a:pPr indent="0" marL="0">
@@ -6881,7 +8993,7 @@
               <a:buNone/>
             </a:pPr>
             <a:r>
-              <a:rPr lang="en-US" sz="1000" dirty="0">
+              <a:rPr lang="en-US" sz="900" dirty="0">
                 <a:solidFill>
                   <a:srgbClr val="94A3B8"/>
                 </a:solidFill>
@@ -6889,26 +9001,65 @@
                 <a:ea typeface="Calibri" pitchFamily="34" charset="-122"/>
                 <a:cs typeface="Calibri" pitchFamily="34" charset="-120"/>
               </a:rPr>
-              <a:t>CSS z-index compositing</a:t>
-            </a:r>
-            <a:endParaRPr lang="en-US" sz="1000" dirty="0"/>
-          </a:p>
-        </p:txBody>
-      </p:sp>
-      <p:sp>
-        <p:nvSpPr>
-          <p:cNvPr id="24" name="Shape 22"/>
-          <p:cNvSpPr/>
-          <p:nvPr/>
-        </p:nvSpPr>
-        <p:spPr>
-          <a:xfrm>
-            <a:off x="457200" y="4617720"/>
-            <a:ext cx="8229600" cy="365760"/>
+              <a:t>Brightness threshold</a:t>
+            </a:r>
+            <a:endParaRPr lang="en-US" sz="900" dirty="0"/>
+          </a:p>
+        </p:txBody>
+      </p:sp>
+      <p:sp>
+        <p:nvSpPr>
+          <p:cNvPr id="24" name="Text 22"/>
+          <p:cNvSpPr/>
+          <p:nvPr/>
+        </p:nvSpPr>
+        <p:spPr>
+          <a:xfrm>
+            <a:off x="5989320" y="2560320"/>
+            <a:ext cx="137160" cy="274320"/>
+          </a:xfrm>
+          <a:prstGeom prst="rect">
+            <a:avLst/>
+          </a:prstGeom>
+          <a:noFill/>
+          <a:ln/>
+        </p:spPr>
+        <p:txBody>
+          <a:bodyPr wrap="square" lIns="0" tIns="0" rIns="0" bIns="0" rtlCol="0" anchor="ctr"/>
+          <a:lstStyle/>
+          <a:p>
+            <a:pPr algn="ctr" indent="0" marL="0">
+              <a:buNone/>
+            </a:pPr>
+            <a:r>
+              <a:rPr lang="en-US" sz="1200" dirty="0">
+                <a:solidFill>
+                  <a:srgbClr val="76B900"/>
+                </a:solidFill>
+                <a:latin typeface="Arial" pitchFamily="34" charset="0"/>
+                <a:ea typeface="Arial" pitchFamily="34" charset="-122"/>
+                <a:cs typeface="Arial" pitchFamily="34" charset="-120"/>
+              </a:rPr>
+              <a:t>&gt;</a:t>
+            </a:r>
+            <a:endParaRPr lang="en-US" sz="1200" dirty="0"/>
+          </a:p>
+        </p:txBody>
+      </p:sp>
+      <p:sp>
+        <p:nvSpPr>
+          <p:cNvPr id="25" name="Shape 23"/>
+          <p:cNvSpPr/>
+          <p:nvPr/>
+        </p:nvSpPr>
+        <p:spPr>
+          <a:xfrm>
+            <a:off x="6126480" y="1508760"/>
+            <a:ext cx="1325880" cy="2834640"/>
           </a:xfrm>
           <a:prstGeom prst="rect">
             <a:avLst>
-              <a:gd name="adj" fmla="val 15000"/>
+              <a:gd name="adj" fmla="val 4138"/>
             </a:avLst>
           </a:prstGeom>
           <a:solidFill>
@@ -6919,13 +9070,422 @@
       </p:sp>
       <p:sp>
         <p:nvSpPr>
-          <p:cNvPr id="25" name="Text 23"/>
-          <p:cNvSpPr/>
-          <p:nvPr/>
-        </p:nvSpPr>
-        <p:spPr>
-          <a:xfrm>
-            <a:off x="640080" y="4636008"/>
+          <p:cNvPr id="26" name="Shape 24"/>
+          <p:cNvSpPr/>
+          <p:nvPr/>
+        </p:nvSpPr>
+        <p:spPr>
+          <a:xfrm>
+            <a:off x="6126480" y="1508760"/>
+            <a:ext cx="1325880" cy="320040"/>
+          </a:xfrm>
+          <a:prstGeom prst="rect">
+            <a:avLst>
+              <a:gd name="adj" fmla="val 17143"/>
+            </a:avLst>
+          </a:prstGeom>
+          <a:solidFill>
+            <a:srgbClr val="76B900"/>
+          </a:solidFill>
+          <a:ln/>
+        </p:spPr>
+      </p:sp>
+      <p:sp>
+        <p:nvSpPr>
+          <p:cNvPr id="27" name="Text 25"/>
+          <p:cNvSpPr/>
+          <p:nvPr/>
+        </p:nvSpPr>
+        <p:spPr>
+          <a:xfrm>
+            <a:off x="6172200" y="1527048"/>
+            <a:ext cx="1234440" cy="283464"/>
+          </a:xfrm>
+          <a:prstGeom prst="rect">
+            <a:avLst/>
+          </a:prstGeom>
+          <a:noFill/>
+          <a:ln/>
+        </p:spPr>
+        <p:txBody>
+          <a:bodyPr wrap="square" lIns="0" tIns="0" rIns="0" bIns="0" rtlCol="0" anchor="ctr"/>
+          <a:lstStyle/>
+          <a:p>
+            <a:pPr algn="ctr" indent="0" marL="0">
+              <a:buNone/>
+            </a:pPr>
+            <a:r>
+              <a:rPr lang="en-US" sz="800" b="1" spc="100" kern="0" dirty="0">
+                <a:solidFill>
+                  <a:srgbClr val="76B900"/>
+                </a:solidFill>
+                <a:latin typeface="Calibri" pitchFamily="34" charset="0"/>
+                <a:ea typeface="Calibri" pitchFamily="34" charset="-122"/>
+                <a:cs typeface="Calibri" pitchFamily="34" charset="-120"/>
+              </a:rPr>
+              <a:t>5. BLOOM V</a:t>
+            </a:r>
+            <a:endParaRPr lang="en-US" sz="800" dirty="0"/>
+          </a:p>
+        </p:txBody>
+      </p:sp>
+      <p:sp>
+        <p:nvSpPr>
+          <p:cNvPr id="28" name="Text 26"/>
+          <p:cNvSpPr/>
+          <p:nvPr/>
+        </p:nvSpPr>
+        <p:spPr>
+          <a:xfrm>
+            <a:off x="6199632" y="1965960"/>
+            <a:ext cx="1179576" cy="2011680"/>
+          </a:xfrm>
+          <a:prstGeom prst="rect">
+            <a:avLst/>
+          </a:prstGeom>
+          <a:noFill/>
+          <a:ln/>
+        </p:spPr>
+        <p:txBody>
+          <a:bodyPr wrap="square" lIns="0" tIns="0" rIns="0" bIns="0" rtlCol="0" anchor="ctr"/>
+          <a:lstStyle/>
+          <a:p>
+            <a:pPr indent="0" marL="0">
+              <a:lnSpc>
+                <a:spcPct val="150000"/>
+              </a:lnSpc>
+              <a:buNone/>
+            </a:pPr>
+            <a:r>
+              <a:rPr lang="en-US" sz="900" dirty="0">
+                <a:solidFill>
+                  <a:srgbClr val="94A3B8"/>
+                </a:solidFill>
+                <a:latin typeface="Calibri" pitchFamily="34" charset="0"/>
+                <a:ea typeface="Calibri" pitchFamily="34" charset="-122"/>
+                <a:cs typeface="Calibri" pitchFamily="34" charset="-120"/>
+              </a:rPr>
+              <a:t>Vertical blur</a:t>
+            </a:r>
+            <a:endParaRPr lang="en-US" sz="900" dirty="0"/>
+          </a:p>
+          <a:p>
+            <a:pPr indent="0" marL="0">
+              <a:lnSpc>
+                <a:spcPct val="150000"/>
+              </a:lnSpc>
+              <a:buNone/>
+            </a:pPr>
+            <a:r>
+              <a:rPr lang="en-US" sz="900" dirty="0">
+                <a:solidFill>
+                  <a:srgbClr val="94A3B8"/>
+                </a:solidFill>
+                <a:latin typeface="Calibri" pitchFamily="34" charset="0"/>
+                <a:ea typeface="Calibri" pitchFamily="34" charset="-122"/>
+                <a:cs typeface="Calibri" pitchFamily="34" charset="-120"/>
+              </a:rPr>
+              <a:t>Additive composite</a:t>
+            </a:r>
+            <a:endParaRPr lang="en-US" sz="900" dirty="0"/>
+          </a:p>
+          <a:p>
+            <a:pPr indent="0" marL="0">
+              <a:lnSpc>
+                <a:spcPct val="150000"/>
+              </a:lnSpc>
+              <a:buNone/>
+            </a:pPr>
+            <a:r>
+              <a:rPr lang="en-US" sz="900" dirty="0">
+                <a:solidFill>
+                  <a:srgbClr val="94A3B8"/>
+                </a:solidFill>
+                <a:latin typeface="Calibri" pitchFamily="34" charset="0"/>
+                <a:ea typeface="Calibri" pitchFamily="34" charset="-122"/>
+                <a:cs typeface="Calibri" pitchFamily="34" charset="-120"/>
+              </a:rPr>
+              <a:t>Back onto trail</a:t>
+            </a:r>
+            <a:endParaRPr lang="en-US" sz="900" dirty="0"/>
+          </a:p>
+          <a:p>
+            <a:pPr indent="0" marL="0">
+              <a:lnSpc>
+                <a:spcPct val="150000"/>
+              </a:lnSpc>
+              <a:buNone/>
+            </a:pPr>
+            <a:r>
+              <a:rPr lang="en-US" sz="900" dirty="0">
+                <a:solidFill>
+                  <a:srgbClr val="94A3B8"/>
+                </a:solidFill>
+                <a:latin typeface="Calibri" pitchFamily="34" charset="0"/>
+                <a:ea typeface="Calibri" pitchFamily="34" charset="-122"/>
+                <a:cs typeface="Calibri" pitchFamily="34" charset="-120"/>
+              </a:rPr>
+              <a:t>Cinematic neon glow</a:t>
+            </a:r>
+            <a:endParaRPr lang="en-US" sz="900" dirty="0"/>
+          </a:p>
+        </p:txBody>
+      </p:sp>
+      <p:sp>
+        <p:nvSpPr>
+          <p:cNvPr id="29" name="Text 27"/>
+          <p:cNvSpPr/>
+          <p:nvPr/>
+        </p:nvSpPr>
+        <p:spPr>
+          <a:xfrm>
+            <a:off x="7452360" y="2560320"/>
+            <a:ext cx="137160" cy="274320"/>
+          </a:xfrm>
+          <a:prstGeom prst="rect">
+            <a:avLst/>
+          </a:prstGeom>
+          <a:noFill/>
+          <a:ln/>
+        </p:spPr>
+        <p:txBody>
+          <a:bodyPr wrap="square" lIns="0" tIns="0" rIns="0" bIns="0" rtlCol="0" anchor="ctr"/>
+          <a:lstStyle/>
+          <a:p>
+            <a:pPr algn="ctr" indent="0" marL="0">
+              <a:buNone/>
+            </a:pPr>
+            <a:r>
+              <a:rPr lang="en-US" sz="1200" dirty="0">
+                <a:solidFill>
+                  <a:srgbClr val="76B900"/>
+                </a:solidFill>
+                <a:latin typeface="Arial" pitchFamily="34" charset="0"/>
+                <a:ea typeface="Arial" pitchFamily="34" charset="-122"/>
+                <a:cs typeface="Arial" pitchFamily="34" charset="-120"/>
+              </a:rPr>
+              <a:t>&gt;</a:t>
+            </a:r>
+            <a:endParaRPr lang="en-US" sz="1200" dirty="0"/>
+          </a:p>
+        </p:txBody>
+      </p:sp>
+      <p:sp>
+        <p:nvSpPr>
+          <p:cNvPr id="30" name="Shape 28"/>
+          <p:cNvSpPr/>
+          <p:nvPr/>
+        </p:nvSpPr>
+        <p:spPr>
+          <a:xfrm>
+            <a:off x="7589520" y="1508760"/>
+            <a:ext cx="1325880" cy="2834640"/>
+          </a:xfrm>
+          <a:prstGeom prst="rect">
+            <a:avLst>
+              <a:gd name="adj" fmla="val 4138"/>
+            </a:avLst>
+          </a:prstGeom>
+          <a:solidFill>
+            <a:srgbClr val="1A2236"/>
+          </a:solidFill>
+          <a:ln/>
+        </p:spPr>
+      </p:sp>
+      <p:sp>
+        <p:nvSpPr>
+          <p:cNvPr id="31" name="Shape 29"/>
+          <p:cNvSpPr/>
+          <p:nvPr/>
+        </p:nvSpPr>
+        <p:spPr>
+          <a:xfrm>
+            <a:off x="7589520" y="1508760"/>
+            <a:ext cx="1325880" cy="320040"/>
+          </a:xfrm>
+          <a:prstGeom prst="rect">
+            <a:avLst>
+              <a:gd name="adj" fmla="val 17143"/>
+            </a:avLst>
+          </a:prstGeom>
+          <a:solidFill>
+            <a:srgbClr val="76B900"/>
+          </a:solidFill>
+          <a:ln/>
+        </p:spPr>
+      </p:sp>
+      <p:sp>
+        <p:nvSpPr>
+          <p:cNvPr id="32" name="Text 30"/>
+          <p:cNvSpPr/>
+          <p:nvPr/>
+        </p:nvSpPr>
+        <p:spPr>
+          <a:xfrm>
+            <a:off x="7635240" y="1527048"/>
+            <a:ext cx="1234440" cy="283464"/>
+          </a:xfrm>
+          <a:prstGeom prst="rect">
+            <a:avLst/>
+          </a:prstGeom>
+          <a:noFill/>
+          <a:ln/>
+        </p:spPr>
+        <p:txBody>
+          <a:bodyPr wrap="square" lIns="0" tIns="0" rIns="0" bIns="0" rtlCol="0" anchor="ctr"/>
+          <a:lstStyle/>
+          <a:p>
+            <a:pPr algn="ctr" indent="0" marL="0">
+              <a:buNone/>
+            </a:pPr>
+            <a:r>
+              <a:rPr lang="en-US" sz="800" b="1" spc="100" kern="0" dirty="0">
+                <a:solidFill>
+                  <a:srgbClr val="76B900"/>
+                </a:solidFill>
+                <a:latin typeface="Calibri" pitchFamily="34" charset="0"/>
+                <a:ea typeface="Calibri" pitchFamily="34" charset="-122"/>
+                <a:cs typeface="Calibri" pitchFamily="34" charset="-120"/>
+              </a:rPr>
+              <a:t>6. SCREEN</a:t>
+            </a:r>
+            <a:endParaRPr lang="en-US" sz="800" dirty="0"/>
+          </a:p>
+        </p:txBody>
+      </p:sp>
+      <p:sp>
+        <p:nvSpPr>
+          <p:cNvPr id="33" name="Text 31"/>
+          <p:cNvSpPr/>
+          <p:nvPr/>
+        </p:nvSpPr>
+        <p:spPr>
+          <a:xfrm>
+            <a:off x="7662672" y="1965960"/>
+            <a:ext cx="1179576" cy="2011680"/>
+          </a:xfrm>
+          <a:prstGeom prst="rect">
+            <a:avLst/>
+          </a:prstGeom>
+          <a:noFill/>
+          <a:ln/>
+        </p:spPr>
+        <p:txBody>
+          <a:bodyPr wrap="square" lIns="0" tIns="0" rIns="0" bIns="0" rtlCol="0" anchor="ctr"/>
+          <a:lstStyle/>
+          <a:p>
+            <a:pPr indent="0" marL="0">
+              <a:lnSpc>
+                <a:spcPct val="150000"/>
+              </a:lnSpc>
+              <a:buNone/>
+            </a:pPr>
+            <a:r>
+              <a:rPr lang="en-US" sz="900" dirty="0">
+                <a:solidFill>
+                  <a:srgbClr val="94A3B8"/>
+                </a:solidFill>
+                <a:latin typeface="Calibri" pitchFamily="34" charset="0"/>
+                <a:ea typeface="Calibri" pitchFamily="34" charset="-122"/>
+                <a:cs typeface="Calibri" pitchFamily="34" charset="-120"/>
+              </a:rPr>
+              <a:t>Copy to swapchain</a:t>
+            </a:r>
+            <a:endParaRPr lang="en-US" sz="900" dirty="0"/>
+          </a:p>
+          <a:p>
+            <a:pPr indent="0" marL="0">
+              <a:lnSpc>
+                <a:spcPct val="150000"/>
+              </a:lnSpc>
+              <a:buNone/>
+            </a:pPr>
+            <a:r>
+              <a:rPr lang="en-US" sz="900" dirty="0">
+                <a:solidFill>
+                  <a:srgbClr val="94A3B8"/>
+                </a:solidFill>
+                <a:latin typeface="Calibri" pitchFamily="34" charset="0"/>
+                <a:ea typeface="Calibri" pitchFamily="34" charset="-122"/>
+                <a:cs typeface="Calibri" pitchFamily="34" charset="-120"/>
+              </a:rPr>
+              <a:t>Premultiplied alpha</a:t>
+            </a:r>
+            <a:endParaRPr lang="en-US" sz="900" dirty="0"/>
+          </a:p>
+          <a:p>
+            <a:pPr indent="0" marL="0">
+              <a:lnSpc>
+                <a:spcPct val="150000"/>
+              </a:lnSpc>
+              <a:buNone/>
+            </a:pPr>
+            <a:r>
+              <a:rPr lang="en-US" sz="900" dirty="0">
+                <a:solidFill>
+                  <a:srgbClr val="94A3B8"/>
+                </a:solidFill>
+                <a:latin typeface="Calibri" pitchFamily="34" charset="0"/>
+                <a:ea typeface="Calibri" pitchFamily="34" charset="-122"/>
+                <a:cs typeface="Calibri" pitchFamily="34" charset="-120"/>
+              </a:rPr>
+              <a:t>Overlay on basemap</a:t>
+            </a:r>
+            <a:endParaRPr lang="en-US" sz="900" dirty="0"/>
+          </a:p>
+          <a:p>
+            <a:pPr indent="0" marL="0">
+              <a:lnSpc>
+                <a:spcPct val="150000"/>
+              </a:lnSpc>
+              <a:buNone/>
+            </a:pPr>
+            <a:r>
+              <a:rPr lang="en-US" sz="900" dirty="0">
+                <a:solidFill>
+                  <a:srgbClr val="94A3B8"/>
+                </a:solidFill>
+                <a:latin typeface="Calibri" pitchFamily="34" charset="0"/>
+                <a:ea typeface="Calibri" pitchFamily="34" charset="-122"/>
+                <a:cs typeface="Calibri" pitchFamily="34" charset="-120"/>
+              </a:rPr>
+              <a:t>60 FPS output</a:t>
+            </a:r>
+            <a:endParaRPr lang="en-US" sz="900" dirty="0"/>
+          </a:p>
+        </p:txBody>
+      </p:sp>
+      <p:sp>
+        <p:nvSpPr>
+          <p:cNvPr id="34" name="Shape 32"/>
+          <p:cNvSpPr/>
+          <p:nvPr/>
+        </p:nvSpPr>
+        <p:spPr>
+          <a:xfrm>
+            <a:off x="274320" y="4526280"/>
+            <a:ext cx="8595360" cy="365760"/>
+          </a:xfrm>
+          <a:prstGeom prst="rect">
+            <a:avLst>
+              <a:gd name="adj" fmla="val 12500"/>
+            </a:avLst>
+          </a:prstGeom>
+          <a:solidFill>
+            <a:srgbClr val="1A2236"/>
+          </a:solidFill>
+          <a:ln/>
+        </p:spPr>
+      </p:sp>
+      <p:sp>
+        <p:nvSpPr>
+          <p:cNvPr id="35" name="Text 33"/>
+          <p:cNvSpPr/>
+          <p:nvPr/>
+        </p:nvSpPr>
+        <p:spPr>
+          <a:xfrm>
+            <a:off x="457200" y="4544568"/>
             <a:ext cx="2743200" cy="329184"/>
           </a:xfrm>
           <a:prstGeom prst="rect">
@@ -6958,14 +9518,14 @@
       </p:sp>
       <p:sp>
         <p:nvSpPr>
-          <p:cNvPr id="26" name="Text 24"/>
-          <p:cNvSpPr/>
-          <p:nvPr/>
-        </p:nvSpPr>
-        <p:spPr>
-          <a:xfrm>
-            <a:off x="3657600" y="4636008"/>
-            <a:ext cx="3200400" cy="329184"/>
+          <p:cNvPr id="36" name="Text 34"/>
+          <p:cNvSpPr/>
+          <p:nvPr/>
+        </p:nvSpPr>
+        <p:spPr>
+          <a:xfrm>
+            <a:off x="3474720" y="4544568"/>
+            <a:ext cx="3657600" cy="329184"/>
           </a:xfrm>
           <a:prstGeom prst="rect">
             <a:avLst/>
@@ -6989,7 +9549,7 @@
                 <a:ea typeface="Calibri" pitchFamily="34" charset="-122"/>
                 <a:cs typeface="Calibri" pitchFamily="34" charset="-120"/>
               </a:rPr>
-              <a:t>WebGPU Compute: 500,000 particles</a:t>
+              <a:t>WebGPU Compute: 500,000 particles + GPU Bloom</a:t>
             </a:r>
             <a:endParaRPr lang="en-US" sz="1000" dirty="0"/>
           </a:p>
@@ -6997,14 +9557,14 @@
       </p:sp>
       <p:sp>
         <p:nvSpPr>
-          <p:cNvPr id="27" name="Text 25"/>
-          <p:cNvSpPr/>
-          <p:nvPr/>
-        </p:nvSpPr>
-        <p:spPr>
-          <a:xfrm>
-            <a:off x="7132320" y="4636008"/>
-            <a:ext cx="1371600" cy="329184"/>
+          <p:cNvPr id="37" name="Text 35"/>
+          <p:cNvSpPr/>
+          <p:nvPr/>
+        </p:nvSpPr>
+        <p:spPr>
+          <a:xfrm>
+            <a:off x="7498080" y="4544568"/>
+            <a:ext cx="1188720" cy="329184"/>
           </a:xfrm>
           <a:prstGeom prst="rect">
             <a:avLst/>
@@ -7020,7 +9580,7 @@
               <a:buNone/>
             </a:pPr>
             <a:r>
-              <a:rPr lang="en-US" sz="1200" dirty="0">
+              <a:rPr lang="en-US" sz="1300" dirty="0">
                 <a:solidFill>
                   <a:srgbClr val="76B900"/>
                 </a:solidFill>
@@ -7030,7 +9590,7 @@
               </a:rPr>
               <a:t>62x faster</a:t>
             </a:r>
-            <a:endParaRPr lang="en-US" sz="1200" dirty="0"/>
+            <a:endParaRPr lang="en-US" sz="1300" dirty="0"/>
           </a:p>
         </p:txBody>
       </p:sp>
@@ -7075,13 +9635,13 @@
         <p:spPr>
           <a:xfrm>
             <a:off x="0" y="0"/>
-            <a:ext cx="73152" cy="5143500"/>
+            <a:ext cx="64008" cy="5143500"/>
           </a:xfrm>
           <a:prstGeom prst="rect">
             <a:avLst/>
           </a:prstGeom>
           <a:solidFill>
-            <a:srgbClr val="00B4D8"/>
+            <a:srgbClr val="76B900"/>
           </a:solidFill>
           <a:ln/>
         </p:spPr>
@@ -7094,8 +9654,8 @@
         </p:nvSpPr>
         <p:spPr>
           <a:xfrm>
-            <a:off x="731520" y="274320"/>
-            <a:ext cx="7315200" cy="457200"/>
+            <a:off x="731520" y="365760"/>
+            <a:ext cx="7315200" cy="365760"/>
           </a:xfrm>
           <a:prstGeom prst="rect">
             <a:avLst/>
@@ -7113,48 +9673,708 @@
             <a:r>
               <a:rPr lang="en-US" sz="1100" spc="400" kern="0" dirty="0">
                 <a:solidFill>
+                  <a:srgbClr val="76B900"/>
+                </a:solidFill>
+                <a:latin typeface="Calibri" pitchFamily="34" charset="0"/>
+                <a:ea typeface="Calibri" pitchFamily="34" charset="-122"/>
+                <a:cs typeface="Calibri" pitchFamily="34" charset="-120"/>
+              </a:rPr>
+              <a:t>GPU FEATURES</a:t>
+            </a:r>
+            <a:endParaRPr lang="en-US" sz="1100" dirty="0"/>
+          </a:p>
+        </p:txBody>
+      </p:sp>
+      <p:sp>
+        <p:nvSpPr>
+          <p:cNvPr id="4" name="Text 2"/>
+          <p:cNvSpPr/>
+          <p:nvPr/>
+        </p:nvSpPr>
+        <p:spPr>
+          <a:xfrm>
+            <a:off x="731520" y="731520"/>
+            <a:ext cx="8229600" cy="548640"/>
+          </a:xfrm>
+          <a:prstGeom prst="rect">
+            <a:avLst/>
+          </a:prstGeom>
+          <a:noFill/>
+          <a:ln/>
+        </p:spPr>
+        <p:txBody>
+          <a:bodyPr wrap="square" lIns="0" tIns="0" rIns="0" bIns="0" rtlCol="0" anchor="ctr"/>
+          <a:lstStyle/>
+          <a:p>
+            <a:pPr indent="0" marL="0">
+              <a:buNone/>
+            </a:pPr>
+            <a:r>
+              <a:rPr lang="en-US" sz="2600" dirty="0">
+                <a:solidFill>
+                  <a:srgbClr val="E2E8F0"/>
+                </a:solidFill>
+                <a:latin typeface="Arial Black" pitchFamily="34" charset="0"/>
+                <a:ea typeface="Arial Black" pitchFamily="34" charset="-122"/>
+                <a:cs typeface="Arial Black" pitchFamily="34" charset="-120"/>
+              </a:rPr>
+              <a:t>Concentration Sizing + Bloom Post-Processing</a:t>
+            </a:r>
+            <a:endParaRPr lang="en-US" sz="2600" dirty="0"/>
+          </a:p>
+        </p:txBody>
+      </p:sp>
+      <p:sp>
+        <p:nvSpPr>
+          <p:cNvPr id="5" name="Shape 3"/>
+          <p:cNvSpPr/>
+          <p:nvPr/>
+        </p:nvSpPr>
+        <p:spPr>
+          <a:xfrm>
+            <a:off x="731520" y="1508760"/>
+            <a:ext cx="3749040" cy="3200400"/>
+          </a:xfrm>
+          <a:prstGeom prst="rect">
+            <a:avLst>
+              <a:gd name="adj" fmla="val 2000"/>
+            </a:avLst>
+          </a:prstGeom>
+          <a:solidFill>
+            <a:srgbClr val="1A2236"/>
+          </a:solidFill>
+          <a:ln/>
+        </p:spPr>
+      </p:sp>
+      <p:sp>
+        <p:nvSpPr>
+          <p:cNvPr id="6" name="Shape 4"/>
+          <p:cNvSpPr/>
+          <p:nvPr/>
+        </p:nvSpPr>
+        <p:spPr>
+          <a:xfrm>
+            <a:off x="731520" y="1508760"/>
+            <a:ext cx="3749040" cy="320040"/>
+          </a:xfrm>
+          <a:prstGeom prst="rect">
+            <a:avLst>
+              <a:gd name="adj" fmla="val 20000"/>
+            </a:avLst>
+          </a:prstGeom>
+          <a:solidFill>
+            <a:srgbClr val="76B900"/>
+          </a:solidFill>
+          <a:ln/>
+        </p:spPr>
+      </p:sp>
+      <p:sp>
+        <p:nvSpPr>
+          <p:cNvPr id="7" name="Text 5"/>
+          <p:cNvSpPr/>
+          <p:nvPr/>
+        </p:nvSpPr>
+        <p:spPr>
+          <a:xfrm>
+            <a:off x="914400" y="1527048"/>
+            <a:ext cx="3383280" cy="283464"/>
+          </a:xfrm>
+          <a:prstGeom prst="rect">
+            <a:avLst/>
+          </a:prstGeom>
+          <a:noFill/>
+          <a:ln/>
+        </p:spPr>
+        <p:txBody>
+          <a:bodyPr wrap="square" lIns="0" tIns="0" rIns="0" bIns="0" rtlCol="0" anchor="ctr"/>
+          <a:lstStyle/>
+          <a:p>
+            <a:pPr indent="0" marL="0">
+              <a:buNone/>
+            </a:pPr>
+            <a:r>
+              <a:rPr lang="en-US" sz="900" b="1" spc="200" kern="0" dirty="0">
+                <a:solidFill>
+                  <a:srgbClr val="76B900"/>
+                </a:solidFill>
+                <a:latin typeface="Calibri" pitchFamily="34" charset="0"/>
+                <a:ea typeface="Calibri" pitchFamily="34" charset="-122"/>
+                <a:cs typeface="Calibri" pitchFamily="34" charset="-120"/>
+              </a:rPr>
+              <a:t>PARTICLE SIZE BY CONCENTRATION</a:t>
+            </a:r>
+            <a:endParaRPr lang="en-US" sz="900" dirty="0"/>
+          </a:p>
+        </p:txBody>
+      </p:sp>
+      <p:sp>
+        <p:nvSpPr>
+          <p:cNvPr id="8" name="Text 6"/>
+          <p:cNvSpPr/>
+          <p:nvPr/>
+        </p:nvSpPr>
+        <p:spPr>
+          <a:xfrm>
+            <a:off x="914400" y="1965960"/>
+            <a:ext cx="3383280" cy="2560320"/>
+          </a:xfrm>
+          <a:prstGeom prst="rect">
+            <a:avLst/>
+          </a:prstGeom>
+          <a:noFill/>
+          <a:ln/>
+        </p:spPr>
+        <p:txBody>
+          <a:bodyPr wrap="square" lIns="0" tIns="0" rIns="0" bIns="0" rtlCol="0" anchor="ctr"/>
+          <a:lstStyle/>
+          <a:p>
+            <a:pPr indent="0" marL="0">
+              <a:lnSpc>
+                <a:spcPct val="120000"/>
+              </a:lnSpc>
+              <a:buNone/>
+            </a:pPr>
+            <a:r>
+              <a:rPr lang="en-US" sz="1100" dirty="0">
+                <a:solidFill>
+                  <a:srgbClr val="E2E8F0"/>
+                </a:solidFill>
+                <a:latin typeface="Calibri" pitchFamily="34" charset="0"/>
+                <a:ea typeface="Calibri" pitchFamily="34" charset="-122"/>
+                <a:cs typeface="Calibri" pitchFamily="34" charset="-120"/>
+              </a:rPr>
+              <a:t>Vertex shader scales each particle:</a:t>
+            </a:r>
+            <a:endParaRPr lang="en-US" sz="1100" dirty="0"/>
+          </a:p>
+          <a:p>
+            <a:pPr indent="0" marL="0">
+              <a:lnSpc>
+                <a:spcPct val="120000"/>
+              </a:lnSpc>
+              <a:buNone/>
+            </a:pPr>
+            <a:endParaRPr lang="en-US" sz="1100" dirty="0"/>
+          </a:p>
+          <a:p>
+            <a:pPr indent="0" marL="0">
+              <a:lnSpc>
+                <a:spcPct val="120000"/>
+              </a:lnSpc>
+              <a:buNone/>
+            </a:pPr>
+            <a:r>
+              <a:rPr lang="en-US" sz="1200" dirty="0">
+                <a:solidFill>
                   <a:srgbClr val="00B4D8"/>
                 </a:solidFill>
-                <a:latin typeface="Calibri" pitchFamily="34" charset="0"/>
-                <a:ea typeface="Calibri" pitchFamily="34" charset="-122"/>
-                <a:cs typeface="Calibri" pitchFamily="34" charset="-120"/>
-              </a:rPr>
-              <a:t>SYSTEM ARCHITECTURE</a:t>
+                <a:latin typeface="Consolas" pitchFamily="34" charset="0"/>
+                <a:ea typeface="Consolas" pitchFamily="34" charset="-122"/>
+                <a:cs typeface="Consolas" pitchFamily="34" charset="-120"/>
+              </a:rPr>
+              <a:t>sizeMult = 0.3 + t * 1.5</a:t>
             </a:r>
             <a:endParaRPr lang="en-US" sz="1100" dirty="0"/>
           </a:p>
-        </p:txBody>
-      </p:sp>
-      <p:pic>
-        <p:nvPicPr>
-          <p:cNvPr id="4" name="Image 0" descr="C:\Users\jhon9904\aerosols-globe\diagram.svg">    </p:cNvPr>
-          <p:cNvPicPr>
-            <a:picLocks noChangeAspect="1"/>
-          </p:cNvPicPr>
-          <p:nvPr/>
-        </p:nvPicPr>
-        <p:blipFill>
-          <a:blip r:embed="rId1">
-            <a:extLst>
-              <a:ext uri="{96DAC541-7B7A-43D3-8B79-37D633B846F1}">
-                <asvg:svgBlip xmlns:asvg="http://schemas.microsoft.com/office/drawing/2016/SVG/main" r:embed="rId2"/>
-              </a:ext>
-            </a:extLst>
-          </a:blip>
-          <a:stretch>
-            <a:fillRect/>
-          </a:stretch>
-        </p:blipFill>
-        <p:spPr>
-          <a:xfrm>
-            <a:off x="274320" y="640080"/>
-            <a:ext cx="8595360" cy="4389120"/>
-          </a:xfrm>
-          <a:prstGeom prst="rect">
-            <a:avLst/>
-          </a:prstGeom>
-        </p:spPr>
-      </p:pic>
+          <a:p>
+            <a:pPr indent="0" marL="0">
+              <a:lnSpc>
+                <a:spcPct val="120000"/>
+              </a:lnSpc>
+              <a:buNone/>
+            </a:pPr>
+            <a:endParaRPr lang="en-US" sz="1100" dirty="0"/>
+          </a:p>
+          <a:p>
+            <a:pPr indent="0" marL="0">
+              <a:lnSpc>
+                <a:spcPct val="120000"/>
+              </a:lnSpc>
+              <a:buNone/>
+            </a:pPr>
+            <a:r>
+              <a:rPr lang="en-US" sz="1000" dirty="0">
+                <a:solidFill>
+                  <a:srgbClr val="94A3B8"/>
+                </a:solidFill>
+                <a:latin typeface="Consolas" pitchFamily="34" charset="0"/>
+                <a:ea typeface="Consolas" pitchFamily="34" charset="-122"/>
+                <a:cs typeface="Consolas" pitchFamily="34" charset="-120"/>
+              </a:rPr>
+              <a:t>where t = speed / maxMag</a:t>
+            </a:r>
+            <a:endParaRPr lang="en-US" sz="1100" dirty="0"/>
+          </a:p>
+          <a:p>
+            <a:pPr indent="0" marL="0">
+              <a:lnSpc>
+                <a:spcPct val="120000"/>
+              </a:lnSpc>
+              <a:buNone/>
+            </a:pPr>
+            <a:endParaRPr lang="en-US" sz="1100" dirty="0"/>
+          </a:p>
+          <a:p>
+            <a:pPr indent="0" marL="0">
+              <a:lnSpc>
+                <a:spcPct val="120000"/>
+              </a:lnSpc>
+              <a:buNone/>
+            </a:pPr>
+            <a:r>
+              <a:rPr lang="en-US" sz="1000" dirty="0">
+                <a:solidFill>
+                  <a:srgbClr val="94A3B8"/>
+                </a:solidFill>
+                <a:latin typeface="Calibri" pitchFamily="34" charset="0"/>
+                <a:ea typeface="Calibri" pitchFamily="34" charset="-122"/>
+                <a:cs typeface="Calibri" pitchFamily="34" charset="-120"/>
+              </a:rPr>
+              <a:t>Low concentration (clean air):</a:t>
+            </a:r>
+            <a:endParaRPr lang="en-US" sz="1100" dirty="0"/>
+          </a:p>
+          <a:p>
+            <a:pPr indent="0" marL="0">
+              <a:lnSpc>
+                <a:spcPct val="120000"/>
+              </a:lnSpc>
+              <a:buNone/>
+            </a:pPr>
+            <a:r>
+              <a:rPr lang="en-US" sz="1000" dirty="0">
+                <a:solidFill>
+                  <a:srgbClr val="94A3B8"/>
+                </a:solidFill>
+                <a:latin typeface="Calibri" pitchFamily="34" charset="0"/>
+                <a:ea typeface="Calibri" pitchFamily="34" charset="-122"/>
+                <a:cs typeface="Calibri" pitchFamily="34" charset="-120"/>
+              </a:rPr>
+              <a:t>  0.3x size — thin, faint wisps</a:t>
+            </a:r>
+            <a:endParaRPr lang="en-US" sz="1100" dirty="0"/>
+          </a:p>
+          <a:p>
+            <a:pPr indent="0" marL="0">
+              <a:lnSpc>
+                <a:spcPct val="120000"/>
+              </a:lnSpc>
+              <a:buNone/>
+            </a:pPr>
+            <a:endParaRPr lang="en-US" sz="1100" dirty="0"/>
+          </a:p>
+          <a:p>
+            <a:pPr indent="0" marL="0">
+              <a:lnSpc>
+                <a:spcPct val="120000"/>
+              </a:lnSpc>
+              <a:buNone/>
+            </a:pPr>
+            <a:r>
+              <a:rPr lang="en-US" sz="1000" dirty="0">
+                <a:solidFill>
+                  <a:srgbClr val="94A3B8"/>
+                </a:solidFill>
+                <a:latin typeface="Calibri" pitchFamily="34" charset="0"/>
+                <a:ea typeface="Calibri" pitchFamily="34" charset="-122"/>
+                <a:cs typeface="Calibri" pitchFamily="34" charset="-120"/>
+              </a:rPr>
+              <a:t>High concentration (India, Sahara):</a:t>
+            </a:r>
+            <a:endParaRPr lang="en-US" sz="1100" dirty="0"/>
+          </a:p>
+          <a:p>
+            <a:pPr indent="0" marL="0">
+              <a:lnSpc>
+                <a:spcPct val="120000"/>
+              </a:lnSpc>
+              <a:buNone/>
+            </a:pPr>
+            <a:r>
+              <a:rPr lang="en-US" sz="1000" b="1" dirty="0">
+                <a:solidFill>
+                  <a:srgbClr val="E2E8F0"/>
+                </a:solidFill>
+                <a:latin typeface="Calibri" pitchFamily="34" charset="0"/>
+                <a:ea typeface="Calibri" pitchFamily="34" charset="-122"/>
+                <a:cs typeface="Calibri" pitchFamily="34" charset="-120"/>
+              </a:rPr>
+              <a:t>  1.8x size — thick, bright trails</a:t>
+            </a:r>
+            <a:endParaRPr lang="en-US" sz="1100" dirty="0"/>
+          </a:p>
+          <a:p>
+            <a:pPr indent="0" marL="0">
+              <a:lnSpc>
+                <a:spcPct val="120000"/>
+              </a:lnSpc>
+              <a:buNone/>
+            </a:pPr>
+            <a:endParaRPr lang="en-US" sz="1100" dirty="0"/>
+          </a:p>
+          <a:p>
+            <a:pPr indent="0" marL="0">
+              <a:lnSpc>
+                <a:spcPct val="120000"/>
+              </a:lnSpc>
+              <a:buNone/>
+            </a:pPr>
+            <a:r>
+              <a:rPr lang="en-US" sz="900" dirty="0">
+                <a:solidFill>
+                  <a:srgbClr val="76B900"/>
+                </a:solidFill>
+                <a:latin typeface="Calibri" pitchFamily="34" charset="0"/>
+                <a:ea typeface="Calibri" pitchFamily="34" charset="-122"/>
+                <a:cs typeface="Calibri" pitchFamily="34" charset="-120"/>
+              </a:rPr>
+              <a:t>Zero performance cost — runs per-vertex on GPU</a:t>
+            </a:r>
+            <a:endParaRPr lang="en-US" sz="1100" dirty="0"/>
+          </a:p>
+        </p:txBody>
+      </p:sp>
+      <p:sp>
+        <p:nvSpPr>
+          <p:cNvPr id="9" name="Shape 7"/>
+          <p:cNvSpPr/>
+          <p:nvPr/>
+        </p:nvSpPr>
+        <p:spPr>
+          <a:xfrm>
+            <a:off x="4663440" y="1508760"/>
+            <a:ext cx="3749040" cy="3200400"/>
+          </a:xfrm>
+          <a:prstGeom prst="rect">
+            <a:avLst>
+              <a:gd name="adj" fmla="val 2000"/>
+            </a:avLst>
+          </a:prstGeom>
+          <a:solidFill>
+            <a:srgbClr val="1A2236"/>
+          </a:solidFill>
+          <a:ln/>
+        </p:spPr>
+      </p:sp>
+      <p:sp>
+        <p:nvSpPr>
+          <p:cNvPr id="10" name="Shape 8"/>
+          <p:cNvSpPr/>
+          <p:nvPr/>
+        </p:nvSpPr>
+        <p:spPr>
+          <a:xfrm>
+            <a:off x="4663440" y="1508760"/>
+            <a:ext cx="3749040" cy="320040"/>
+          </a:xfrm>
+          <a:prstGeom prst="rect">
+            <a:avLst>
+              <a:gd name="adj" fmla="val 20000"/>
+            </a:avLst>
+          </a:prstGeom>
+          <a:solidFill>
+            <a:srgbClr val="8B5CF6"/>
+          </a:solidFill>
+          <a:ln/>
+        </p:spPr>
+      </p:sp>
+      <p:sp>
+        <p:nvSpPr>
+          <p:cNvPr id="11" name="Text 9"/>
+          <p:cNvSpPr/>
+          <p:nvPr/>
+        </p:nvSpPr>
+        <p:spPr>
+          <a:xfrm>
+            <a:off x="4846320" y="1527048"/>
+            <a:ext cx="3383280" cy="283464"/>
+          </a:xfrm>
+          <a:prstGeom prst="rect">
+            <a:avLst/>
+          </a:prstGeom>
+          <a:noFill/>
+          <a:ln/>
+        </p:spPr>
+        <p:txBody>
+          <a:bodyPr wrap="square" lIns="0" tIns="0" rIns="0" bIns="0" rtlCol="0" anchor="ctr"/>
+          <a:lstStyle/>
+          <a:p>
+            <a:pPr indent="0" marL="0">
+              <a:buNone/>
+            </a:pPr>
+            <a:r>
+              <a:rPr lang="en-US" sz="900" b="1" spc="200" kern="0" dirty="0">
+                <a:solidFill>
+                  <a:srgbClr val="8B5CF6"/>
+                </a:solidFill>
+                <a:latin typeface="Calibri" pitchFamily="34" charset="0"/>
+                <a:ea typeface="Calibri" pitchFamily="34" charset="-122"/>
+                <a:cs typeface="Calibri" pitchFamily="34" charset="-120"/>
+              </a:rPr>
+              <a:t>GPU BLOOM POST-PROCESSING</a:t>
+            </a:r>
+            <a:endParaRPr lang="en-US" sz="900" dirty="0"/>
+          </a:p>
+        </p:txBody>
+      </p:sp>
+      <p:sp>
+        <p:nvSpPr>
+          <p:cNvPr id="12" name="Text 10"/>
+          <p:cNvSpPr/>
+          <p:nvPr/>
+        </p:nvSpPr>
+        <p:spPr>
+          <a:xfrm>
+            <a:off x="4846320" y="1965960"/>
+            <a:ext cx="3383280" cy="2560320"/>
+          </a:xfrm>
+          <a:prstGeom prst="rect">
+            <a:avLst/>
+          </a:prstGeom>
+          <a:noFill/>
+          <a:ln/>
+        </p:spPr>
+        <p:txBody>
+          <a:bodyPr wrap="square" lIns="0" tIns="0" rIns="0" bIns="0" rtlCol="0" anchor="ctr"/>
+          <a:lstStyle/>
+          <a:p>
+            <a:pPr indent="0" marL="0">
+              <a:lnSpc>
+                <a:spcPct val="120000"/>
+              </a:lnSpc>
+              <a:buNone/>
+            </a:pPr>
+            <a:r>
+              <a:rPr lang="en-US" sz="1100" dirty="0">
+                <a:solidFill>
+                  <a:srgbClr val="E2E8F0"/>
+                </a:solidFill>
+                <a:latin typeface="Calibri" pitchFamily="34" charset="0"/>
+                <a:ea typeface="Calibri" pitchFamily="34" charset="-122"/>
+                <a:cs typeface="Calibri" pitchFamily="34" charset="-120"/>
+              </a:rPr>
+              <a:t>2 extra GPU render passes:</a:t>
+            </a:r>
+            <a:endParaRPr lang="en-US" sz="1100" dirty="0"/>
+          </a:p>
+          <a:p>
+            <a:pPr indent="0" marL="0">
+              <a:lnSpc>
+                <a:spcPct val="120000"/>
+              </a:lnSpc>
+              <a:buNone/>
+            </a:pPr>
+            <a:endParaRPr lang="en-US" sz="1100" dirty="0"/>
+          </a:p>
+          <a:p>
+            <a:pPr indent="0" marL="0">
+              <a:lnSpc>
+                <a:spcPct val="120000"/>
+              </a:lnSpc>
+              <a:buNone/>
+            </a:pPr>
+            <a:r>
+              <a:rPr lang="en-US" sz="1000" b="1" dirty="0">
+                <a:solidFill>
+                  <a:srgbClr val="E2E8F0"/>
+                </a:solidFill>
+                <a:latin typeface="Calibri" pitchFamily="34" charset="0"/>
+                <a:ea typeface="Calibri" pitchFamily="34" charset="-122"/>
+                <a:cs typeface="Calibri" pitchFamily="34" charset="-120"/>
+              </a:rPr>
+              <a:t>Pass 4: Horizontal Gaussian blur</a:t>
+            </a:r>
+            <a:endParaRPr lang="en-US" sz="1100" dirty="0"/>
+          </a:p>
+          <a:p>
+            <a:pPr indent="0" marL="0">
+              <a:lnSpc>
+                <a:spcPct val="120000"/>
+              </a:lnSpc>
+              <a:buNone/>
+            </a:pPr>
+            <a:r>
+              <a:rPr lang="en-US" sz="1000" dirty="0">
+                <a:solidFill>
+                  <a:srgbClr val="94A3B8"/>
+                </a:solidFill>
+                <a:latin typeface="Calibri" pitchFamily="34" charset="0"/>
+                <a:ea typeface="Calibri" pitchFamily="34" charset="-122"/>
+                <a:cs typeface="Calibri" pitchFamily="34" charset="-120"/>
+              </a:rPr>
+              <a:t>  9-tap separable filter</a:t>
+            </a:r>
+            <a:endParaRPr lang="en-US" sz="1100" dirty="0"/>
+          </a:p>
+          <a:p>
+            <a:pPr indent="0" marL="0">
+              <a:lnSpc>
+                <a:spcPct val="120000"/>
+              </a:lnSpc>
+              <a:buNone/>
+            </a:pPr>
+            <a:r>
+              <a:rPr lang="en-US" sz="1000" dirty="0">
+                <a:solidFill>
+                  <a:srgbClr val="94A3B8"/>
+                </a:solidFill>
+                <a:latin typeface="Calibri" pitchFamily="34" charset="0"/>
+                <a:ea typeface="Calibri" pitchFamily="34" charset="-122"/>
+                <a:cs typeface="Calibri" pitchFamily="34" charset="-120"/>
+              </a:rPr>
+              <a:t>  Half resolution for performance</a:t>
+            </a:r>
+            <a:endParaRPr lang="en-US" sz="1100" dirty="0"/>
+          </a:p>
+          <a:p>
+            <a:pPr indent="0" marL="0">
+              <a:lnSpc>
+                <a:spcPct val="120000"/>
+              </a:lnSpc>
+              <a:buNone/>
+            </a:pPr>
+            <a:endParaRPr lang="en-US" sz="1100" dirty="0"/>
+          </a:p>
+          <a:p>
+            <a:pPr indent="0" marL="0">
+              <a:lnSpc>
+                <a:spcPct val="120000"/>
+              </a:lnSpc>
+              <a:buNone/>
+            </a:pPr>
+            <a:r>
+              <a:rPr lang="en-US" sz="1000" b="1" dirty="0">
+                <a:solidFill>
+                  <a:srgbClr val="E2E8F0"/>
+                </a:solidFill>
+                <a:latin typeface="Calibri" pitchFamily="34" charset="0"/>
+                <a:ea typeface="Calibri" pitchFamily="34" charset="-122"/>
+                <a:cs typeface="Calibri" pitchFamily="34" charset="-120"/>
+              </a:rPr>
+              <a:t>Pass 5: Vertical blur + composite</a:t>
+            </a:r>
+            <a:endParaRPr lang="en-US" sz="1100" dirty="0"/>
+          </a:p>
+          <a:p>
+            <a:pPr indent="0" marL="0">
+              <a:lnSpc>
+                <a:spcPct val="120000"/>
+              </a:lnSpc>
+              <a:buNone/>
+            </a:pPr>
+            <a:r>
+              <a:rPr lang="en-US" sz="1000" dirty="0">
+                <a:solidFill>
+                  <a:srgbClr val="94A3B8"/>
+                </a:solidFill>
+                <a:latin typeface="Calibri" pitchFamily="34" charset="0"/>
+                <a:ea typeface="Calibri" pitchFamily="34" charset="-122"/>
+                <a:cs typeface="Calibri" pitchFamily="34" charset="-120"/>
+              </a:rPr>
+              <a:t>  Additive blending onto trail texture</a:t>
+            </a:r>
+            <a:endParaRPr lang="en-US" sz="1100" dirty="0"/>
+          </a:p>
+          <a:p>
+            <a:pPr indent="0" marL="0">
+              <a:lnSpc>
+                <a:spcPct val="120000"/>
+              </a:lnSpc>
+              <a:buNone/>
+            </a:pPr>
+            <a:r>
+              <a:rPr lang="en-US" sz="1000" dirty="0">
+                <a:solidFill>
+                  <a:srgbClr val="94A3B8"/>
+                </a:solidFill>
+                <a:latin typeface="Calibri" pitchFamily="34" charset="0"/>
+                <a:ea typeface="Calibri" pitchFamily="34" charset="-122"/>
+                <a:cs typeface="Calibri" pitchFamily="34" charset="-120"/>
+              </a:rPr>
+              <a:t>  Brightness threshold: 0.08</a:t>
+            </a:r>
+            <a:endParaRPr lang="en-US" sz="1100" dirty="0"/>
+          </a:p>
+          <a:p>
+            <a:pPr indent="0" marL="0">
+              <a:lnSpc>
+                <a:spcPct val="120000"/>
+              </a:lnSpc>
+              <a:buNone/>
+            </a:pPr>
+            <a:endParaRPr lang="en-US" sz="1100" dirty="0"/>
+          </a:p>
+          <a:p>
+            <a:pPr indent="0" marL="0">
+              <a:lnSpc>
+                <a:spcPct val="120000"/>
+              </a:lnSpc>
+              <a:buNone/>
+            </a:pPr>
+            <a:r>
+              <a:rPr lang="en-US" sz="1000" dirty="0">
+                <a:solidFill>
+                  <a:srgbClr val="8B5CF6"/>
+                </a:solidFill>
+                <a:latin typeface="Calibri" pitchFamily="34" charset="0"/>
+                <a:ea typeface="Calibri" pitchFamily="34" charset="-122"/>
+                <a:cs typeface="Calibri" pitchFamily="34" charset="-120"/>
+              </a:rPr>
+              <a:t>Result: cinematic neon glow halos</a:t>
+            </a:r>
+            <a:endParaRPr lang="en-US" sz="1100" dirty="0"/>
+          </a:p>
+          <a:p>
+            <a:pPr indent="0" marL="0">
+              <a:lnSpc>
+                <a:spcPct val="120000"/>
+              </a:lnSpc>
+              <a:buNone/>
+            </a:pPr>
+            <a:r>
+              <a:rPr lang="en-US" sz="1000" dirty="0">
+                <a:solidFill>
+                  <a:srgbClr val="8B5CF6"/>
+                </a:solidFill>
+                <a:latin typeface="Calibri" pitchFamily="34" charset="0"/>
+                <a:ea typeface="Calibri" pitchFamily="34" charset="-122"/>
+                <a:cs typeface="Calibri" pitchFamily="34" charset="-120"/>
+              </a:rPr>
+              <a:t>around high-concentration hotspots</a:t>
+            </a:r>
+            <a:endParaRPr lang="en-US" sz="1100" dirty="0"/>
+          </a:p>
+          <a:p>
+            <a:pPr indent="0" marL="0">
+              <a:lnSpc>
+                <a:spcPct val="120000"/>
+              </a:lnSpc>
+              <a:buNone/>
+            </a:pPr>
+            <a:endParaRPr lang="en-US" sz="1100" dirty="0"/>
+          </a:p>
+          <a:p>
+            <a:pPr indent="0" marL="0">
+              <a:lnSpc>
+                <a:spcPct val="120000"/>
+              </a:lnSpc>
+              <a:buNone/>
+            </a:pPr>
+            <a:r>
+              <a:rPr lang="en-US" sz="900" dirty="0">
+                <a:solidFill>
+                  <a:srgbClr val="76B900"/>
+                </a:solidFill>
+                <a:latin typeface="Calibri" pitchFamily="34" charset="0"/>
+                <a:ea typeface="Calibri" pitchFamily="34" charset="-122"/>
+                <a:cs typeface="Calibri" pitchFamily="34" charset="-120"/>
+              </a:rPr>
+              <a:t>Only bright particles bloom — clean air stays dark</a:t>
+            </a:r>
+            <a:endParaRPr lang="en-US" sz="1100" dirty="0"/>
+          </a:p>
+        </p:txBody>
+      </p:sp>
     </p:spTree>
   </p:cSld>
   <p:clrMapOvr>
@@ -7196,7 +10416,7 @@
         <p:spPr>
           <a:xfrm>
             <a:off x="0" y="0"/>
-            <a:ext cx="73152" cy="5143500"/>
+            <a:ext cx="64008" cy="5143500"/>
           </a:xfrm>
           <a:prstGeom prst="rect">
             <a:avLst/>
@@ -7216,7 +10436,7 @@
         <p:spPr>
           <a:xfrm>
             <a:off x="731520" y="365760"/>
-            <a:ext cx="7315200" cy="457200"/>
+            <a:ext cx="7315200" cy="365760"/>
           </a:xfrm>
           <a:prstGeom prst="rect">
             <a:avLst/>
@@ -7240,7 +10460,7 @@
                 <a:ea typeface="Calibri" pitchFamily="34" charset="-122"/>
                 <a:cs typeface="Calibri" pitchFamily="34" charset="-120"/>
               </a:rPr>
-              <a:t>INTERACTIVE FEATURES</a:t>
+              <a:t>STEP 5: ROBINSON PROJECTION</a:t>
             </a:r>
             <a:endParaRPr lang="en-US" sz="1100" dirty="0"/>
           </a:p>
@@ -7254,24 +10474,24 @@
         </p:nvSpPr>
         <p:spPr>
           <a:xfrm>
-            <a:off x="731520" y="777240"/>
-            <a:ext cx="7315200" cy="548640"/>
-          </a:xfrm>
-          <a:prstGeom prst="rect">
-            <a:avLst/>
-          </a:prstGeom>
-          <a:noFill/>
-          <a:ln/>
-        </p:spPr>
-        <p:txBody>
-          <a:bodyPr wrap="square" lIns="0" tIns="0" rIns="0" bIns="0" rtlCol="0" anchor="ctr"/>
-          <a:lstStyle/>
-          <a:p>
-            <a:pPr indent="0" marL="0">
-              <a:buNone/>
-            </a:pPr>
-            <a:r>
-              <a:rPr lang="en-US" sz="3200" dirty="0">
+            <a:off x="731520" y="731520"/>
+            <a:ext cx="8229600" cy="548640"/>
+          </a:xfrm>
+          <a:prstGeom prst="rect">
+            <a:avLst/>
+          </a:prstGeom>
+          <a:noFill/>
+          <a:ln/>
+        </p:spPr>
+        <p:txBody>
+          <a:bodyPr wrap="square" lIns="0" tIns="0" rIns="0" bIns="0" rtlCol="0" anchor="ctr"/>
+          <a:lstStyle/>
+          <a:p>
+            <a:pPr indent="0" marL="0">
+              <a:buNone/>
+            </a:pPr>
+            <a:r>
+              <a:rPr lang="en-US" sz="2800" dirty="0">
                 <a:solidFill>
                   <a:srgbClr val="E2E8F0"/>
                 </a:solidFill>
@@ -7279,9 +10499,9 @@
                 <a:ea typeface="Arial Black" pitchFamily="34" charset="-122"/>
                 <a:cs typeface="Arial Black" pitchFamily="34" charset="-120"/>
               </a:rPr>
-              <a:t>Live Demo</a:t>
-            </a:r>
-            <a:endParaRPr lang="en-US" sz="3200" dirty="0"/>
+              <a:t>Dark WMO Basemap + Full-World View</a:t>
+            </a:r>
+            <a:endParaRPr lang="en-US" sz="2800" dirty="0"/>
           </a:p>
         </p:txBody>
       </p:sp>
@@ -7293,107 +10513,462 @@
         </p:nvSpPr>
         <p:spPr>
           <a:xfrm>
-            <a:off x="731520" y="1325880"/>
-            <a:ext cx="7315200" cy="274320"/>
-          </a:xfrm>
-          <a:prstGeom prst="rect">
-            <a:avLst/>
-          </a:prstGeom>
-          <a:noFill/>
-          <a:ln/>
-        </p:spPr>
-        <p:txBody>
-          <a:bodyPr wrap="square" lIns="0" tIns="0" rIns="0" bIns="0" rtlCol="0" anchor="ctr"/>
-          <a:lstStyle/>
-          <a:p>
-            <a:pPr indent="0" marL="0">
-              <a:buNone/>
-            </a:pPr>
-            <a:r>
-              <a:rPr lang="en-US" sz="1400" dirty="0">
+            <a:off x="731520" y="1417320"/>
+            <a:ext cx="7680960" cy="548640"/>
+          </a:xfrm>
+          <a:prstGeom prst="rect">
+            <a:avLst/>
+          </a:prstGeom>
+          <a:noFill/>
+          <a:ln/>
+        </p:spPr>
+        <p:txBody>
+          <a:bodyPr wrap="square" lIns="0" tIns="0" rIns="0" bIns="0" rtlCol="0" anchor="ctr"/>
+          <a:lstStyle/>
+          <a:p>
+            <a:pPr indent="0" marL="0">
+              <a:lnSpc>
+                <a:spcPct val="140000"/>
+              </a:lnSpc>
+              <a:buNone/>
+            </a:pPr>
+            <a:r>
+              <a:rPr lang="en-US" sz="1200" dirty="0">
+                <a:solidFill>
+                  <a:srgbClr val="94A3B8"/>
+                </a:solidFill>
+                <a:latin typeface="Calibri" pitchFamily="34" charset="0"/>
+                <a:ea typeface="Calibri" pitchFamily="34" charset="-122"/>
+                <a:cs typeface="Calibri" pitchFamily="34" charset="-120"/>
+              </a:rPr>
+              <a:t>Robinson projection (WKID 54030) shows the entire world with minimal area distortion.</a:t>
+            </a:r>
+            <a:endParaRPr lang="en-US" sz="1200" dirty="0"/>
+          </a:p>
+          <a:p>
+            <a:pPr indent="0" marL="0">
+              <a:lnSpc>
+                <a:spcPct val="140000"/>
+              </a:lnSpc>
+              <a:buNone/>
+            </a:pPr>
+            <a:r>
+              <a:rPr lang="en-US" sz="1200" dirty="0">
+                <a:solidFill>
+                  <a:srgbClr val="94A3B8"/>
+                </a:solidFill>
+                <a:latin typeface="Calibri" pitchFamily="34" charset="0"/>
+                <a:ea typeface="Calibri" pitchFamily="34" charset="-122"/>
+                <a:cs typeface="Calibri" pitchFamily="34" charset="-120"/>
+              </a:rPr>
+              <a:t>Custom dark-styled WMO Robinson Agreed vector tiles provide the basemap.</a:t>
+            </a:r>
+            <a:endParaRPr lang="en-US" sz="1200" dirty="0"/>
+          </a:p>
+        </p:txBody>
+      </p:sp>
+      <p:sp>
+        <p:nvSpPr>
+          <p:cNvPr id="6" name="Shape 4"/>
+          <p:cNvSpPr/>
+          <p:nvPr/>
+        </p:nvSpPr>
+        <p:spPr>
+          <a:xfrm>
+            <a:off x="731520" y="2194560"/>
+            <a:ext cx="7680960" cy="2560320"/>
+          </a:xfrm>
+          <a:prstGeom prst="rect">
+            <a:avLst>
+              <a:gd name="adj" fmla="val 2500"/>
+            </a:avLst>
+          </a:prstGeom>
+          <a:solidFill>
+            <a:srgbClr val="1A2236"/>
+          </a:solidFill>
+          <a:ln/>
+        </p:spPr>
+      </p:sp>
+      <p:sp>
+        <p:nvSpPr>
+          <p:cNvPr id="7" name="Text 5"/>
+          <p:cNvSpPr/>
+          <p:nvPr/>
+        </p:nvSpPr>
+        <p:spPr>
+          <a:xfrm>
+            <a:off x="1005840" y="2286000"/>
+            <a:ext cx="3657600" cy="274320"/>
+          </a:xfrm>
+          <a:prstGeom prst="rect">
+            <a:avLst/>
+          </a:prstGeom>
+          <a:noFill/>
+          <a:ln/>
+        </p:spPr>
+        <p:txBody>
+          <a:bodyPr wrap="square" lIns="0" tIns="0" rIns="0" bIns="0" rtlCol="0" anchor="ctr"/>
+          <a:lstStyle/>
+          <a:p>
+            <a:pPr indent="0" marL="0">
+              <a:buNone/>
+            </a:pPr>
+            <a:r>
+              <a:rPr lang="en-US" sz="1000" spc="300" kern="0" dirty="0">
                 <a:solidFill>
                   <a:srgbClr val="00B4D8"/>
+                </a:solidFill>
+                <a:latin typeface="Calibri" pitchFamily="34" charset="0"/>
+                <a:ea typeface="Calibri" pitchFamily="34" charset="-122"/>
+                <a:cs typeface="Calibri" pitchFamily="34" charset="-120"/>
+              </a:rPr>
+              <a:t>CUSTOM DARK STYLE</a:t>
+            </a:r>
+            <a:endParaRPr lang="en-US" sz="1000" dirty="0"/>
+          </a:p>
+        </p:txBody>
+      </p:sp>
+      <p:sp>
+        <p:nvSpPr>
+          <p:cNvPr id="8" name="Shape 6"/>
+          <p:cNvSpPr/>
+          <p:nvPr/>
+        </p:nvSpPr>
+        <p:spPr>
+          <a:xfrm>
+            <a:off x="1188720" y="2697480"/>
+            <a:ext cx="228600" cy="182880"/>
+          </a:xfrm>
+          <a:prstGeom prst="rect">
+            <a:avLst>
+              <a:gd name="adj" fmla="val 15000"/>
+            </a:avLst>
+          </a:prstGeom>
+          <a:solidFill>
+            <a:srgbClr val="050810"/>
+          </a:solidFill>
+          <a:ln w="6350">
+            <a:solidFill>
+              <a:srgbClr val="2A3A50"/>
+            </a:solidFill>
+            <a:prstDash val="solid"/>
+          </a:ln>
+        </p:spPr>
+      </p:sp>
+      <p:sp>
+        <p:nvSpPr>
+          <p:cNvPr id="9" name="Text 7"/>
+          <p:cNvSpPr/>
+          <p:nvPr/>
+        </p:nvSpPr>
+        <p:spPr>
+          <a:xfrm>
+            <a:off x="1554480" y="2679192"/>
+            <a:ext cx="1371600" cy="201168"/>
+          </a:xfrm>
+          <a:prstGeom prst="rect">
+            <a:avLst/>
+          </a:prstGeom>
+          <a:noFill/>
+          <a:ln/>
+        </p:spPr>
+        <p:txBody>
+          <a:bodyPr wrap="square" lIns="0" tIns="0" rIns="0" bIns="0" rtlCol="0" anchor="ctr"/>
+          <a:lstStyle/>
+          <a:p>
+            <a:pPr indent="0" marL="0">
+              <a:buNone/>
+            </a:pPr>
+            <a:r>
+              <a:rPr lang="en-US" sz="1100" b="1" dirty="0">
+                <a:solidFill>
+                  <a:srgbClr val="E2E8F0"/>
+                </a:solidFill>
+                <a:latin typeface="Calibri" pitchFamily="34" charset="0"/>
+                <a:ea typeface="Calibri" pitchFamily="34" charset="-122"/>
+                <a:cs typeface="Calibri" pitchFamily="34" charset="-120"/>
+              </a:rPr>
+              <a:t>Ocean</a:t>
+            </a:r>
+            <a:endParaRPr lang="en-US" sz="1100" dirty="0"/>
+          </a:p>
+        </p:txBody>
+      </p:sp>
+      <p:sp>
+        <p:nvSpPr>
+          <p:cNvPr id="10" name="Text 8"/>
+          <p:cNvSpPr/>
+          <p:nvPr/>
+        </p:nvSpPr>
+        <p:spPr>
+          <a:xfrm>
+            <a:off x="3017520" y="2679192"/>
+            <a:ext cx="1097280" cy="201168"/>
+          </a:xfrm>
+          <a:prstGeom prst="rect">
+            <a:avLst/>
+          </a:prstGeom>
+          <a:noFill/>
+          <a:ln/>
+        </p:spPr>
+        <p:txBody>
+          <a:bodyPr wrap="square" lIns="0" tIns="0" rIns="0" bIns="0" rtlCol="0" anchor="ctr"/>
+          <a:lstStyle/>
+          <a:p>
+            <a:pPr indent="0" marL="0">
+              <a:buNone/>
+            </a:pPr>
+            <a:r>
+              <a:rPr lang="en-US" sz="1000" dirty="0">
+                <a:solidFill>
+                  <a:srgbClr val="94A3B8"/>
                 </a:solidFill>
                 <a:latin typeface="Consolas" pitchFamily="34" charset="0"/>
                 <a:ea typeface="Consolas" pitchFamily="34" charset="-122"/>
                 <a:cs typeface="Consolas" pitchFamily="34" charset="-120"/>
               </a:rPr>
-              <a:t>garridolecca.github.io/aerosols-globe</a:t>
-            </a:r>
-            <a:endParaRPr lang="en-US" sz="1400" dirty="0"/>
-          </a:p>
-        </p:txBody>
-      </p:sp>
-      <p:sp>
-        <p:nvSpPr>
-          <p:cNvPr id="6" name="Shape 4"/>
-          <p:cNvSpPr/>
-          <p:nvPr/>
-        </p:nvSpPr>
-        <p:spPr>
-          <a:xfrm>
-            <a:off x="731520" y="1920240"/>
-            <a:ext cx="3749040" cy="1097280"/>
+              <a:t>#050810</a:t>
+            </a:r>
+            <a:endParaRPr lang="en-US" sz="1000" dirty="0"/>
+          </a:p>
+        </p:txBody>
+      </p:sp>
+      <p:sp>
+        <p:nvSpPr>
+          <p:cNvPr id="11" name="Text 9"/>
+          <p:cNvSpPr/>
+          <p:nvPr/>
+        </p:nvSpPr>
+        <p:spPr>
+          <a:xfrm>
+            <a:off x="4206240" y="2679192"/>
+            <a:ext cx="3657600" cy="201168"/>
+          </a:xfrm>
+          <a:prstGeom prst="rect">
+            <a:avLst/>
+          </a:prstGeom>
+          <a:noFill/>
+          <a:ln/>
+        </p:spPr>
+        <p:txBody>
+          <a:bodyPr wrap="square" lIns="0" tIns="0" rIns="0" bIns="0" rtlCol="0" anchor="ctr"/>
+          <a:lstStyle/>
+          <a:p>
+            <a:pPr indent="0" marL="0">
+              <a:buNone/>
+            </a:pPr>
+            <a:r>
+              <a:rPr lang="en-US" sz="1000" dirty="0">
+                <a:solidFill>
+                  <a:srgbClr val="94A3B8"/>
+                </a:solidFill>
+                <a:latin typeface="Calibri" pitchFamily="34" charset="0"/>
+                <a:ea typeface="Calibri" pitchFamily="34" charset="-122"/>
+                <a:cs typeface="Calibri" pitchFamily="34" charset="-120"/>
+              </a:rPr>
+              <a:t>Near pure black</a:t>
+            </a:r>
+            <a:endParaRPr lang="en-US" sz="1000" dirty="0"/>
+          </a:p>
+        </p:txBody>
+      </p:sp>
+      <p:sp>
+        <p:nvSpPr>
+          <p:cNvPr id="12" name="Shape 10"/>
+          <p:cNvSpPr/>
+          <p:nvPr/>
+        </p:nvSpPr>
+        <p:spPr>
+          <a:xfrm>
+            <a:off x="1188720" y="3017520"/>
+            <a:ext cx="228600" cy="182880"/>
           </a:xfrm>
           <a:prstGeom prst="rect">
             <a:avLst>
-              <a:gd name="adj" fmla="val 6667"/>
+              <a:gd name="adj" fmla="val 15000"/>
             </a:avLst>
           </a:prstGeom>
           <a:solidFill>
-            <a:srgbClr val="1A2236"/>
+            <a:srgbClr val="0C1018"/>
           </a:solidFill>
-          <a:ln/>
-        </p:spPr>
-      </p:sp>
-      <p:sp>
-        <p:nvSpPr>
-          <p:cNvPr id="7" name="Shape 5"/>
-          <p:cNvSpPr/>
-          <p:nvPr/>
-        </p:nvSpPr>
-        <p:spPr>
-          <a:xfrm>
-            <a:off x="731520" y="1920240"/>
-            <a:ext cx="54864" cy="1097280"/>
+          <a:ln w="6350">
+            <a:solidFill>
+              <a:srgbClr val="2A3A50"/>
+            </a:solidFill>
+            <a:prstDash val="solid"/>
+          </a:ln>
+        </p:spPr>
+      </p:sp>
+      <p:sp>
+        <p:nvSpPr>
+          <p:cNvPr id="13" name="Text 11"/>
+          <p:cNvSpPr/>
+          <p:nvPr/>
+        </p:nvSpPr>
+        <p:spPr>
+          <a:xfrm>
+            <a:off x="1554480" y="2999232"/>
+            <a:ext cx="1371600" cy="201168"/>
+          </a:xfrm>
+          <a:prstGeom prst="rect">
+            <a:avLst/>
+          </a:prstGeom>
+          <a:noFill/>
+          <a:ln/>
+        </p:spPr>
+        <p:txBody>
+          <a:bodyPr wrap="square" lIns="0" tIns="0" rIns="0" bIns="0" rtlCol="0" anchor="ctr"/>
+          <a:lstStyle/>
+          <a:p>
+            <a:pPr indent="0" marL="0">
+              <a:buNone/>
+            </a:pPr>
+            <a:r>
+              <a:rPr lang="en-US" sz="1100" b="1" dirty="0">
+                <a:solidFill>
+                  <a:srgbClr val="E2E8F0"/>
+                </a:solidFill>
+                <a:latin typeface="Calibri" pitchFamily="34" charset="0"/>
+                <a:ea typeface="Calibri" pitchFamily="34" charset="-122"/>
+                <a:cs typeface="Calibri" pitchFamily="34" charset="-120"/>
+              </a:rPr>
+              <a:t>Land</a:t>
+            </a:r>
+            <a:endParaRPr lang="en-US" sz="1100" dirty="0"/>
+          </a:p>
+        </p:txBody>
+      </p:sp>
+      <p:sp>
+        <p:nvSpPr>
+          <p:cNvPr id="14" name="Text 12"/>
+          <p:cNvSpPr/>
+          <p:nvPr/>
+        </p:nvSpPr>
+        <p:spPr>
+          <a:xfrm>
+            <a:off x="3017520" y="2999232"/>
+            <a:ext cx="1097280" cy="201168"/>
+          </a:xfrm>
+          <a:prstGeom prst="rect">
+            <a:avLst/>
+          </a:prstGeom>
+          <a:noFill/>
+          <a:ln/>
+        </p:spPr>
+        <p:txBody>
+          <a:bodyPr wrap="square" lIns="0" tIns="0" rIns="0" bIns="0" rtlCol="0" anchor="ctr"/>
+          <a:lstStyle/>
+          <a:p>
+            <a:pPr indent="0" marL="0">
+              <a:buNone/>
+            </a:pPr>
+            <a:r>
+              <a:rPr lang="en-US" sz="1000" dirty="0">
+                <a:solidFill>
+                  <a:srgbClr val="94A3B8"/>
+                </a:solidFill>
+                <a:latin typeface="Consolas" pitchFamily="34" charset="0"/>
+                <a:ea typeface="Consolas" pitchFamily="34" charset="-122"/>
+                <a:cs typeface="Consolas" pitchFamily="34" charset="-120"/>
+              </a:rPr>
+              <a:t>#0c1018</a:t>
+            </a:r>
+            <a:endParaRPr lang="en-US" sz="1000" dirty="0"/>
+          </a:p>
+        </p:txBody>
+      </p:sp>
+      <p:sp>
+        <p:nvSpPr>
+          <p:cNvPr id="15" name="Text 13"/>
+          <p:cNvSpPr/>
+          <p:nvPr/>
+        </p:nvSpPr>
+        <p:spPr>
+          <a:xfrm>
+            <a:off x="4206240" y="2999232"/>
+            <a:ext cx="3657600" cy="201168"/>
+          </a:xfrm>
+          <a:prstGeom prst="rect">
+            <a:avLst/>
+          </a:prstGeom>
+          <a:noFill/>
+          <a:ln/>
+        </p:spPr>
+        <p:txBody>
+          <a:bodyPr wrap="square" lIns="0" tIns="0" rIns="0" bIns="0" rtlCol="0" anchor="ctr"/>
+          <a:lstStyle/>
+          <a:p>
+            <a:pPr indent="0" marL="0">
+              <a:buNone/>
+            </a:pPr>
+            <a:r>
+              <a:rPr lang="en-US" sz="1000" dirty="0">
+                <a:solidFill>
+                  <a:srgbClr val="94A3B8"/>
+                </a:solidFill>
+                <a:latin typeface="Calibri" pitchFamily="34" charset="0"/>
+                <a:ea typeface="Calibri" pitchFamily="34" charset="-122"/>
+                <a:cs typeface="Calibri" pitchFamily="34" charset="-120"/>
+              </a:rPr>
+              <a:t>Very dark blue-black</a:t>
+            </a:r>
+            <a:endParaRPr lang="en-US" sz="1000" dirty="0"/>
+          </a:p>
+        </p:txBody>
+      </p:sp>
+      <p:sp>
+        <p:nvSpPr>
+          <p:cNvPr id="16" name="Shape 14"/>
+          <p:cNvSpPr/>
+          <p:nvPr/>
+        </p:nvSpPr>
+        <p:spPr>
+          <a:xfrm>
+            <a:off x="1188720" y="3337560"/>
+            <a:ext cx="228600" cy="182880"/>
           </a:xfrm>
           <a:prstGeom prst="rect">
             <a:avLst>
-              <a:gd name="adj" fmla="val 50000"/>
+              <a:gd name="adj" fmla="val 15000"/>
             </a:avLst>
           </a:prstGeom>
           <a:solidFill>
-            <a:srgbClr val="8B5CF6"/>
+            <a:srgbClr val="1A3050"/>
           </a:solidFill>
-          <a:ln/>
-        </p:spPr>
-      </p:sp>
-      <p:sp>
-        <p:nvSpPr>
-          <p:cNvPr id="8" name="Text 6"/>
-          <p:cNvSpPr/>
-          <p:nvPr/>
-        </p:nvSpPr>
-        <p:spPr>
-          <a:xfrm>
-            <a:off x="960120" y="2029968"/>
-            <a:ext cx="3291840" cy="274320"/>
-          </a:xfrm>
-          <a:prstGeom prst="rect">
-            <a:avLst/>
-          </a:prstGeom>
-          <a:noFill/>
-          <a:ln/>
-        </p:spPr>
-        <p:txBody>
-          <a:bodyPr wrap="square" lIns="0" tIns="0" rIns="0" bIns="0" rtlCol="0" anchor="ctr"/>
-          <a:lstStyle/>
-          <a:p>
-            <a:pPr indent="0" marL="0">
-              <a:buNone/>
-            </a:pPr>
-            <a:r>
-              <a:rPr lang="en-US" sz="1400" b="1" dirty="0">
+          <a:ln w="6350">
+            <a:solidFill>
+              <a:srgbClr val="2A3A50"/>
+            </a:solidFill>
+            <a:prstDash val="solid"/>
+          </a:ln>
+        </p:spPr>
+      </p:sp>
+      <p:sp>
+        <p:nvSpPr>
+          <p:cNvPr id="17" name="Text 15"/>
+          <p:cNvSpPr/>
+          <p:nvPr/>
+        </p:nvSpPr>
+        <p:spPr>
+          <a:xfrm>
+            <a:off x="1554480" y="3319272"/>
+            <a:ext cx="1371600" cy="201168"/>
+          </a:xfrm>
+          <a:prstGeom prst="rect">
+            <a:avLst/>
+          </a:prstGeom>
+          <a:noFill/>
+          <a:ln/>
+        </p:spPr>
+        <p:txBody>
+          <a:bodyPr wrap="square" lIns="0" tIns="0" rIns="0" bIns="0" rtlCol="0" anchor="ctr"/>
+          <a:lstStyle/>
+          <a:p>
+            <a:pPr indent="0" marL="0">
+              <a:buNone/>
+            </a:pPr>
+            <a:r>
+              <a:rPr lang="en-US" sz="1100" b="1" dirty="0">
                 <a:solidFill>
                   <a:srgbClr val="E2E8F0"/>
                 </a:solidFill>
@@ -7401,37 +10976,34 @@
                 <a:ea typeface="Calibri" pitchFamily="34" charset="-122"/>
                 <a:cs typeface="Calibri" pitchFamily="34" charset="-120"/>
               </a:rPr>
-              <a:t>4 Aerosol Species</a:t>
-            </a:r>
-            <a:endParaRPr lang="en-US" sz="1400" dirty="0"/>
-          </a:p>
-        </p:txBody>
-      </p:sp>
-      <p:sp>
-        <p:nvSpPr>
-          <p:cNvPr id="9" name="Text 7"/>
-          <p:cNvSpPr/>
-          <p:nvPr/>
-        </p:nvSpPr>
-        <p:spPr>
-          <a:xfrm>
-            <a:off x="960120" y="2377440"/>
-            <a:ext cx="3291840" cy="548640"/>
-          </a:xfrm>
-          <a:prstGeom prst="rect">
-            <a:avLst/>
-          </a:prstGeom>
-          <a:noFill/>
-          <a:ln/>
-        </p:spPr>
-        <p:txBody>
-          <a:bodyPr wrap="square" lIns="0" tIns="0" rIns="0" bIns="0" rtlCol="0" anchor="ctr"/>
-          <a:lstStyle/>
-          <a:p>
-            <a:pPr indent="0" marL="0">
-              <a:lnSpc>
-                <a:spcPct val="130000"/>
-              </a:lnSpc>
+              <a:t>Coastlines</a:t>
+            </a:r>
+            <a:endParaRPr lang="en-US" sz="1100" dirty="0"/>
+          </a:p>
+        </p:txBody>
+      </p:sp>
+      <p:sp>
+        <p:nvSpPr>
+          <p:cNvPr id="18" name="Text 16"/>
+          <p:cNvSpPr/>
+          <p:nvPr/>
+        </p:nvSpPr>
+        <p:spPr>
+          <a:xfrm>
+            <a:off x="3017520" y="3319272"/>
+            <a:ext cx="1097280" cy="201168"/>
+          </a:xfrm>
+          <a:prstGeom prst="rect">
+            <a:avLst/>
+          </a:prstGeom>
+          <a:noFill/>
+          <a:ln/>
+        </p:spPr>
+        <p:txBody>
+          <a:bodyPr wrap="square" lIns="0" tIns="0" rIns="0" bIns="0" rtlCol="0" anchor="ctr"/>
+          <a:lstStyle/>
+          <a:p>
+            <a:pPr indent="0" marL="0">
               <a:buNone/>
             </a:pPr>
             <a:r>
@@ -7439,11 +11011,11 @@
                 <a:solidFill>
                   <a:srgbClr val="94A3B8"/>
                 </a:solidFill>
-                <a:latin typeface="Calibri" pitchFamily="34" charset="0"/>
-                <a:ea typeface="Calibri" pitchFamily="34" charset="-122"/>
-                <a:cs typeface="Calibri" pitchFamily="34" charset="-120"/>
-              </a:rPr>
-              <a:t>Toggle between Total, Black Carbon, Dust, and Sea Salt — each with distinct color ramp and transport pattern</a:t>
+                <a:latin typeface="Consolas" pitchFamily="34" charset="0"/>
+                <a:ea typeface="Consolas" pitchFamily="34" charset="-122"/>
+                <a:cs typeface="Consolas" pitchFamily="34" charset="-120"/>
+              </a:rPr>
+              <a:t>#1a3050</a:t>
             </a:r>
             <a:endParaRPr lang="en-US" sz="1000" dirty="0"/>
           </a:p>
@@ -7451,74 +11023,240 @@
       </p:sp>
       <p:sp>
         <p:nvSpPr>
-          <p:cNvPr id="10" name="Shape 8"/>
-          <p:cNvSpPr/>
-          <p:nvPr/>
-        </p:nvSpPr>
-        <p:spPr>
-          <a:xfrm>
-            <a:off x="4754880" y="1920240"/>
-            <a:ext cx="3749040" cy="1097280"/>
+          <p:cNvPr id="19" name="Text 17"/>
+          <p:cNvSpPr/>
+          <p:nvPr/>
+        </p:nvSpPr>
+        <p:spPr>
+          <a:xfrm>
+            <a:off x="4206240" y="3319272"/>
+            <a:ext cx="3657600" cy="201168"/>
+          </a:xfrm>
+          <a:prstGeom prst="rect">
+            <a:avLst/>
+          </a:prstGeom>
+          <a:noFill/>
+          <a:ln/>
+        </p:spPr>
+        <p:txBody>
+          <a:bodyPr wrap="square" lIns="0" tIns="0" rIns="0" bIns="0" rtlCol="0" anchor="ctr"/>
+          <a:lstStyle/>
+          <a:p>
+            <a:pPr indent="0" marL="0">
+              <a:buNone/>
+            </a:pPr>
+            <a:r>
+              <a:rPr lang="en-US" sz="1000" dirty="0">
+                <a:solidFill>
+                  <a:srgbClr val="94A3B8"/>
+                </a:solidFill>
+                <a:latin typeface="Calibri" pitchFamily="34" charset="0"/>
+                <a:ea typeface="Calibri" pitchFamily="34" charset="-122"/>
+                <a:cs typeface="Calibri" pitchFamily="34" charset="-120"/>
+              </a:rPr>
+              <a:t>Subtle blue outline</a:t>
+            </a:r>
+            <a:endParaRPr lang="en-US" sz="1000" dirty="0"/>
+          </a:p>
+        </p:txBody>
+      </p:sp>
+      <p:sp>
+        <p:nvSpPr>
+          <p:cNvPr id="20" name="Shape 18"/>
+          <p:cNvSpPr/>
+          <p:nvPr/>
+        </p:nvSpPr>
+        <p:spPr>
+          <a:xfrm>
+            <a:off x="1188720" y="3657600"/>
+            <a:ext cx="228600" cy="182880"/>
           </a:xfrm>
           <a:prstGeom prst="rect">
             <a:avLst>
-              <a:gd name="adj" fmla="val 6667"/>
+              <a:gd name="adj" fmla="val 15000"/>
             </a:avLst>
           </a:prstGeom>
           <a:solidFill>
-            <a:srgbClr val="1A2236"/>
+            <a:srgbClr val="162540"/>
           </a:solidFill>
-          <a:ln/>
-        </p:spPr>
-      </p:sp>
-      <p:sp>
-        <p:nvSpPr>
-          <p:cNvPr id="11" name="Shape 9"/>
-          <p:cNvSpPr/>
-          <p:nvPr/>
-        </p:nvSpPr>
-        <p:spPr>
-          <a:xfrm>
-            <a:off x="4754880" y="1920240"/>
-            <a:ext cx="54864" cy="1097280"/>
+          <a:ln w="6350">
+            <a:solidFill>
+              <a:srgbClr val="2A3A50"/>
+            </a:solidFill>
+            <a:prstDash val="solid"/>
+          </a:ln>
+        </p:spPr>
+      </p:sp>
+      <p:sp>
+        <p:nvSpPr>
+          <p:cNvPr id="21" name="Text 19"/>
+          <p:cNvSpPr/>
+          <p:nvPr/>
+        </p:nvSpPr>
+        <p:spPr>
+          <a:xfrm>
+            <a:off x="1554480" y="3639312"/>
+            <a:ext cx="1371600" cy="201168"/>
+          </a:xfrm>
+          <a:prstGeom prst="rect">
+            <a:avLst/>
+          </a:prstGeom>
+          <a:noFill/>
+          <a:ln/>
+        </p:spPr>
+        <p:txBody>
+          <a:bodyPr wrap="square" lIns="0" tIns="0" rIns="0" bIns="0" rtlCol="0" anchor="ctr"/>
+          <a:lstStyle/>
+          <a:p>
+            <a:pPr indent="0" marL="0">
+              <a:buNone/>
+            </a:pPr>
+            <a:r>
+              <a:rPr lang="en-US" sz="1100" b="1" dirty="0">
+                <a:solidFill>
+                  <a:srgbClr val="E2E8F0"/>
+                </a:solidFill>
+                <a:latin typeface="Calibri" pitchFamily="34" charset="0"/>
+                <a:ea typeface="Calibri" pitchFamily="34" charset="-122"/>
+                <a:cs typeface="Calibri" pitchFamily="34" charset="-120"/>
+              </a:rPr>
+              <a:t>Borders</a:t>
+            </a:r>
+            <a:endParaRPr lang="en-US" sz="1100" dirty="0"/>
+          </a:p>
+        </p:txBody>
+      </p:sp>
+      <p:sp>
+        <p:nvSpPr>
+          <p:cNvPr id="22" name="Text 20"/>
+          <p:cNvSpPr/>
+          <p:nvPr/>
+        </p:nvSpPr>
+        <p:spPr>
+          <a:xfrm>
+            <a:off x="3017520" y="3639312"/>
+            <a:ext cx="1097280" cy="201168"/>
+          </a:xfrm>
+          <a:prstGeom prst="rect">
+            <a:avLst/>
+          </a:prstGeom>
+          <a:noFill/>
+          <a:ln/>
+        </p:spPr>
+        <p:txBody>
+          <a:bodyPr wrap="square" lIns="0" tIns="0" rIns="0" bIns="0" rtlCol="0" anchor="ctr"/>
+          <a:lstStyle/>
+          <a:p>
+            <a:pPr indent="0" marL="0">
+              <a:buNone/>
+            </a:pPr>
+            <a:r>
+              <a:rPr lang="en-US" sz="1000" dirty="0">
+                <a:solidFill>
+                  <a:srgbClr val="94A3B8"/>
+                </a:solidFill>
+                <a:latin typeface="Consolas" pitchFamily="34" charset="0"/>
+                <a:ea typeface="Consolas" pitchFamily="34" charset="-122"/>
+                <a:cs typeface="Consolas" pitchFamily="34" charset="-120"/>
+              </a:rPr>
+              <a:t>#162540</a:t>
+            </a:r>
+            <a:endParaRPr lang="en-US" sz="1000" dirty="0"/>
+          </a:p>
+        </p:txBody>
+      </p:sp>
+      <p:sp>
+        <p:nvSpPr>
+          <p:cNvPr id="23" name="Text 21"/>
+          <p:cNvSpPr/>
+          <p:nvPr/>
+        </p:nvSpPr>
+        <p:spPr>
+          <a:xfrm>
+            <a:off x="4206240" y="3639312"/>
+            <a:ext cx="3657600" cy="201168"/>
+          </a:xfrm>
+          <a:prstGeom prst="rect">
+            <a:avLst/>
+          </a:prstGeom>
+          <a:noFill/>
+          <a:ln/>
+        </p:spPr>
+        <p:txBody>
+          <a:bodyPr wrap="square" lIns="0" tIns="0" rIns="0" bIns="0" rtlCol="0" anchor="ctr"/>
+          <a:lstStyle/>
+          <a:p>
+            <a:pPr indent="0" marL="0">
+              <a:buNone/>
+            </a:pPr>
+            <a:r>
+              <a:rPr lang="en-US" sz="1000" dirty="0">
+                <a:solidFill>
+                  <a:srgbClr val="94A3B8"/>
+                </a:solidFill>
+                <a:latin typeface="Calibri" pitchFamily="34" charset="0"/>
+                <a:ea typeface="Calibri" pitchFamily="34" charset="-122"/>
+                <a:cs typeface="Calibri" pitchFamily="34" charset="-120"/>
+              </a:rPr>
+              <a:t>Faint dashed lines</a:t>
+            </a:r>
+            <a:endParaRPr lang="en-US" sz="1000" dirty="0"/>
+          </a:p>
+        </p:txBody>
+      </p:sp>
+      <p:sp>
+        <p:nvSpPr>
+          <p:cNvPr id="24" name="Shape 22"/>
+          <p:cNvSpPr/>
+          <p:nvPr/>
+        </p:nvSpPr>
+        <p:spPr>
+          <a:xfrm>
+            <a:off x="1188720" y="3977640"/>
+            <a:ext cx="228600" cy="182880"/>
           </a:xfrm>
           <a:prstGeom prst="rect">
             <a:avLst>
-              <a:gd name="adj" fmla="val 50000"/>
+              <a:gd name="adj" fmla="val 15000"/>
             </a:avLst>
           </a:prstGeom>
           <a:solidFill>
-            <a:srgbClr val="76B900"/>
+            <a:srgbClr val="0E1525"/>
           </a:solidFill>
-          <a:ln/>
-        </p:spPr>
-      </p:sp>
-      <p:sp>
-        <p:nvSpPr>
-          <p:cNvPr id="12" name="Text 10"/>
-          <p:cNvSpPr/>
-          <p:nvPr/>
-        </p:nvSpPr>
-        <p:spPr>
-          <a:xfrm>
-            <a:off x="4983480" y="2029968"/>
-            <a:ext cx="3291840" cy="274320"/>
-          </a:xfrm>
-          <a:prstGeom prst="rect">
-            <a:avLst/>
-          </a:prstGeom>
-          <a:noFill/>
-          <a:ln/>
-        </p:spPr>
-        <p:txBody>
-          <a:bodyPr wrap="square" lIns="0" tIns="0" rIns="0" bIns="0" rtlCol="0" anchor="ctr"/>
-          <a:lstStyle/>
-          <a:p>
-            <a:pPr indent="0" marL="0">
-              <a:buNone/>
-            </a:pPr>
-            <a:r>
-              <a:rPr lang="en-US" sz="1400" b="1" dirty="0">
+          <a:ln w="6350">
+            <a:solidFill>
+              <a:srgbClr val="2A3A50"/>
+            </a:solidFill>
+            <a:prstDash val="solid"/>
+          </a:ln>
+        </p:spPr>
+      </p:sp>
+      <p:sp>
+        <p:nvSpPr>
+          <p:cNvPr id="25" name="Text 23"/>
+          <p:cNvSpPr/>
+          <p:nvPr/>
+        </p:nvSpPr>
+        <p:spPr>
+          <a:xfrm>
+            <a:off x="1554480" y="3959352"/>
+            <a:ext cx="1371600" cy="201168"/>
+          </a:xfrm>
+          <a:prstGeom prst="rect">
+            <a:avLst/>
+          </a:prstGeom>
+          <a:noFill/>
+          <a:ln/>
+        </p:spPr>
+        <p:txBody>
+          <a:bodyPr wrap="square" lIns="0" tIns="0" rIns="0" bIns="0" rtlCol="0" anchor="ctr"/>
+          <a:lstStyle/>
+          <a:p>
+            <a:pPr indent="0" marL="0">
+              <a:buNone/>
+            </a:pPr>
+            <a:r>
+              <a:rPr lang="en-US" sz="1100" b="1" dirty="0">
                 <a:solidFill>
                   <a:srgbClr val="E2E8F0"/>
                 </a:solidFill>
@@ -7526,37 +11264,34 @@
                 <a:ea typeface="Calibri" pitchFamily="34" charset="-122"/>
                 <a:cs typeface="Calibri" pitchFamily="34" charset="-120"/>
               </a:rPr>
-              <a:t>GPU Particle Controls</a:t>
-            </a:r>
-            <a:endParaRPr lang="en-US" sz="1400" dirty="0"/>
-          </a:p>
-        </p:txBody>
-      </p:sp>
-      <p:sp>
-        <p:nvSpPr>
-          <p:cNvPr id="13" name="Text 11"/>
-          <p:cNvSpPr/>
-          <p:nvPr/>
-        </p:nvSpPr>
-        <p:spPr>
-          <a:xfrm>
-            <a:off x="4983480" y="2377440"/>
-            <a:ext cx="3291840" cy="548640"/>
-          </a:xfrm>
-          <a:prstGeom prst="rect">
-            <a:avLst/>
-          </a:prstGeom>
-          <a:noFill/>
-          <a:ln/>
-        </p:spPr>
-        <p:txBody>
-          <a:bodyPr wrap="square" lIns="0" tIns="0" rIns="0" bIns="0" rtlCol="0" anchor="ctr"/>
-          <a:lstStyle/>
-          <a:p>
-            <a:pPr indent="0" marL="0">
-              <a:lnSpc>
-                <a:spcPct val="130000"/>
-              </a:lnSpc>
+              <a:t>Lat/Lon Grid</a:t>
+            </a:r>
+            <a:endParaRPr lang="en-US" sz="1100" dirty="0"/>
+          </a:p>
+        </p:txBody>
+      </p:sp>
+      <p:sp>
+        <p:nvSpPr>
+          <p:cNvPr id="26" name="Text 24"/>
+          <p:cNvSpPr/>
+          <p:nvPr/>
+        </p:nvSpPr>
+        <p:spPr>
+          <a:xfrm>
+            <a:off x="3017520" y="3959352"/>
+            <a:ext cx="1097280" cy="201168"/>
+          </a:xfrm>
+          <a:prstGeom prst="rect">
+            <a:avLst/>
+          </a:prstGeom>
+          <a:noFill/>
+          <a:ln/>
+        </p:spPr>
+        <p:txBody>
+          <a:bodyPr wrap="square" lIns="0" tIns="0" rIns="0" bIns="0" rtlCol="0" anchor="ctr"/>
+          <a:lstStyle/>
+          <a:p>
+            <a:pPr indent="0" marL="0">
               <a:buNone/>
             </a:pPr>
             <a:r>
@@ -7564,11 +11299,11 @@
                 <a:solidFill>
                   <a:srgbClr val="94A3B8"/>
                 </a:solidFill>
-                <a:latin typeface="Calibri" pitchFamily="34" charset="0"/>
-                <a:ea typeface="Calibri" pitchFamily="34" charset="-122"/>
-                <a:cs typeface="Calibri" pitchFamily="34" charset="-120"/>
-              </a:rPr>
-              <a:t>Adjust particle count (50K-1M), flow speed, trail length, and particle size in real-time</a:t>
+                <a:latin typeface="Consolas" pitchFamily="34" charset="0"/>
+                <a:ea typeface="Consolas" pitchFamily="34" charset="-122"/>
+                <a:cs typeface="Consolas" pitchFamily="34" charset="-120"/>
+              </a:rPr>
+              <a:t>#0e1525</a:t>
             </a:r>
             <a:endParaRPr lang="en-US" sz="1000" dirty="0"/>
           </a:p>
@@ -7576,74 +11311,96 @@
       </p:sp>
       <p:sp>
         <p:nvSpPr>
-          <p:cNvPr id="14" name="Shape 12"/>
-          <p:cNvSpPr/>
-          <p:nvPr/>
-        </p:nvSpPr>
-        <p:spPr>
-          <a:xfrm>
-            <a:off x="731520" y="3291840"/>
-            <a:ext cx="3749040" cy="1097280"/>
+          <p:cNvPr id="27" name="Text 25"/>
+          <p:cNvSpPr/>
+          <p:nvPr/>
+        </p:nvSpPr>
+        <p:spPr>
+          <a:xfrm>
+            <a:off x="4206240" y="3959352"/>
+            <a:ext cx="3657600" cy="201168"/>
+          </a:xfrm>
+          <a:prstGeom prst="rect">
+            <a:avLst/>
+          </a:prstGeom>
+          <a:noFill/>
+          <a:ln/>
+        </p:spPr>
+        <p:txBody>
+          <a:bodyPr wrap="square" lIns="0" tIns="0" rIns="0" bIns="0" rtlCol="0" anchor="ctr"/>
+          <a:lstStyle/>
+          <a:p>
+            <a:pPr indent="0" marL="0">
+              <a:buNone/>
+            </a:pPr>
+            <a:r>
+              <a:rPr lang="en-US" sz="1000" dirty="0">
+                <a:solidFill>
+                  <a:srgbClr val="94A3B8"/>
+                </a:solidFill>
+                <a:latin typeface="Calibri" pitchFamily="34" charset="0"/>
+                <a:ea typeface="Calibri" pitchFamily="34" charset="-122"/>
+                <a:cs typeface="Calibri" pitchFamily="34" charset="-120"/>
+              </a:rPr>
+              <a:t>Barely visible grid</a:t>
+            </a:r>
+            <a:endParaRPr lang="en-US" sz="1000" dirty="0"/>
+          </a:p>
+        </p:txBody>
+      </p:sp>
+      <p:sp>
+        <p:nvSpPr>
+          <p:cNvPr id="28" name="Shape 26"/>
+          <p:cNvSpPr/>
+          <p:nvPr/>
+        </p:nvSpPr>
+        <p:spPr>
+          <a:xfrm>
+            <a:off x="1188720" y="4297680"/>
+            <a:ext cx="228600" cy="182880"/>
           </a:xfrm>
           <a:prstGeom prst="rect">
             <a:avLst>
-              <a:gd name="adj" fmla="val 6667"/>
+              <a:gd name="adj" fmla="val 15000"/>
             </a:avLst>
           </a:prstGeom>
           <a:solidFill>
-            <a:srgbClr val="1A2236"/>
+            <a:srgbClr val="080C14"/>
           </a:solidFill>
-          <a:ln/>
-        </p:spPr>
-      </p:sp>
-      <p:sp>
-        <p:nvSpPr>
-          <p:cNvPr id="15" name="Shape 13"/>
-          <p:cNvSpPr/>
-          <p:nvPr/>
-        </p:nvSpPr>
-        <p:spPr>
-          <a:xfrm>
-            <a:off x="731520" y="3291840"/>
-            <a:ext cx="54864" cy="1097280"/>
-          </a:xfrm>
-          <a:prstGeom prst="rect">
-            <a:avLst>
-              <a:gd name="adj" fmla="val 50000"/>
-            </a:avLst>
-          </a:prstGeom>
-          <a:solidFill>
-            <a:srgbClr val="00B4D8"/>
-          </a:solidFill>
-          <a:ln/>
-        </p:spPr>
-      </p:sp>
-      <p:sp>
-        <p:nvSpPr>
-          <p:cNvPr id="16" name="Text 14"/>
-          <p:cNvSpPr/>
-          <p:nvPr/>
-        </p:nvSpPr>
-        <p:spPr>
-          <a:xfrm>
-            <a:off x="960120" y="3401568"/>
-            <a:ext cx="3291840" cy="274320"/>
-          </a:xfrm>
-          <a:prstGeom prst="rect">
-            <a:avLst/>
-          </a:prstGeom>
-          <a:noFill/>
-          <a:ln/>
-        </p:spPr>
-        <p:txBody>
-          <a:bodyPr wrap="square" lIns="0" tIns="0" rIns="0" bIns="0" rtlCol="0" anchor="ctr"/>
-          <a:lstStyle/>
-          <a:p>
-            <a:pPr indent="0" marL="0">
-              <a:buNone/>
-            </a:pPr>
-            <a:r>
-              <a:rPr lang="en-US" sz="1400" b="1" dirty="0">
+          <a:ln w="6350">
+            <a:solidFill>
+              <a:srgbClr val="2A3A50"/>
+            </a:solidFill>
+            <a:prstDash val="solid"/>
+          </a:ln>
+        </p:spPr>
+      </p:sp>
+      <p:sp>
+        <p:nvSpPr>
+          <p:cNvPr id="29" name="Text 27"/>
+          <p:cNvSpPr/>
+          <p:nvPr/>
+        </p:nvSpPr>
+        <p:spPr>
+          <a:xfrm>
+            <a:off x="1554480" y="4279392"/>
+            <a:ext cx="1371600" cy="201168"/>
+          </a:xfrm>
+          <a:prstGeom prst="rect">
+            <a:avLst/>
+          </a:prstGeom>
+          <a:noFill/>
+          <a:ln/>
+        </p:spPr>
+        <p:txBody>
+          <a:bodyPr wrap="square" lIns="0" tIns="0" rIns="0" bIns="0" rtlCol="0" anchor="ctr"/>
+          <a:lstStyle/>
+          <a:p>
+            <a:pPr indent="0" marL="0">
+              <a:buNone/>
+            </a:pPr>
+            <a:r>
+              <a:rPr lang="en-US" sz="1100" b="1" dirty="0">
                 <a:solidFill>
                   <a:srgbClr val="E2E8F0"/>
                 </a:solidFill>
@@ -7651,37 +11408,34 @@
                 <a:ea typeface="Calibri" pitchFamily="34" charset="-122"/>
                 <a:cs typeface="Calibri" pitchFamily="34" charset="-120"/>
               </a:rPr>
-              <a:t>ArcGIS Dark Basemap</a:t>
-            </a:r>
-            <a:endParaRPr lang="en-US" sz="1400" dirty="0"/>
-          </a:p>
-        </p:txBody>
-      </p:sp>
-      <p:sp>
-        <p:nvSpPr>
-          <p:cNvPr id="17" name="Text 15"/>
-          <p:cNvSpPr/>
-          <p:nvPr/>
-        </p:nvSpPr>
-        <p:spPr>
-          <a:xfrm>
-            <a:off x="960120" y="3749040"/>
-            <a:ext cx="3291840" cy="548640"/>
-          </a:xfrm>
-          <a:prstGeom prst="rect">
-            <a:avLst/>
-          </a:prstGeom>
-          <a:noFill/>
-          <a:ln/>
-        </p:spPr>
-        <p:txBody>
-          <a:bodyPr wrap="square" lIns="0" tIns="0" rIns="0" bIns="0" rtlCol="0" anchor="ctr"/>
-          <a:lstStyle/>
-          <a:p>
-            <a:pPr indent="0" marL="0">
-              <a:lnSpc>
-                <a:spcPct val="130000"/>
-              </a:lnSpc>
+              <a:t>Background</a:t>
+            </a:r>
+            <a:endParaRPr lang="en-US" sz="1100" dirty="0"/>
+          </a:p>
+        </p:txBody>
+      </p:sp>
+      <p:sp>
+        <p:nvSpPr>
+          <p:cNvPr id="30" name="Text 28"/>
+          <p:cNvSpPr/>
+          <p:nvPr/>
+        </p:nvSpPr>
+        <p:spPr>
+          <a:xfrm>
+            <a:off x="3017520" y="4279392"/>
+            <a:ext cx="1097280" cy="201168"/>
+          </a:xfrm>
+          <a:prstGeom prst="rect">
+            <a:avLst/>
+          </a:prstGeom>
+          <a:noFill/>
+          <a:ln/>
+        </p:spPr>
+        <p:txBody>
+          <a:bodyPr wrap="square" lIns="0" tIns="0" rIns="0" bIns="0" rtlCol="0" anchor="ctr"/>
+          <a:lstStyle/>
+          <a:p>
+            <a:pPr indent="0" marL="0">
               <a:buNone/>
             </a:pPr>
             <a:r>
@@ -7689,11 +11443,11 @@
                 <a:solidFill>
                   <a:srgbClr val="94A3B8"/>
                 </a:solidFill>
-                <a:latin typeface="Calibri" pitchFamily="34" charset="0"/>
-                <a:ea typeface="Calibri" pitchFamily="34" charset="-122"/>
-                <a:cs typeface="Calibri" pitchFamily="34" charset="-120"/>
-              </a:rPr>
-              <a:t>Pan and zoom the Web Mercator map. Particles re-spawn to fill the visible extent</a:t>
+                <a:latin typeface="Consolas" pitchFamily="34" charset="0"/>
+                <a:ea typeface="Consolas" pitchFamily="34" charset="-122"/>
+                <a:cs typeface="Consolas" pitchFamily="34" charset="-120"/>
+              </a:rPr>
+              <a:t>#080c14</a:t>
             </a:r>
             <a:endParaRPr lang="en-US" sz="1000" dirty="0"/>
           </a:p>
@@ -7701,112 +11455,26 @@
       </p:sp>
       <p:sp>
         <p:nvSpPr>
-          <p:cNvPr id="18" name="Shape 16"/>
-          <p:cNvSpPr/>
-          <p:nvPr/>
-        </p:nvSpPr>
-        <p:spPr>
-          <a:xfrm>
-            <a:off x="4754880" y="3291840"/>
-            <a:ext cx="3749040" cy="1097280"/>
-          </a:xfrm>
-          <a:prstGeom prst="rect">
-            <a:avLst>
-              <a:gd name="adj" fmla="val 6667"/>
-            </a:avLst>
-          </a:prstGeom>
-          <a:solidFill>
-            <a:srgbClr val="1A2236"/>
-          </a:solidFill>
-          <a:ln/>
-        </p:spPr>
-      </p:sp>
-      <p:sp>
-        <p:nvSpPr>
-          <p:cNvPr id="19" name="Shape 17"/>
-          <p:cNvSpPr/>
-          <p:nvPr/>
-        </p:nvSpPr>
-        <p:spPr>
-          <a:xfrm>
-            <a:off x="4754880" y="3291840"/>
-            <a:ext cx="54864" cy="1097280"/>
-          </a:xfrm>
-          <a:prstGeom prst="rect">
-            <a:avLst>
-              <a:gd name="adj" fmla="val 50000"/>
-            </a:avLst>
-          </a:prstGeom>
-          <a:solidFill>
-            <a:srgbClr val="F59E0B"/>
-          </a:solidFill>
-          <a:ln/>
-        </p:spPr>
-      </p:sp>
-      <p:sp>
-        <p:nvSpPr>
-          <p:cNvPr id="20" name="Text 18"/>
-          <p:cNvSpPr/>
-          <p:nvPr/>
-        </p:nvSpPr>
-        <p:spPr>
-          <a:xfrm>
-            <a:off x="4983480" y="3401568"/>
-            <a:ext cx="3291840" cy="274320"/>
-          </a:xfrm>
-          <a:prstGeom prst="rect">
-            <a:avLst/>
-          </a:prstGeom>
-          <a:noFill/>
-          <a:ln/>
-        </p:spPr>
-        <p:txBody>
-          <a:bodyPr wrap="square" lIns="0" tIns="0" rIns="0" bIns="0" rtlCol="0" anchor="ctr"/>
-          <a:lstStyle/>
-          <a:p>
-            <a:pPr indent="0" marL="0">
-              <a:buNone/>
-            </a:pPr>
-            <a:r>
-              <a:rPr lang="en-US" sz="1400" b="1" dirty="0">
-                <a:solidFill>
-                  <a:srgbClr val="E2E8F0"/>
-                </a:solidFill>
-                <a:latin typeface="Calibri" pitchFamily="34" charset="0"/>
-                <a:ea typeface="Calibri" pitchFamily="34" charset="-122"/>
-                <a:cs typeface="Calibri" pitchFamily="34" charset="-120"/>
-              </a:rPr>
-              <a:t>Automatic Fallback</a:t>
-            </a:r>
-            <a:endParaRPr lang="en-US" sz="1400" dirty="0"/>
-          </a:p>
-        </p:txBody>
-      </p:sp>
-      <p:sp>
-        <p:nvSpPr>
-          <p:cNvPr id="21" name="Text 19"/>
-          <p:cNvSpPr/>
-          <p:nvPr/>
-        </p:nvSpPr>
-        <p:spPr>
-          <a:xfrm>
-            <a:off x="4983480" y="3749040"/>
-            <a:ext cx="3291840" cy="548640"/>
-          </a:xfrm>
-          <a:prstGeom prst="rect">
-            <a:avLst/>
-          </a:prstGeom>
-          <a:noFill/>
-          <a:ln/>
-        </p:spPr>
-        <p:txBody>
-          <a:bodyPr wrap="square" lIns="0" tIns="0" rIns="0" bIns="0" rtlCol="0" anchor="ctr"/>
-          <a:lstStyle/>
-          <a:p>
-            <a:pPr indent="0" marL="0">
-              <a:lnSpc>
-                <a:spcPct val="130000"/>
-              </a:lnSpc>
+          <p:cNvPr id="31" name="Text 29"/>
+          <p:cNvSpPr/>
+          <p:nvPr/>
+        </p:nvSpPr>
+        <p:spPr>
+          <a:xfrm>
+            <a:off x="4206240" y="4279392"/>
+            <a:ext cx="3657600" cy="201168"/>
+          </a:xfrm>
+          <a:prstGeom prst="rect">
+            <a:avLst/>
+          </a:prstGeom>
+          <a:noFill/>
+          <a:ln/>
+        </p:spPr>
+        <p:txBody>
+          <a:bodyPr wrap="square" lIns="0" tIns="0" rIns="0" bIns="0" rtlCol="0" anchor="ctr"/>
+          <a:lstStyle/>
+          <a:p>
+            <a:pPr indent="0" marL="0">
               <a:buNone/>
             </a:pPr>
             <a:r>
@@ -7818,9 +11486,48 @@
                 <a:ea typeface="Calibri" pitchFamily="34" charset="-122"/>
                 <a:cs typeface="Calibri" pitchFamily="34" charset="-120"/>
               </a:rPr>
-              <a:t>WebGPU (500K particles) on NVIDIA GPUs, Canvas 2D (8K particles) on older browsers</a:t>
+              <a:t>View background fill</a:t>
             </a:r>
             <a:endParaRPr lang="en-US" sz="1000" dirty="0"/>
+          </a:p>
+        </p:txBody>
+      </p:sp>
+      <p:sp>
+        <p:nvSpPr>
+          <p:cNvPr id="32" name="Text 30"/>
+          <p:cNvSpPr/>
+          <p:nvPr/>
+        </p:nvSpPr>
+        <p:spPr>
+          <a:xfrm>
+            <a:off x="1005840" y="4617720"/>
+            <a:ext cx="6400800" cy="182880"/>
+          </a:xfrm>
+          <a:prstGeom prst="rect">
+            <a:avLst/>
+          </a:prstGeom>
+          <a:noFill/>
+          <a:ln/>
+        </p:spPr>
+        <p:txBody>
+          <a:bodyPr wrap="square" lIns="0" tIns="0" rIns="0" bIns="0" rtlCol="0" anchor="ctr"/>
+          <a:lstStyle/>
+          <a:p>
+            <a:pPr indent="0" marL="0">
+              <a:buNone/>
+            </a:pPr>
+            <a:r>
+              <a:rPr lang="en-US" sz="800" dirty="0">
+                <a:solidFill>
+                  <a:srgbClr val="94A3B8"/>
+                </a:solidFill>
+                <a:latin typeface="Calibri" pitchFamily="34" charset="0"/>
+                <a:ea typeface="Calibri" pitchFamily="34" charset="-122"/>
+                <a:cs typeface="Calibri" pitchFamily="34" charset="-120"/>
+              </a:rPr>
+              <a:t>Source: WMO Robinson Agreed VectorTileServer (tiles.arcgis.com)</a:t>
+            </a:r>
+            <a:endParaRPr lang="en-US" sz="800" dirty="0"/>
           </a:p>
         </p:txBody>
       </p:sp>
@@ -7865,7 +11572,7 @@
         <p:spPr>
           <a:xfrm>
             <a:off x="0" y="0"/>
-            <a:ext cx="73152" cy="5143500"/>
+            <a:ext cx="64008" cy="5143500"/>
           </a:xfrm>
           <a:prstGeom prst="rect">
             <a:avLst/>
@@ -7884,63 +11591,24 @@
         </p:nvSpPr>
         <p:spPr>
           <a:xfrm>
-            <a:off x="731520" y="914400"/>
-            <a:ext cx="7315200" cy="731520"/>
-          </a:xfrm>
-          <a:prstGeom prst="rect">
-            <a:avLst/>
-          </a:prstGeom>
-          <a:noFill/>
-          <a:ln/>
-        </p:spPr>
-        <p:txBody>
-          <a:bodyPr wrap="square" lIns="0" tIns="0" rIns="0" bIns="0" rtlCol="0" anchor="ctr"/>
-          <a:lstStyle/>
-          <a:p>
-            <a:pPr indent="0" marL="0">
-              <a:buNone/>
-            </a:pPr>
-            <a:r>
-              <a:rPr lang="en-US" sz="4400" dirty="0">
-                <a:solidFill>
-                  <a:srgbClr val="E2E8F0"/>
-                </a:solidFill>
-                <a:latin typeface="Arial Black" pitchFamily="34" charset="0"/>
-                <a:ea typeface="Arial Black" pitchFamily="34" charset="-122"/>
-                <a:cs typeface="Arial Black" pitchFamily="34" charset="-120"/>
-              </a:rPr>
-              <a:t>Thank You</a:t>
-            </a:r>
-            <a:endParaRPr lang="en-US" sz="4400" dirty="0"/>
-          </a:p>
-        </p:txBody>
-      </p:sp>
-      <p:sp>
-        <p:nvSpPr>
-          <p:cNvPr id="4" name="Text 2"/>
-          <p:cNvSpPr/>
-          <p:nvPr/>
-        </p:nvSpPr>
-        <p:spPr>
-          <a:xfrm>
-            <a:off x="731520" y="1828800"/>
-            <a:ext cx="7315200" cy="457200"/>
-          </a:xfrm>
-          <a:prstGeom prst="rect">
-            <a:avLst/>
-          </a:prstGeom>
-          <a:noFill/>
-          <a:ln/>
-        </p:spPr>
-        <p:txBody>
-          <a:bodyPr wrap="square" lIns="0" tIns="0" rIns="0" bIns="0" rtlCol="0" anchor="ctr"/>
-          <a:lstStyle/>
-          <a:p>
-            <a:pPr indent="0" marL="0">
-              <a:buNone/>
-            </a:pPr>
-            <a:r>
-              <a:rPr lang="en-US" sz="2000" dirty="0">
+            <a:off x="731520" y="228600"/>
+            <a:ext cx="7315200" cy="365760"/>
+          </a:xfrm>
+          <a:prstGeom prst="rect">
+            <a:avLst/>
+          </a:prstGeom>
+          <a:noFill/>
+          <a:ln/>
+        </p:spPr>
+        <p:txBody>
+          <a:bodyPr wrap="square" lIns="0" tIns="0" rIns="0" bIns="0" rtlCol="0" anchor="ctr"/>
+          <a:lstStyle/>
+          <a:p>
+            <a:pPr indent="0" marL="0">
+              <a:buNone/>
+            </a:pPr>
+            <a:r>
+              <a:rPr lang="en-US" sz="1100" spc="400" kern="0" dirty="0">
                 <a:solidFill>
                   <a:srgbClr val="00B4D8"/>
                 </a:solidFill>
@@ -7948,395 +11616,42 @@
                 <a:ea typeface="Calibri" pitchFamily="34" charset="-122"/>
                 <a:cs typeface="Calibri" pitchFamily="34" charset="-120"/>
               </a:rPr>
-              <a:t>Jhonatan Garrido-Lecca</a:t>
-            </a:r>
-            <a:endParaRPr lang="en-US" sz="2000" dirty="0"/>
-          </a:p>
-        </p:txBody>
-      </p:sp>
-      <p:sp>
-        <p:nvSpPr>
-          <p:cNvPr id="5" name="Text 3"/>
-          <p:cNvSpPr/>
-          <p:nvPr/>
-        </p:nvSpPr>
-        <p:spPr>
-          <a:xfrm>
-            <a:off x="731520" y="2468880"/>
-            <a:ext cx="7315200" cy="365760"/>
-          </a:xfrm>
-          <a:prstGeom prst="rect">
-            <a:avLst/>
-          </a:prstGeom>
-          <a:noFill/>
-          <a:ln/>
-        </p:spPr>
-        <p:txBody>
-          <a:bodyPr wrap="square" lIns="0" tIns="0" rIns="0" bIns="0" rtlCol="0" anchor="ctr"/>
-          <a:lstStyle/>
-          <a:p>
-            <a:pPr indent="0" marL="0">
-              <a:buNone/>
-            </a:pPr>
-            <a:r>
-              <a:rPr lang="en-US" sz="1400" dirty="0">
-                <a:solidFill>
-                  <a:srgbClr val="94A3B8"/>
-                </a:solidFill>
-                <a:latin typeface="Consolas" pitchFamily="34" charset="0"/>
-                <a:ea typeface="Consolas" pitchFamily="34" charset="-122"/>
-                <a:cs typeface="Consolas" pitchFamily="34" charset="-120"/>
-              </a:rPr>
-              <a:t>garridolecca.github.io/aerosols-globe</a:t>
-            </a:r>
-            <a:endParaRPr lang="en-US" sz="1400" dirty="0"/>
-          </a:p>
-        </p:txBody>
-      </p:sp>
-      <p:sp>
-        <p:nvSpPr>
-          <p:cNvPr id="6" name="Shape 4"/>
-          <p:cNvSpPr/>
-          <p:nvPr/>
-        </p:nvSpPr>
-        <p:spPr>
-          <a:xfrm>
-            <a:off x="731520" y="3200400"/>
-            <a:ext cx="1508760" cy="502920"/>
-          </a:xfrm>
-          <a:prstGeom prst="rect">
-            <a:avLst>
-              <a:gd name="adj" fmla="val 10909"/>
-            </a:avLst>
-          </a:prstGeom>
-          <a:solidFill>
-            <a:srgbClr val="1A2236"/>
-          </a:solidFill>
-          <a:ln/>
-        </p:spPr>
-      </p:sp>
-      <p:sp>
-        <p:nvSpPr>
-          <p:cNvPr id="7" name="Text 5"/>
-          <p:cNvSpPr/>
-          <p:nvPr/>
-        </p:nvSpPr>
-        <p:spPr>
-          <a:xfrm>
-            <a:off x="731520" y="3200400"/>
-            <a:ext cx="1508760" cy="502920"/>
-          </a:xfrm>
-          <a:prstGeom prst="rect">
-            <a:avLst/>
-          </a:prstGeom>
-          <a:noFill/>
-          <a:ln/>
-        </p:spPr>
-        <p:txBody>
-          <a:bodyPr wrap="square" lIns="0" tIns="0" rIns="0" bIns="0" rtlCol="0" anchor="ctr"/>
-          <a:lstStyle/>
-          <a:p>
-            <a:pPr algn="ctr" indent="0" marL="0">
-              <a:buNone/>
-            </a:pPr>
-            <a:r>
-              <a:rPr lang="en-US" sz="900" b="1" dirty="0">
-                <a:solidFill>
-                  <a:srgbClr val="00B4D8"/>
-                </a:solidFill>
-                <a:latin typeface="Calibri" pitchFamily="34" charset="0"/>
-                <a:ea typeface="Calibri" pitchFamily="34" charset="-122"/>
-                <a:cs typeface="Calibri" pitchFamily="34" charset="-120"/>
-              </a:rPr>
-              <a:t>NASA GEOS-FP</a:t>
-            </a:r>
-            <a:endParaRPr lang="en-US" sz="900" dirty="0"/>
-          </a:p>
-        </p:txBody>
-      </p:sp>
-      <p:sp>
-        <p:nvSpPr>
-          <p:cNvPr id="8" name="Shape 6"/>
-          <p:cNvSpPr/>
-          <p:nvPr/>
-        </p:nvSpPr>
-        <p:spPr>
-          <a:xfrm>
-            <a:off x="2377440" y="3200400"/>
-            <a:ext cx="1508760" cy="502920"/>
-          </a:xfrm>
-          <a:prstGeom prst="rect">
-            <a:avLst>
-              <a:gd name="adj" fmla="val 10909"/>
-            </a:avLst>
-          </a:prstGeom>
-          <a:solidFill>
-            <a:srgbClr val="1A2236"/>
-          </a:solidFill>
-          <a:ln/>
-        </p:spPr>
-      </p:sp>
-      <p:sp>
-        <p:nvSpPr>
-          <p:cNvPr id="9" name="Text 7"/>
-          <p:cNvSpPr/>
-          <p:nvPr/>
-        </p:nvSpPr>
-        <p:spPr>
-          <a:xfrm>
-            <a:off x="2377440" y="3200400"/>
-            <a:ext cx="1508760" cy="502920"/>
-          </a:xfrm>
-          <a:prstGeom prst="rect">
-            <a:avLst/>
-          </a:prstGeom>
-          <a:noFill/>
-          <a:ln/>
-        </p:spPr>
-        <p:txBody>
-          <a:bodyPr wrap="square" lIns="0" tIns="0" rIns="0" bIns="0" rtlCol="0" anchor="ctr"/>
-          <a:lstStyle/>
-          <a:p>
-            <a:pPr algn="ctr" indent="0" marL="0">
-              <a:buNone/>
-            </a:pPr>
-            <a:r>
-              <a:rPr lang="en-US" sz="900" b="1" dirty="0">
-                <a:solidFill>
-                  <a:srgbClr val="76B900"/>
-                </a:solidFill>
-                <a:latin typeface="Calibri" pitchFamily="34" charset="0"/>
-                <a:ea typeface="Calibri" pitchFamily="34" charset="-122"/>
-                <a:cs typeface="Calibri" pitchFamily="34" charset="-120"/>
-              </a:rPr>
-              <a:t>NVIDIA WebGPU</a:t>
-            </a:r>
-            <a:endParaRPr lang="en-US" sz="900" dirty="0"/>
-          </a:p>
-        </p:txBody>
-      </p:sp>
-      <p:sp>
-        <p:nvSpPr>
-          <p:cNvPr id="10" name="Shape 8"/>
-          <p:cNvSpPr/>
-          <p:nvPr/>
-        </p:nvSpPr>
-        <p:spPr>
-          <a:xfrm>
-            <a:off x="4023360" y="3200400"/>
-            <a:ext cx="1508760" cy="502920"/>
-          </a:xfrm>
-          <a:prstGeom prst="rect">
-            <a:avLst>
-              <a:gd name="adj" fmla="val 10909"/>
-            </a:avLst>
-          </a:prstGeom>
-          <a:solidFill>
-            <a:srgbClr val="1A2236"/>
-          </a:solidFill>
-          <a:ln/>
-        </p:spPr>
-      </p:sp>
-      <p:sp>
-        <p:nvSpPr>
-          <p:cNvPr id="11" name="Text 9"/>
-          <p:cNvSpPr/>
-          <p:nvPr/>
-        </p:nvSpPr>
-        <p:spPr>
-          <a:xfrm>
-            <a:off x="4023360" y="3200400"/>
-            <a:ext cx="1508760" cy="502920"/>
-          </a:xfrm>
-          <a:prstGeom prst="rect">
-            <a:avLst/>
-          </a:prstGeom>
-          <a:noFill/>
-          <a:ln/>
-        </p:spPr>
-        <p:txBody>
-          <a:bodyPr wrap="square" lIns="0" tIns="0" rIns="0" bIns="0" rtlCol="0" anchor="ctr"/>
-          <a:lstStyle/>
-          <a:p>
-            <a:pPr algn="ctr" indent="0" marL="0">
-              <a:buNone/>
-            </a:pPr>
-            <a:r>
-              <a:rPr lang="en-US" sz="900" b="1" dirty="0">
-                <a:solidFill>
-                  <a:srgbClr val="0079C1"/>
-                </a:solidFill>
-                <a:latin typeface="Calibri" pitchFamily="34" charset="0"/>
-                <a:ea typeface="Calibri" pitchFamily="34" charset="-122"/>
-                <a:cs typeface="Calibri" pitchFamily="34" charset="-120"/>
-              </a:rPr>
-              <a:t>ArcGIS SDK 5.0</a:t>
-            </a:r>
-            <a:endParaRPr lang="en-US" sz="900" dirty="0"/>
-          </a:p>
-        </p:txBody>
-      </p:sp>
-      <p:sp>
-        <p:nvSpPr>
-          <p:cNvPr id="12" name="Shape 10"/>
-          <p:cNvSpPr/>
-          <p:nvPr/>
-        </p:nvSpPr>
-        <p:spPr>
-          <a:xfrm>
-            <a:off x="5669280" y="3200400"/>
-            <a:ext cx="1508760" cy="502920"/>
-          </a:xfrm>
-          <a:prstGeom prst="rect">
-            <a:avLst>
-              <a:gd name="adj" fmla="val 10909"/>
-            </a:avLst>
-          </a:prstGeom>
-          <a:solidFill>
-            <a:srgbClr val="1A2236"/>
-          </a:solidFill>
-          <a:ln/>
-        </p:spPr>
-      </p:sp>
-      <p:sp>
-        <p:nvSpPr>
-          <p:cNvPr id="13" name="Text 11"/>
-          <p:cNvSpPr/>
-          <p:nvPr/>
-        </p:nvSpPr>
-        <p:spPr>
-          <a:xfrm>
-            <a:off x="5669280" y="3200400"/>
-            <a:ext cx="1508760" cy="502920"/>
-          </a:xfrm>
-          <a:prstGeom prst="rect">
-            <a:avLst/>
-          </a:prstGeom>
-          <a:noFill/>
-          <a:ln/>
-        </p:spPr>
-        <p:txBody>
-          <a:bodyPr wrap="square" lIns="0" tIns="0" rIns="0" bIns="0" rtlCol="0" anchor="ctr"/>
-          <a:lstStyle/>
-          <a:p>
-            <a:pPr algn="ctr" indent="0" marL="0">
-              <a:buNone/>
-            </a:pPr>
-            <a:r>
-              <a:rPr lang="en-US" sz="900" b="1" dirty="0">
-                <a:solidFill>
-                  <a:srgbClr val="8B5CF6"/>
-                </a:solidFill>
-                <a:latin typeface="Calibri" pitchFamily="34" charset="0"/>
-                <a:ea typeface="Calibri" pitchFamily="34" charset="-122"/>
-                <a:cs typeface="Calibri" pitchFamily="34" charset="-120"/>
-              </a:rPr>
-              <a:t>Python + xarray</a:t>
-            </a:r>
-            <a:endParaRPr lang="en-US" sz="900" dirty="0"/>
-          </a:p>
-        </p:txBody>
-      </p:sp>
-      <p:sp>
-        <p:nvSpPr>
-          <p:cNvPr id="14" name="Shape 12"/>
-          <p:cNvSpPr/>
-          <p:nvPr/>
-        </p:nvSpPr>
-        <p:spPr>
-          <a:xfrm>
-            <a:off x="7315200" y="3200400"/>
-            <a:ext cx="1508760" cy="502920"/>
-          </a:xfrm>
-          <a:prstGeom prst="rect">
-            <a:avLst>
-              <a:gd name="adj" fmla="val 10909"/>
-            </a:avLst>
-          </a:prstGeom>
-          <a:solidFill>
-            <a:srgbClr val="1A2236"/>
-          </a:solidFill>
-          <a:ln/>
-        </p:spPr>
-      </p:sp>
-      <p:sp>
-        <p:nvSpPr>
-          <p:cNvPr id="15" name="Text 13"/>
-          <p:cNvSpPr/>
-          <p:nvPr/>
-        </p:nvSpPr>
-        <p:spPr>
-          <a:xfrm>
-            <a:off x="7315200" y="3200400"/>
-            <a:ext cx="1508760" cy="502920"/>
-          </a:xfrm>
-          <a:prstGeom prst="rect">
-            <a:avLst/>
-          </a:prstGeom>
-          <a:noFill/>
-          <a:ln/>
-        </p:spPr>
-        <p:txBody>
-          <a:bodyPr wrap="square" lIns="0" tIns="0" rIns="0" bIns="0" rtlCol="0" anchor="ctr"/>
-          <a:lstStyle/>
-          <a:p>
-            <a:pPr algn="ctr" indent="0" marL="0">
-              <a:buNone/>
-            </a:pPr>
-            <a:r>
-              <a:rPr lang="en-US" sz="900" b="1" dirty="0">
-                <a:solidFill>
-                  <a:srgbClr val="94A3B8"/>
-                </a:solidFill>
-                <a:latin typeface="Calibri" pitchFamily="34" charset="0"/>
-                <a:ea typeface="Calibri" pitchFamily="34" charset="-122"/>
-                <a:cs typeface="Calibri" pitchFamily="34" charset="-120"/>
-              </a:rPr>
-              <a:t>GitHub Pages</a:t>
-            </a:r>
-            <a:endParaRPr lang="en-US" sz="900" dirty="0"/>
-          </a:p>
-        </p:txBody>
-      </p:sp>
-      <p:sp>
-        <p:nvSpPr>
-          <p:cNvPr id="16" name="Text 14"/>
-          <p:cNvSpPr/>
-          <p:nvPr/>
-        </p:nvSpPr>
-        <p:spPr>
-          <a:xfrm>
-            <a:off x="731520" y="4114800"/>
-            <a:ext cx="7315200" cy="274320"/>
-          </a:xfrm>
-          <a:prstGeom prst="rect">
-            <a:avLst/>
-          </a:prstGeom>
-          <a:noFill/>
-          <a:ln/>
-        </p:spPr>
-        <p:txBody>
-          <a:bodyPr wrap="square" lIns="0" tIns="0" rIns="0" bIns="0" rtlCol="0" anchor="ctr"/>
-          <a:lstStyle/>
-          <a:p>
-            <a:pPr indent="0" marL="0">
-              <a:buNone/>
-            </a:pPr>
-            <a:r>
-              <a:rPr lang="en-US" sz="1100" dirty="0">
-                <a:solidFill>
-                  <a:srgbClr val="94A3B8"/>
-                </a:solidFill>
-                <a:latin typeface="Calibri" pitchFamily="34" charset="0"/>
-                <a:ea typeface="Calibri" pitchFamily="34" charset="-122"/>
-                <a:cs typeface="Calibri" pitchFamily="34" charset="-120"/>
-              </a:rPr>
-              <a:t>Open source | Real NASA data | GPU-accelerated | Zero dependencies</a:t>
+              <a:t>SYSTEM ARCHITECTURE</a:t>
             </a:r>
             <a:endParaRPr lang="en-US" sz="1100" dirty="0"/>
           </a:p>
         </p:txBody>
       </p:sp>
+      <p:pic>
+        <p:nvPicPr>
+          <p:cNvPr id="4" name="Image 0" descr="C:\Users\jhon9904\aerosols-globe\diagram.svg">    </p:cNvPr>
+          <p:cNvPicPr>
+            <a:picLocks noChangeAspect="1"/>
+          </p:cNvPicPr>
+          <p:nvPr/>
+        </p:nvPicPr>
+        <p:blipFill>
+          <a:blip r:embed="rId1">
+            <a:extLst>
+              <a:ext uri="{96DAC541-7B7A-43D3-8B79-37D633B846F1}">
+                <asvg:svgBlip xmlns:asvg="http://schemas.microsoft.com/office/drawing/2016/SVG/main" r:embed="rId2"/>
+              </a:ext>
+            </a:extLst>
+          </a:blip>
+          <a:stretch>
+            <a:fillRect/>
+          </a:stretch>
+        </p:blipFill>
+        <p:spPr>
+          <a:xfrm>
+            <a:off x="228600" y="594360"/>
+            <a:ext cx="8686800" cy="4434840"/>
+          </a:xfrm>
+          <a:prstGeom prst="rect">
+            <a:avLst/>
+          </a:prstGeom>
+        </p:spPr>
+      </p:pic>
     </p:spTree>
   </p:cSld>
   <p:clrMapOvr>
